--- a/thesis/presentation/drafts/pp_figures.pptx
+++ b/thesis/presentation/drafts/pp_figures.pptx
@@ -5,9 +5,9 @@
     <p:sldMasterId id="2147483720" r:id="rId1"/>
   </p:sldMasterIdLst>
   <p:sldIdLst>
-    <p:sldId id="256" r:id="rId2"/>
-    <p:sldId id="258" r:id="rId3"/>
-    <p:sldId id="257" r:id="rId4"/>
+    <p:sldId id="257" r:id="rId2"/>
+    <p:sldId id="256" r:id="rId3"/>
+    <p:sldId id="258" r:id="rId4"/>
     <p:sldId id="259" r:id="rId5"/>
     <p:sldId id="260" r:id="rId6"/>
   </p:sldIdLst>
@@ -116,7 +116,7 @@
             <a:srgbClr val="A4A3A4"/>
           </p15:clr>
         </p15:guide>
-        <p15:guide id="4" pos="3840" userDrawn="1">
+        <p15:guide id="4" pos="5538" userDrawn="1">
           <p15:clr>
             <a:srgbClr val="A4A3A4"/>
           </p15:clr>
@@ -258,7 +258,7 @@
           <a:p>
             <a:fld id="{060A37A7-B63D-4321-98B8-DB37342017D6}" type="datetimeFigureOut">
               <a:rPr lang="en-US" smtClean="0"/>
-              <a:t>6/2/2026</a:t>
+              <a:t>6/4/2026</a:t>
             </a:fld>
             <a:endParaRPr lang="en-US"/>
           </a:p>
@@ -428,7 +428,7 @@
           <a:p>
             <a:fld id="{060A37A7-B63D-4321-98B8-DB37342017D6}" type="datetimeFigureOut">
               <a:rPr lang="en-US" smtClean="0"/>
-              <a:t>6/2/2026</a:t>
+              <a:t>6/4/2026</a:t>
             </a:fld>
             <a:endParaRPr lang="en-US"/>
           </a:p>
@@ -608,7 +608,7 @@
           <a:p>
             <a:fld id="{060A37A7-B63D-4321-98B8-DB37342017D6}" type="datetimeFigureOut">
               <a:rPr lang="en-US" smtClean="0"/>
-              <a:t>6/2/2026</a:t>
+              <a:t>6/4/2026</a:t>
             </a:fld>
             <a:endParaRPr lang="en-US"/>
           </a:p>
@@ -778,7 +778,7 @@
           <a:p>
             <a:fld id="{060A37A7-B63D-4321-98B8-DB37342017D6}" type="datetimeFigureOut">
               <a:rPr lang="en-US" smtClean="0"/>
-              <a:t>6/2/2026</a:t>
+              <a:t>6/4/2026</a:t>
             </a:fld>
             <a:endParaRPr lang="en-US"/>
           </a:p>
@@ -1024,7 +1024,7 @@
           <a:p>
             <a:fld id="{060A37A7-B63D-4321-98B8-DB37342017D6}" type="datetimeFigureOut">
               <a:rPr lang="en-US" smtClean="0"/>
-              <a:t>6/2/2026</a:t>
+              <a:t>6/4/2026</a:t>
             </a:fld>
             <a:endParaRPr lang="en-US"/>
           </a:p>
@@ -1256,7 +1256,7 @@
           <a:p>
             <a:fld id="{060A37A7-B63D-4321-98B8-DB37342017D6}" type="datetimeFigureOut">
               <a:rPr lang="en-US" smtClean="0"/>
-              <a:t>6/2/2026</a:t>
+              <a:t>6/4/2026</a:t>
             </a:fld>
             <a:endParaRPr lang="en-US"/>
           </a:p>
@@ -1623,7 +1623,7 @@
           <a:p>
             <a:fld id="{060A37A7-B63D-4321-98B8-DB37342017D6}" type="datetimeFigureOut">
               <a:rPr lang="en-US" smtClean="0"/>
-              <a:t>6/2/2026</a:t>
+              <a:t>6/4/2026</a:t>
             </a:fld>
             <a:endParaRPr lang="en-US"/>
           </a:p>
@@ -1741,7 +1741,7 @@
           <a:p>
             <a:fld id="{060A37A7-B63D-4321-98B8-DB37342017D6}" type="datetimeFigureOut">
               <a:rPr lang="en-US" smtClean="0"/>
-              <a:t>6/2/2026</a:t>
+              <a:t>6/4/2026</a:t>
             </a:fld>
             <a:endParaRPr lang="en-US"/>
           </a:p>
@@ -1836,7 +1836,7 @@
           <a:p>
             <a:fld id="{060A37A7-B63D-4321-98B8-DB37342017D6}" type="datetimeFigureOut">
               <a:rPr lang="en-US" smtClean="0"/>
-              <a:t>6/2/2026</a:t>
+              <a:t>6/4/2026</a:t>
             </a:fld>
             <a:endParaRPr lang="en-US"/>
           </a:p>
@@ -2113,7 +2113,7 @@
           <a:p>
             <a:fld id="{060A37A7-B63D-4321-98B8-DB37342017D6}" type="datetimeFigureOut">
               <a:rPr lang="en-US" smtClean="0"/>
-              <a:t>6/2/2026</a:t>
+              <a:t>6/4/2026</a:t>
             </a:fld>
             <a:endParaRPr lang="en-US"/>
           </a:p>
@@ -2370,7 +2370,7 @@
           <a:p>
             <a:fld id="{060A37A7-B63D-4321-98B8-DB37342017D6}" type="datetimeFigureOut">
               <a:rPr lang="en-US" smtClean="0"/>
-              <a:t>6/2/2026</a:t>
+              <a:t>6/4/2026</a:t>
             </a:fld>
             <a:endParaRPr lang="en-US"/>
           </a:p>
@@ -2583,7 +2583,7 @@
           <a:p>
             <a:fld id="{060A37A7-B63D-4321-98B8-DB37342017D6}" type="datetimeFigureOut">
               <a:rPr lang="en-US" smtClean="0"/>
-              <a:t>6/2/2026</a:t>
+              <a:t>6/4/2026</a:t>
             </a:fld>
             <a:endParaRPr lang="en-US"/>
           </a:p>
@@ -2976,6 +2976,88 @@
   <p:cSld>
     <p:spTree>
       <p:nvGrpSpPr>
+        <p:cNvPr id="1" name="">
+          <a:extLst>
+            <a:ext uri="{FF2B5EF4-FFF2-40B4-BE49-F238E27FC236}">
+              <a16:creationId xmlns:a16="http://schemas.microsoft.com/office/drawing/2014/main" id="{2CB718E3-9564-E108-9253-5FDAF6AC8A08}"/>
+            </a:ext>
+          </a:extLst>
+        </p:cNvPr>
+        <p:cNvGrpSpPr/>
+        <p:nvPr/>
+      </p:nvGrpSpPr>
+      <p:grpSpPr>
+        <a:xfrm>
+          <a:off x="0" y="0"/>
+          <a:ext cx="0" cy="0"/>
+          <a:chOff x="0" y="0"/>
+          <a:chExt cx="0" cy="0"/>
+        </a:xfrm>
+      </p:grpSpPr>
+      <p:pic>
+        <p:nvPicPr>
+          <p:cNvPr id="7" name="Grafik 6">
+            <a:extLst>
+              <a:ext uri="{FF2B5EF4-FFF2-40B4-BE49-F238E27FC236}">
+                <a16:creationId xmlns:a16="http://schemas.microsoft.com/office/drawing/2014/main" id="{47737836-BC39-DD7A-E174-701505C01789}"/>
+              </a:ext>
+            </a:extLst>
+          </p:cNvPr>
+          <p:cNvPicPr>
+            <a:picLocks noChangeAspect="1"/>
+          </p:cNvPicPr>
+          <p:nvPr/>
+        </p:nvPicPr>
+        <p:blipFill>
+          <a:blip r:embed="rId2">
+            <a:extLst>
+              <a:ext uri="{BEBA8EAE-BF5A-486C-A8C5-ECC9F3942E4B}">
+                <a14:imgProps xmlns:a14="http://schemas.microsoft.com/office/drawing/2010/main">
+                  <a14:imgLayer r:embed="rId3">
+                    <a14:imgEffect>
+                      <a14:saturation sat="400000"/>
+                    </a14:imgEffect>
+                  </a14:imgLayer>
+                </a14:imgProps>
+              </a:ext>
+              <a:ext uri="{28A0092B-C50C-407E-A947-70E740481C1C}">
+                <a14:useLocalDpi xmlns:a14="http://schemas.microsoft.com/office/drawing/2010/main" val="0"/>
+              </a:ext>
+            </a:extLst>
+          </a:blip>
+          <a:srcRect l="19906" t="18913" r="27584" b="7880"/>
+          <a:stretch>
+            <a:fillRect/>
+          </a:stretch>
+        </p:blipFill>
+        <p:spPr>
+          <a:xfrm>
+            <a:off x="2640000" y="188953"/>
+            <a:ext cx="6125498" cy="6480094"/>
+          </a:xfrm>
+          <a:prstGeom prst="rect">
+            <a:avLst/>
+          </a:prstGeom>
+        </p:spPr>
+      </p:pic>
+    </p:spTree>
+    <p:extLst>
+      <p:ext uri="{BB962C8B-B14F-4D97-AF65-F5344CB8AC3E}">
+        <p14:creationId xmlns:p14="http://schemas.microsoft.com/office/powerpoint/2010/main" val="1236850057"/>
+      </p:ext>
+    </p:extLst>
+  </p:cSld>
+  <p:clrMapOvr>
+    <a:masterClrMapping/>
+  </p:clrMapOvr>
+</p:sld>
+</file>
+
+<file path=ppt/slides/slide2.xml><?xml version="1.0" encoding="utf-8"?>
+<p:sld xmlns:a="http://schemas.openxmlformats.org/drawingml/2006/main" xmlns:r="http://schemas.openxmlformats.org/officeDocument/2006/relationships" xmlns:p="http://schemas.openxmlformats.org/presentationml/2006/main">
+  <p:cSld>
+    <p:spTree>
+      <p:nvGrpSpPr>
         <p:cNvPr id="1" name=""/>
         <p:cNvGrpSpPr/>
         <p:nvPr/>
@@ -4225,7 +4307,7 @@
 </p:sld>
 </file>
 
-<file path=ppt/slides/slide2.xml><?xml version="1.0" encoding="utf-8"?>
+<file path=ppt/slides/slide3.xml><?xml version="1.0" encoding="utf-8"?>
 <p:sld xmlns:a="http://schemas.openxmlformats.org/drawingml/2006/main" xmlns:r="http://schemas.openxmlformats.org/officeDocument/2006/relationships" xmlns:p="http://schemas.openxmlformats.org/presentationml/2006/main">
   <p:cSld>
     <p:spTree>
@@ -5359,88 +5441,6 @@
 </p:sld>
 </file>
 
-<file path=ppt/slides/slide3.xml><?xml version="1.0" encoding="utf-8"?>
-<p:sld xmlns:a="http://schemas.openxmlformats.org/drawingml/2006/main" xmlns:r="http://schemas.openxmlformats.org/officeDocument/2006/relationships" xmlns:p="http://schemas.openxmlformats.org/presentationml/2006/main">
-  <p:cSld>
-    <p:spTree>
-      <p:nvGrpSpPr>
-        <p:cNvPr id="1" name="">
-          <a:extLst>
-            <a:ext uri="{FF2B5EF4-FFF2-40B4-BE49-F238E27FC236}">
-              <a16:creationId xmlns:a16="http://schemas.microsoft.com/office/drawing/2014/main" id="{2CB718E3-9564-E108-9253-5FDAF6AC8A08}"/>
-            </a:ext>
-          </a:extLst>
-        </p:cNvPr>
-        <p:cNvGrpSpPr/>
-        <p:nvPr/>
-      </p:nvGrpSpPr>
-      <p:grpSpPr>
-        <a:xfrm>
-          <a:off x="0" y="0"/>
-          <a:ext cx="0" cy="0"/>
-          <a:chOff x="0" y="0"/>
-          <a:chExt cx="0" cy="0"/>
-        </a:xfrm>
-      </p:grpSpPr>
-      <p:pic>
-        <p:nvPicPr>
-          <p:cNvPr id="7" name="Grafik 6">
-            <a:extLst>
-              <a:ext uri="{FF2B5EF4-FFF2-40B4-BE49-F238E27FC236}">
-                <a16:creationId xmlns:a16="http://schemas.microsoft.com/office/drawing/2014/main" id="{47737836-BC39-DD7A-E174-701505C01789}"/>
-              </a:ext>
-            </a:extLst>
-          </p:cNvPr>
-          <p:cNvPicPr>
-            <a:picLocks noChangeAspect="1"/>
-          </p:cNvPicPr>
-          <p:nvPr/>
-        </p:nvPicPr>
-        <p:blipFill>
-          <a:blip r:embed="rId2">
-            <a:extLst>
-              <a:ext uri="{BEBA8EAE-BF5A-486C-A8C5-ECC9F3942E4B}">
-                <a14:imgProps xmlns:a14="http://schemas.microsoft.com/office/drawing/2010/main">
-                  <a14:imgLayer r:embed="rId3">
-                    <a14:imgEffect>
-                      <a14:saturation sat="400000"/>
-                    </a14:imgEffect>
-                  </a14:imgLayer>
-                </a14:imgProps>
-              </a:ext>
-              <a:ext uri="{28A0092B-C50C-407E-A947-70E740481C1C}">
-                <a14:useLocalDpi xmlns:a14="http://schemas.microsoft.com/office/drawing/2010/main" val="0"/>
-              </a:ext>
-            </a:extLst>
-          </a:blip>
-          <a:srcRect l="19906" t="18913" r="27584" b="7880"/>
-          <a:stretch>
-            <a:fillRect/>
-          </a:stretch>
-        </p:blipFill>
-        <p:spPr>
-          <a:xfrm>
-            <a:off x="2640000" y="188953"/>
-            <a:ext cx="6125498" cy="6480094"/>
-          </a:xfrm>
-          <a:prstGeom prst="rect">
-            <a:avLst/>
-          </a:prstGeom>
-        </p:spPr>
-      </p:pic>
-    </p:spTree>
-    <p:extLst>
-      <p:ext uri="{BB962C8B-B14F-4D97-AF65-F5344CB8AC3E}">
-        <p14:creationId xmlns:p14="http://schemas.microsoft.com/office/powerpoint/2010/main" val="1236850057"/>
-      </p:ext>
-    </p:extLst>
-  </p:cSld>
-  <p:clrMapOvr>
-    <a:masterClrMapping/>
-  </p:clrMapOvr>
-</p:sld>
-</file>
-
 <file path=ppt/slides/slide4.xml><?xml version="1.0" encoding="utf-8"?>
 <p:sld xmlns:a="http://schemas.openxmlformats.org/drawingml/2006/main" xmlns:r="http://schemas.openxmlformats.org/officeDocument/2006/relationships" xmlns:p="http://schemas.openxmlformats.org/presentationml/2006/main">
   <p:cSld>
@@ -5466,6 +5466,214 @@
       </p:grpSpPr>
       <p:sp>
         <p:nvSpPr>
+          <p:cNvPr id="41" name="Rechteck 40">
+            <a:extLst>
+              <a:ext uri="{FF2B5EF4-FFF2-40B4-BE49-F238E27FC236}">
+                <a16:creationId xmlns:a16="http://schemas.microsoft.com/office/drawing/2014/main" id="{3DD77001-64DB-66D8-617A-709F9F120873}"/>
+              </a:ext>
+            </a:extLst>
+          </p:cNvPr>
+          <p:cNvSpPr/>
+          <p:nvPr/>
+        </p:nvSpPr>
+        <p:spPr>
+          <a:xfrm>
+            <a:off x="1596000" y="693000"/>
+            <a:ext cx="9000000" cy="2942648"/>
+          </a:xfrm>
+          <a:prstGeom prst="rect">
+            <a:avLst/>
+          </a:prstGeom>
+          <a:solidFill>
+            <a:schemeClr val="dk1">
+              <a:alpha val="50000"/>
+            </a:schemeClr>
+          </a:solidFill>
+          <a:ln>
+            <a:noFill/>
+          </a:ln>
+        </p:spPr>
+        <p:style>
+          <a:lnRef idx="0">
+            <a:scrgbClr r="0" g="0" b="0"/>
+          </a:lnRef>
+          <a:fillRef idx="0">
+            <a:scrgbClr r="0" g="0" b="0"/>
+          </a:fillRef>
+          <a:effectRef idx="0">
+            <a:scrgbClr r="0" g="0" b="0"/>
+          </a:effectRef>
+          <a:fontRef idx="minor">
+            <a:schemeClr val="lt1"/>
+          </a:fontRef>
+        </p:style>
+        <p:txBody>
+          <a:bodyPr rtlCol="0" anchor="t"/>
+          <a:lstStyle/>
+          <a:p>
+            <a:pPr algn="ctr"/>
+            <a:r>
+              <a:rPr lang="en-US" sz="2800" b="1" dirty="0"/>
+              <a:t>Subsystem</a:t>
+            </a:r>
+          </a:p>
+        </p:txBody>
+      </p:sp>
+      <mc:AlternateContent xmlns:mc="http://schemas.openxmlformats.org/markup-compatibility/2006">
+        <mc:Choice xmlns:a14="http://schemas.microsoft.com/office/drawing/2010/main" Requires="a14">
+          <p:sp>
+            <p:nvSpPr>
+              <p:cNvPr id="8" name="Rechteck 7">
+                <a:extLst>
+                  <a:ext uri="{FF2B5EF4-FFF2-40B4-BE49-F238E27FC236}">
+                    <a16:creationId xmlns:a16="http://schemas.microsoft.com/office/drawing/2014/main" id="{C3770DE4-819A-8A22-39D5-1B0E20B5D4F8}"/>
+                  </a:ext>
+                </a:extLst>
+              </p:cNvPr>
+              <p:cNvSpPr/>
+              <p:nvPr/>
+            </p:nvSpPr>
+            <p:spPr>
+              <a:xfrm>
+                <a:off x="8256000" y="837000"/>
+                <a:ext cx="2160000" cy="2592000"/>
+              </a:xfrm>
+              <a:prstGeom prst="rect">
+                <a:avLst/>
+              </a:prstGeom>
+            </p:spPr>
+            <p:style>
+              <a:lnRef idx="1">
+                <a:schemeClr val="accent6"/>
+              </a:lnRef>
+              <a:fillRef idx="2">
+                <a:schemeClr val="accent6"/>
+              </a:fillRef>
+              <a:effectRef idx="1">
+                <a:schemeClr val="accent6"/>
+              </a:effectRef>
+              <a:fontRef idx="minor">
+                <a:schemeClr val="dk1"/>
+              </a:fontRef>
+            </p:style>
+            <p:txBody>
+              <a:bodyPr rtlCol="0" anchor="ctr"/>
+              <a:lstStyle/>
+              <a:p>
+                <a:pPr algn="ctr"/>
+                <a:r>
+                  <a:rPr lang="en-US" dirty="0"/>
+                  <a:t>Model </a:t>
+                </a:r>
+                <a14:m>
+                  <m:oMath xmlns:m="http://schemas.openxmlformats.org/officeDocument/2006/math">
+                    <m:sSub>
+                      <m:sSubPr>
+                        <m:ctrlPr>
+                          <a:rPr lang="en-US" i="1" dirty="0" smtClean="0">
+                            <a:latin typeface="Cambria Math" panose="02040503050406030204" pitchFamily="18" charset="0"/>
+                          </a:rPr>
+                        </m:ctrlPr>
+                      </m:sSubPr>
+                      <m:e>
+                        <m:r>
+                          <a:rPr lang="en-US" i="1" dirty="0" smtClean="0">
+                            <a:latin typeface="Cambria Math" panose="02040503050406030204" pitchFamily="18" charset="0"/>
+                          </a:rPr>
+                          <m:t>𝑀</m:t>
+                        </m:r>
+                      </m:e>
+                      <m:sub>
+                        <m:r>
+                          <a:rPr lang="en-US" i="1" dirty="0" smtClean="0">
+                            <a:latin typeface="Cambria Math" panose="02040503050406030204" pitchFamily="18" charset="0"/>
+                          </a:rPr>
+                          <m:t>𝐻</m:t>
+                        </m:r>
+                      </m:sub>
+                    </m:sSub>
+                  </m:oMath>
+                </a14:m>
+              </a:p>
+              <a:p>
+                <a:pPr algn="ctr"/>
+                <a:endParaRPr lang="en-US" dirty="0"/>
+              </a:p>
+              <a:p>
+                <a:pPr algn="ctr"/>
+                <a:endParaRPr lang="en-US" dirty="0"/>
+              </a:p>
+              <a:p>
+                <a:pPr algn="ctr"/>
+                <a:r>
+                  <a:rPr lang="en-US" dirty="0"/>
+                  <a:t>High Fidelity</a:t>
+                </a:r>
+              </a:p>
+              <a:p>
+                <a:pPr algn="ctr"/>
+                <a:r>
+                  <a:rPr lang="en-US" dirty="0"/>
+                  <a:t>High Cost</a:t>
+                </a:r>
+              </a:p>
+              <a:p>
+                <a:pPr algn="ctr"/>
+                <a:r>
+                  <a:rPr lang="en-US" dirty="0"/>
+                  <a:t>Local Behavior</a:t>
+                </a:r>
+              </a:p>
+            </p:txBody>
+          </p:sp>
+        </mc:Choice>
+        <mc:Fallback>
+          <p:sp>
+            <p:nvSpPr>
+              <p:cNvPr id="8" name="Rechteck 7">
+                <a:extLst>
+                  <a:ext uri="{FF2B5EF4-FFF2-40B4-BE49-F238E27FC236}">
+                    <a16:creationId xmlns:a16="http://schemas.microsoft.com/office/drawing/2014/main" id="{C3770DE4-819A-8A22-39D5-1B0E20B5D4F8}"/>
+                  </a:ext>
+                </a:extLst>
+              </p:cNvPr>
+              <p:cNvSpPr>
+                <a:spLocks noRot="1" noChangeAspect="1" noMove="1" noResize="1" noEditPoints="1" noAdjustHandles="1" noChangeArrowheads="1" noChangeShapeType="1" noTextEdit="1"/>
+              </p:cNvSpPr>
+              <p:nvPr/>
+            </p:nvSpPr>
+            <p:spPr>
+              <a:xfrm>
+                <a:off x="8256000" y="837000"/>
+                <a:ext cx="2160000" cy="2592000"/>
+              </a:xfrm>
+              <a:prstGeom prst="rect">
+                <a:avLst/>
+              </a:prstGeom>
+              <a:blipFill>
+                <a:blip r:embed="rId2"/>
+                <a:stretch>
+                  <a:fillRect/>
+                </a:stretch>
+              </a:blipFill>
+            </p:spPr>
+            <p:txBody>
+              <a:bodyPr/>
+              <a:lstStyle/>
+              <a:p>
+                <a:r>
+                  <a:rPr lang="en-US">
+                    <a:noFill/>
+                  </a:rPr>
+                  <a:t> </a:t>
+                </a:r>
+              </a:p>
+            </p:txBody>
+          </p:sp>
+        </mc:Fallback>
+      </mc:AlternateContent>
+      <p:sp>
+        <p:nvSpPr>
           <p:cNvPr id="2" name="Titel 1">
             <a:extLst>
               <a:ext uri="{FF2B5EF4-FFF2-40B4-BE49-F238E27FC236}">
@@ -5494,7 +5702,1353 @@
           <a:p>
             <a:r>
               <a:rPr lang="en-US" sz="2800" dirty="0"/>
-              <a:t>Multi-Fidelity Modeling and Runtime Model Switching</a:t>
+              <a:t>Multi-Fidelity and Runtime Switching</a:t>
+            </a:r>
+          </a:p>
+        </p:txBody>
+      </p:sp>
+      <mc:AlternateContent xmlns:mc="http://schemas.openxmlformats.org/markup-compatibility/2006">
+        <mc:Choice xmlns:a14="http://schemas.microsoft.com/office/drawing/2010/main" Requires="a14">
+          <p:sp>
+            <p:nvSpPr>
+              <p:cNvPr id="3" name="Rechteck 2">
+                <a:extLst>
+                  <a:ext uri="{FF2B5EF4-FFF2-40B4-BE49-F238E27FC236}">
+                    <a16:creationId xmlns:a16="http://schemas.microsoft.com/office/drawing/2014/main" id="{E3CA8C09-9B58-BE70-089A-711BAD66BBD1}"/>
+                  </a:ext>
+                </a:extLst>
+              </p:cNvPr>
+              <p:cNvSpPr/>
+              <p:nvPr/>
+            </p:nvSpPr>
+            <p:spPr>
+              <a:xfrm>
+                <a:off x="1776000" y="837000"/>
+                <a:ext cx="2160000" cy="2592000"/>
+              </a:xfrm>
+              <a:prstGeom prst="rect">
+                <a:avLst/>
+              </a:prstGeom>
+              <a:solidFill>
+                <a:schemeClr val="accent5">
+                  <a:alpha val="50000"/>
+                </a:schemeClr>
+              </a:solidFill>
+              <a:ln>
+                <a:noFill/>
+              </a:ln>
+            </p:spPr>
+            <p:style>
+              <a:lnRef idx="0">
+                <a:scrgbClr r="0" g="0" b="0"/>
+              </a:lnRef>
+              <a:fillRef idx="0">
+                <a:scrgbClr r="0" g="0" b="0"/>
+              </a:fillRef>
+              <a:effectRef idx="0">
+                <a:scrgbClr r="0" g="0" b="0"/>
+              </a:effectRef>
+              <a:fontRef idx="minor">
+                <a:schemeClr val="lt1"/>
+              </a:fontRef>
+            </p:style>
+            <p:txBody>
+              <a:bodyPr rtlCol="0" anchor="ctr"/>
+              <a:lstStyle/>
+              <a:p>
+                <a:pPr algn="ctr"/>
+                <a:r>
+                  <a:rPr lang="en-US" dirty="0"/>
+                  <a:t>Model </a:t>
+                </a:r>
+                <a14:m>
+                  <m:oMath xmlns:m="http://schemas.openxmlformats.org/officeDocument/2006/math">
+                    <m:sSub>
+                      <m:sSubPr>
+                        <m:ctrlPr>
+                          <a:rPr lang="en-US" i="1" dirty="0" smtClean="0">
+                            <a:latin typeface="Cambria Math" panose="02040503050406030204" pitchFamily="18" charset="0"/>
+                          </a:rPr>
+                        </m:ctrlPr>
+                      </m:sSubPr>
+                      <m:e>
+                        <m:r>
+                          <a:rPr lang="en-US" i="1" dirty="0" smtClean="0">
+                            <a:latin typeface="Cambria Math" panose="02040503050406030204" pitchFamily="18" charset="0"/>
+                          </a:rPr>
+                          <m:t>𝑀</m:t>
+                        </m:r>
+                      </m:e>
+                      <m:sub>
+                        <m:r>
+                          <a:rPr lang="en-US" i="1" dirty="0" smtClean="0">
+                            <a:latin typeface="Cambria Math" panose="02040503050406030204" pitchFamily="18" charset="0"/>
+                          </a:rPr>
+                          <m:t>𝐿</m:t>
+                        </m:r>
+                      </m:sub>
+                    </m:sSub>
+                  </m:oMath>
+                </a14:m>
+              </a:p>
+              <a:p>
+                <a:pPr algn="ctr"/>
+                <a:endParaRPr lang="en-US" dirty="0"/>
+              </a:p>
+              <a:p>
+                <a:pPr algn="ctr"/>
+                <a:endParaRPr lang="en-US" dirty="0"/>
+              </a:p>
+              <a:p>
+                <a:pPr algn="ctr"/>
+                <a:r>
+                  <a:rPr lang="en-US" dirty="0"/>
+                  <a:t>Low Fidelity</a:t>
+                </a:r>
+              </a:p>
+              <a:p>
+                <a:pPr algn="ctr"/>
+                <a:r>
+                  <a:rPr lang="en-US" dirty="0"/>
+                  <a:t>Low Cost</a:t>
+                </a:r>
+              </a:p>
+              <a:p>
+                <a:pPr algn="ctr"/>
+                <a:r>
+                  <a:rPr lang="en-US" dirty="0"/>
+                  <a:t>Global Behavior</a:t>
+                </a:r>
+              </a:p>
+            </p:txBody>
+          </p:sp>
+        </mc:Choice>
+        <mc:Fallback>
+          <p:sp>
+            <p:nvSpPr>
+              <p:cNvPr id="3" name="Rechteck 2">
+                <a:extLst>
+                  <a:ext uri="{FF2B5EF4-FFF2-40B4-BE49-F238E27FC236}">
+                    <a16:creationId xmlns:a16="http://schemas.microsoft.com/office/drawing/2014/main" id="{E3CA8C09-9B58-BE70-089A-711BAD66BBD1}"/>
+                  </a:ext>
+                </a:extLst>
+              </p:cNvPr>
+              <p:cNvSpPr>
+                <a:spLocks noRot="1" noChangeAspect="1" noMove="1" noResize="1" noEditPoints="1" noAdjustHandles="1" noChangeArrowheads="1" noChangeShapeType="1" noTextEdit="1"/>
+              </p:cNvSpPr>
+              <p:nvPr/>
+            </p:nvSpPr>
+            <p:spPr>
+              <a:xfrm>
+                <a:off x="1776000" y="837000"/>
+                <a:ext cx="2160000" cy="2592000"/>
+              </a:xfrm>
+              <a:prstGeom prst="rect">
+                <a:avLst/>
+              </a:prstGeom>
+              <a:blipFill>
+                <a:blip r:embed="rId3"/>
+                <a:stretch>
+                  <a:fillRect/>
+                </a:stretch>
+              </a:blipFill>
+              <a:ln>
+                <a:noFill/>
+              </a:ln>
+            </p:spPr>
+            <p:txBody>
+              <a:bodyPr/>
+              <a:lstStyle/>
+              <a:p>
+                <a:r>
+                  <a:rPr lang="en-US">
+                    <a:noFill/>
+                  </a:rPr>
+                  <a:t> </a:t>
+                </a:r>
+              </a:p>
+            </p:txBody>
+          </p:sp>
+        </mc:Fallback>
+      </mc:AlternateContent>
+      <p:pic>
+        <p:nvPicPr>
+          <p:cNvPr id="5" name="Grafik 4" descr="Zahnrad mit einfarbiger Füllung">
+            <a:extLst>
+              <a:ext uri="{FF2B5EF4-FFF2-40B4-BE49-F238E27FC236}">
+                <a16:creationId xmlns:a16="http://schemas.microsoft.com/office/drawing/2014/main" id="{3203F978-4CAC-18A9-B056-7C2DA7D2414C}"/>
+              </a:ext>
+            </a:extLst>
+          </p:cNvPr>
+          <p:cNvPicPr>
+            <a:picLocks noChangeAspect="1"/>
+          </p:cNvPicPr>
+          <p:nvPr/>
+        </p:nvPicPr>
+        <p:blipFill>
+          <a:blip>
+            <a:extLst>
+              <a:ext uri="{96DAC541-7B7A-43D3-8B79-37D633B846F1}">
+                <asvg:svgBlip xmlns:asvg="http://schemas.microsoft.com/office/drawing/2016/SVG/main" r:embed="rId4"/>
+              </a:ext>
+            </a:extLst>
+          </a:blip>
+          <a:stretch>
+            <a:fillRect/>
+          </a:stretch>
+        </p:blipFill>
+        <p:spPr>
+          <a:xfrm>
+            <a:off x="2586000" y="1574928"/>
+            <a:ext cx="540000" cy="540000"/>
+          </a:xfrm>
+          <a:prstGeom prst="rect">
+            <a:avLst/>
+          </a:prstGeom>
+        </p:spPr>
+      </p:pic>
+      <p:pic>
+        <p:nvPicPr>
+          <p:cNvPr id="9" name="Grafik 8" descr="Zahnrad mit einfarbiger Füllung">
+            <a:extLst>
+              <a:ext uri="{FF2B5EF4-FFF2-40B4-BE49-F238E27FC236}">
+                <a16:creationId xmlns:a16="http://schemas.microsoft.com/office/drawing/2014/main" id="{986A1030-3396-48FF-E062-65075E3C2B75}"/>
+              </a:ext>
+            </a:extLst>
+          </p:cNvPr>
+          <p:cNvPicPr>
+            <a:picLocks noChangeAspect="1"/>
+          </p:cNvPicPr>
+          <p:nvPr/>
+        </p:nvPicPr>
+        <p:blipFill>
+          <a:blip>
+            <a:extLst>
+              <a:ext uri="{96DAC541-7B7A-43D3-8B79-37D633B846F1}">
+                <asvg:svgBlip xmlns:asvg="http://schemas.microsoft.com/office/drawing/2016/SVG/main" r:embed="rId4"/>
+              </a:ext>
+            </a:extLst>
+          </a:blip>
+          <a:stretch>
+            <a:fillRect/>
+          </a:stretch>
+        </p:blipFill>
+        <p:spPr>
+          <a:xfrm rot="3969783">
+            <a:off x="9278086" y="1571086"/>
+            <a:ext cx="540000" cy="540000"/>
+          </a:xfrm>
+          <a:prstGeom prst="rect">
+            <a:avLst/>
+          </a:prstGeom>
+        </p:spPr>
+      </p:pic>
+      <p:pic>
+        <p:nvPicPr>
+          <p:cNvPr id="10" name="Grafik 9" descr="Zahnrad mit einfarbiger Füllung">
+            <a:extLst>
+              <a:ext uri="{FF2B5EF4-FFF2-40B4-BE49-F238E27FC236}">
+                <a16:creationId xmlns:a16="http://schemas.microsoft.com/office/drawing/2014/main" id="{DF4F9A6F-12F9-7BFC-D559-F52F09C80BA8}"/>
+              </a:ext>
+            </a:extLst>
+          </p:cNvPr>
+          <p:cNvPicPr>
+            <a:picLocks noChangeAspect="1"/>
+          </p:cNvPicPr>
+          <p:nvPr/>
+        </p:nvPicPr>
+        <p:blipFill>
+          <a:blip>
+            <a:extLst>
+              <a:ext uri="{96DAC541-7B7A-43D3-8B79-37D633B846F1}">
+                <asvg:svgBlip xmlns:asvg="http://schemas.microsoft.com/office/drawing/2016/SVG/main" r:embed="rId4"/>
+              </a:ext>
+            </a:extLst>
+          </a:blip>
+          <a:stretch>
+            <a:fillRect/>
+          </a:stretch>
+        </p:blipFill>
+        <p:spPr>
+          <a:xfrm>
+            <a:off x="8872078" y="1571086"/>
+            <a:ext cx="540000" cy="540000"/>
+          </a:xfrm>
+          <a:prstGeom prst="rect">
+            <a:avLst/>
+          </a:prstGeom>
+        </p:spPr>
+      </p:pic>
+      <p:cxnSp>
+        <p:nvCxnSpPr>
+          <p:cNvPr id="20" name="Gerade Verbindung mit Pfeil 19">
+            <a:extLst>
+              <a:ext uri="{FF2B5EF4-FFF2-40B4-BE49-F238E27FC236}">
+                <a16:creationId xmlns:a16="http://schemas.microsoft.com/office/drawing/2014/main" id="{B759D1AE-82B1-F9AD-F711-E913EBDD90D3}"/>
+              </a:ext>
+            </a:extLst>
+          </p:cNvPr>
+          <p:cNvCxnSpPr>
+            <a:cxnSpLocks/>
+          </p:cNvCxnSpPr>
+          <p:nvPr/>
+        </p:nvCxnSpPr>
+        <p:spPr>
+          <a:xfrm flipV="1">
+            <a:off x="1776000" y="5435760"/>
+            <a:ext cx="9000000" cy="7"/>
+          </a:xfrm>
+          <a:prstGeom prst="straightConnector1">
+            <a:avLst/>
+          </a:prstGeom>
+          <a:ln w="57150">
+            <a:solidFill>
+              <a:schemeClr val="tx1"/>
+            </a:solidFill>
+            <a:tailEnd type="triangle"/>
+          </a:ln>
+        </p:spPr>
+        <p:style>
+          <a:lnRef idx="2">
+            <a:schemeClr val="accent1"/>
+          </a:lnRef>
+          <a:fillRef idx="0">
+            <a:schemeClr val="accent1"/>
+          </a:fillRef>
+          <a:effectRef idx="1">
+            <a:schemeClr val="accent1"/>
+          </a:effectRef>
+          <a:fontRef idx="minor">
+            <a:schemeClr val="tx1"/>
+          </a:fontRef>
+        </p:style>
+      </p:cxnSp>
+      <mc:AlternateContent xmlns:mc="http://schemas.openxmlformats.org/markup-compatibility/2006">
+        <mc:Choice xmlns:a14="http://schemas.microsoft.com/office/drawing/2010/main" Requires="a14">
+          <p:sp>
+            <p:nvSpPr>
+              <p:cNvPr id="21" name="Rechteck 20">
+                <a:extLst>
+                  <a:ext uri="{FF2B5EF4-FFF2-40B4-BE49-F238E27FC236}">
+                    <a16:creationId xmlns:a16="http://schemas.microsoft.com/office/drawing/2014/main" id="{D539A008-CF89-1C99-A3AE-29151A53E519}"/>
+                  </a:ext>
+                </a:extLst>
+              </p:cNvPr>
+              <p:cNvSpPr/>
+              <p:nvPr/>
+            </p:nvSpPr>
+            <p:spPr>
+              <a:xfrm>
+                <a:off x="1776000" y="4687189"/>
+                <a:ext cx="2880000" cy="719993"/>
+              </a:xfrm>
+              <a:prstGeom prst="rect">
+                <a:avLst/>
+              </a:prstGeom>
+              <a:solidFill>
+                <a:schemeClr val="accent5">
+                  <a:alpha val="50000"/>
+                </a:schemeClr>
+              </a:solidFill>
+              <a:ln>
+                <a:noFill/>
+              </a:ln>
+            </p:spPr>
+            <p:style>
+              <a:lnRef idx="0">
+                <a:scrgbClr r="0" g="0" b="0"/>
+              </a:lnRef>
+              <a:fillRef idx="0">
+                <a:scrgbClr r="0" g="0" b="0"/>
+              </a:fillRef>
+              <a:effectRef idx="0">
+                <a:scrgbClr r="0" g="0" b="0"/>
+              </a:effectRef>
+              <a:fontRef idx="minor">
+                <a:schemeClr val="lt1"/>
+              </a:fontRef>
+            </p:style>
+            <p:txBody>
+              <a:bodyPr rtlCol="0" anchor="ctr"/>
+              <a:lstStyle/>
+              <a:p>
+                <a:pPr algn="ctr"/>
+                <a14:m>
+                  <m:oMath xmlns:m="http://schemas.openxmlformats.org/officeDocument/2006/math">
+                    <m:sSub>
+                      <m:sSubPr>
+                        <m:ctrlPr>
+                          <a:rPr lang="en-US" i="1" dirty="0" smtClean="0">
+                            <a:latin typeface="Cambria Math" panose="02040503050406030204" pitchFamily="18" charset="0"/>
+                          </a:rPr>
+                        </m:ctrlPr>
+                      </m:sSubPr>
+                      <m:e>
+                        <m:r>
+                          <a:rPr lang="en-US" i="1" dirty="0" smtClean="0">
+                            <a:latin typeface="Cambria Math" panose="02040503050406030204" pitchFamily="18" charset="0"/>
+                          </a:rPr>
+                          <m:t>𝑀</m:t>
+                        </m:r>
+                      </m:e>
+                      <m:sub>
+                        <m:r>
+                          <a:rPr lang="en-US" i="1" dirty="0" smtClean="0">
+                            <a:latin typeface="Cambria Math" panose="02040503050406030204" pitchFamily="18" charset="0"/>
+                          </a:rPr>
+                          <m:t>𝐿</m:t>
+                        </m:r>
+                      </m:sub>
+                    </m:sSub>
+                  </m:oMath>
+                </a14:m>
+                <a:r>
+                  <a:rPr lang="en-US" dirty="0"/>
+                  <a:t> active</a:t>
+                </a:r>
+              </a:p>
+            </p:txBody>
+          </p:sp>
+        </mc:Choice>
+        <mc:Fallback>
+          <p:sp>
+            <p:nvSpPr>
+              <p:cNvPr id="21" name="Rechteck 20">
+                <a:extLst>
+                  <a:ext uri="{FF2B5EF4-FFF2-40B4-BE49-F238E27FC236}">
+                    <a16:creationId xmlns:a16="http://schemas.microsoft.com/office/drawing/2014/main" id="{D539A008-CF89-1C99-A3AE-29151A53E519}"/>
+                  </a:ext>
+                </a:extLst>
+              </p:cNvPr>
+              <p:cNvSpPr>
+                <a:spLocks noRot="1" noChangeAspect="1" noMove="1" noResize="1" noEditPoints="1" noAdjustHandles="1" noChangeArrowheads="1" noChangeShapeType="1" noTextEdit="1"/>
+              </p:cNvSpPr>
+              <p:nvPr/>
+            </p:nvSpPr>
+            <p:spPr>
+              <a:xfrm>
+                <a:off x="1776000" y="4687189"/>
+                <a:ext cx="2880000" cy="719993"/>
+              </a:xfrm>
+              <a:prstGeom prst="rect">
+                <a:avLst/>
+              </a:prstGeom>
+              <a:blipFill>
+                <a:blip r:embed="rId5"/>
+                <a:stretch>
+                  <a:fillRect/>
+                </a:stretch>
+              </a:blipFill>
+              <a:ln>
+                <a:noFill/>
+              </a:ln>
+            </p:spPr>
+            <p:txBody>
+              <a:bodyPr/>
+              <a:lstStyle/>
+              <a:p>
+                <a:r>
+                  <a:rPr lang="en-US">
+                    <a:noFill/>
+                  </a:rPr>
+                  <a:t> </a:t>
+                </a:r>
+              </a:p>
+            </p:txBody>
+          </p:sp>
+        </mc:Fallback>
+      </mc:AlternateContent>
+      <mc:AlternateContent xmlns:mc="http://schemas.openxmlformats.org/markup-compatibility/2006">
+        <mc:Choice xmlns:a14="http://schemas.microsoft.com/office/drawing/2010/main" Requires="a14">
+          <p:sp>
+            <p:nvSpPr>
+              <p:cNvPr id="22" name="Rechteck 21">
+                <a:extLst>
+                  <a:ext uri="{FF2B5EF4-FFF2-40B4-BE49-F238E27FC236}">
+                    <a16:creationId xmlns:a16="http://schemas.microsoft.com/office/drawing/2014/main" id="{2B3D9172-0C84-E227-8BA7-C8B9033467FC}"/>
+                  </a:ext>
+                </a:extLst>
+              </p:cNvPr>
+              <p:cNvSpPr/>
+              <p:nvPr/>
+            </p:nvSpPr>
+            <p:spPr>
+              <a:xfrm>
+                <a:off x="4656000" y="4687189"/>
+                <a:ext cx="2886312" cy="719993"/>
+              </a:xfrm>
+              <a:prstGeom prst="rect">
+                <a:avLst/>
+              </a:prstGeom>
+              <a:solidFill>
+                <a:schemeClr val="accent6">
+                  <a:alpha val="50000"/>
+                </a:schemeClr>
+              </a:solidFill>
+              <a:ln>
+                <a:noFill/>
+              </a:ln>
+            </p:spPr>
+            <p:style>
+              <a:lnRef idx="0">
+                <a:scrgbClr r="0" g="0" b="0"/>
+              </a:lnRef>
+              <a:fillRef idx="0">
+                <a:scrgbClr r="0" g="0" b="0"/>
+              </a:fillRef>
+              <a:effectRef idx="0">
+                <a:scrgbClr r="0" g="0" b="0"/>
+              </a:effectRef>
+              <a:fontRef idx="minor">
+                <a:schemeClr val="lt1"/>
+              </a:fontRef>
+            </p:style>
+            <p:txBody>
+              <a:bodyPr rtlCol="0" anchor="ctr"/>
+              <a:lstStyle/>
+              <a:p>
+                <a:pPr algn="ctr"/>
+                <a14:m>
+                  <m:oMath xmlns:m="http://schemas.openxmlformats.org/officeDocument/2006/math">
+                    <m:sSub>
+                      <m:sSubPr>
+                        <m:ctrlPr>
+                          <a:rPr lang="en-US" i="1" dirty="0" smtClean="0">
+                            <a:latin typeface="Cambria Math" panose="02040503050406030204" pitchFamily="18" charset="0"/>
+                          </a:rPr>
+                        </m:ctrlPr>
+                      </m:sSubPr>
+                      <m:e>
+                        <m:r>
+                          <a:rPr lang="en-US" i="1" dirty="0">
+                            <a:latin typeface="Cambria Math" panose="02040503050406030204" pitchFamily="18" charset="0"/>
+                          </a:rPr>
+                          <m:t>𝑀</m:t>
+                        </m:r>
+                      </m:e>
+                      <m:sub>
+                        <m:r>
+                          <a:rPr lang="de-DE" b="0" i="1" dirty="0" smtClean="0">
+                            <a:latin typeface="Cambria Math" panose="02040503050406030204" pitchFamily="18" charset="0"/>
+                          </a:rPr>
+                          <m:t>𝐻</m:t>
+                        </m:r>
+                      </m:sub>
+                    </m:sSub>
+                  </m:oMath>
+                </a14:m>
+                <a:r>
+                  <a:rPr lang="en-US" dirty="0"/>
+                  <a:t> active</a:t>
+                </a:r>
+              </a:p>
+            </p:txBody>
+          </p:sp>
+        </mc:Choice>
+        <mc:Fallback>
+          <p:sp>
+            <p:nvSpPr>
+              <p:cNvPr id="22" name="Rechteck 21">
+                <a:extLst>
+                  <a:ext uri="{FF2B5EF4-FFF2-40B4-BE49-F238E27FC236}">
+                    <a16:creationId xmlns:a16="http://schemas.microsoft.com/office/drawing/2014/main" id="{2B3D9172-0C84-E227-8BA7-C8B9033467FC}"/>
+                  </a:ext>
+                </a:extLst>
+              </p:cNvPr>
+              <p:cNvSpPr>
+                <a:spLocks noRot="1" noChangeAspect="1" noMove="1" noResize="1" noEditPoints="1" noAdjustHandles="1" noChangeArrowheads="1" noChangeShapeType="1" noTextEdit="1"/>
+              </p:cNvSpPr>
+              <p:nvPr/>
+            </p:nvSpPr>
+            <p:spPr>
+              <a:xfrm>
+                <a:off x="4656000" y="4687189"/>
+                <a:ext cx="2886312" cy="719993"/>
+              </a:xfrm>
+              <a:prstGeom prst="rect">
+                <a:avLst/>
+              </a:prstGeom>
+              <a:blipFill>
+                <a:blip r:embed="rId6"/>
+                <a:stretch>
+                  <a:fillRect/>
+                </a:stretch>
+              </a:blipFill>
+              <a:ln>
+                <a:noFill/>
+              </a:ln>
+            </p:spPr>
+            <p:txBody>
+              <a:bodyPr/>
+              <a:lstStyle/>
+              <a:p>
+                <a:r>
+                  <a:rPr lang="en-US">
+                    <a:noFill/>
+                  </a:rPr>
+                  <a:t> </a:t>
+                </a:r>
+              </a:p>
+            </p:txBody>
+          </p:sp>
+        </mc:Fallback>
+      </mc:AlternateContent>
+      <mc:AlternateContent xmlns:mc="http://schemas.openxmlformats.org/markup-compatibility/2006">
+        <mc:Choice xmlns:a14="http://schemas.microsoft.com/office/drawing/2010/main" Requires="a14">
+          <p:sp>
+            <p:nvSpPr>
+              <p:cNvPr id="23" name="Rechteck 22">
+                <a:extLst>
+                  <a:ext uri="{FF2B5EF4-FFF2-40B4-BE49-F238E27FC236}">
+                    <a16:creationId xmlns:a16="http://schemas.microsoft.com/office/drawing/2014/main" id="{1F4B9B2F-F633-D3E0-3CC2-B07481E18A84}"/>
+                  </a:ext>
+                </a:extLst>
+              </p:cNvPr>
+              <p:cNvSpPr/>
+              <p:nvPr/>
+            </p:nvSpPr>
+            <p:spPr>
+              <a:xfrm>
+                <a:off x="7542312" y="4687189"/>
+                <a:ext cx="2886312" cy="719993"/>
+              </a:xfrm>
+              <a:prstGeom prst="rect">
+                <a:avLst/>
+              </a:prstGeom>
+              <a:solidFill>
+                <a:schemeClr val="accent5">
+                  <a:alpha val="50000"/>
+                </a:schemeClr>
+              </a:solidFill>
+              <a:ln>
+                <a:noFill/>
+              </a:ln>
+            </p:spPr>
+            <p:style>
+              <a:lnRef idx="0">
+                <a:scrgbClr r="0" g="0" b="0"/>
+              </a:lnRef>
+              <a:fillRef idx="0">
+                <a:scrgbClr r="0" g="0" b="0"/>
+              </a:fillRef>
+              <a:effectRef idx="0">
+                <a:scrgbClr r="0" g="0" b="0"/>
+              </a:effectRef>
+              <a:fontRef idx="minor">
+                <a:schemeClr val="lt1"/>
+              </a:fontRef>
+            </p:style>
+            <p:txBody>
+              <a:bodyPr rtlCol="0" anchor="ctr"/>
+              <a:lstStyle/>
+              <a:p>
+                <a:pPr algn="ctr"/>
+                <a14:m>
+                  <m:oMath xmlns:m="http://schemas.openxmlformats.org/officeDocument/2006/math">
+                    <m:sSub>
+                      <m:sSubPr>
+                        <m:ctrlPr>
+                          <a:rPr lang="en-US" i="1" dirty="0">
+                            <a:latin typeface="Cambria Math" panose="02040503050406030204" pitchFamily="18" charset="0"/>
+                          </a:rPr>
+                        </m:ctrlPr>
+                      </m:sSubPr>
+                      <m:e>
+                        <m:r>
+                          <a:rPr lang="en-US" i="1" dirty="0">
+                            <a:latin typeface="Cambria Math" panose="02040503050406030204" pitchFamily="18" charset="0"/>
+                          </a:rPr>
+                          <m:t>𝑀</m:t>
+                        </m:r>
+                      </m:e>
+                      <m:sub>
+                        <m:r>
+                          <a:rPr lang="en-US" i="1" dirty="0">
+                            <a:latin typeface="Cambria Math" panose="02040503050406030204" pitchFamily="18" charset="0"/>
+                          </a:rPr>
+                          <m:t>𝐿</m:t>
+                        </m:r>
+                      </m:sub>
+                    </m:sSub>
+                  </m:oMath>
+                </a14:m>
+                <a:r>
+                  <a:rPr lang="en-US" dirty="0"/>
+                  <a:t> active</a:t>
+                </a:r>
+              </a:p>
+            </p:txBody>
+          </p:sp>
+        </mc:Choice>
+        <mc:Fallback>
+          <p:sp>
+            <p:nvSpPr>
+              <p:cNvPr id="23" name="Rechteck 22">
+                <a:extLst>
+                  <a:ext uri="{FF2B5EF4-FFF2-40B4-BE49-F238E27FC236}">
+                    <a16:creationId xmlns:a16="http://schemas.microsoft.com/office/drawing/2014/main" id="{1F4B9B2F-F633-D3E0-3CC2-B07481E18A84}"/>
+                  </a:ext>
+                </a:extLst>
+              </p:cNvPr>
+              <p:cNvSpPr>
+                <a:spLocks noRot="1" noChangeAspect="1" noMove="1" noResize="1" noEditPoints="1" noAdjustHandles="1" noChangeArrowheads="1" noChangeShapeType="1" noTextEdit="1"/>
+              </p:cNvSpPr>
+              <p:nvPr/>
+            </p:nvSpPr>
+            <p:spPr>
+              <a:xfrm>
+                <a:off x="7542312" y="4687189"/>
+                <a:ext cx="2886312" cy="719993"/>
+              </a:xfrm>
+              <a:prstGeom prst="rect">
+                <a:avLst/>
+              </a:prstGeom>
+              <a:blipFill>
+                <a:blip r:embed="rId7"/>
+                <a:stretch>
+                  <a:fillRect/>
+                </a:stretch>
+              </a:blipFill>
+              <a:ln>
+                <a:noFill/>
+              </a:ln>
+            </p:spPr>
+            <p:txBody>
+              <a:bodyPr/>
+              <a:lstStyle/>
+              <a:p>
+                <a:r>
+                  <a:rPr lang="en-US">
+                    <a:noFill/>
+                  </a:rPr>
+                  <a:t> </a:t>
+                </a:r>
+              </a:p>
+            </p:txBody>
+          </p:sp>
+        </mc:Fallback>
+      </mc:AlternateContent>
+      <mc:AlternateContent xmlns:mc="http://schemas.openxmlformats.org/markup-compatibility/2006">
+        <mc:Choice xmlns:a14="http://schemas.microsoft.com/office/drawing/2010/main" Requires="a14">
+          <p:sp>
+            <p:nvSpPr>
+              <p:cNvPr id="25" name="Textfeld 24">
+                <a:extLst>
+                  <a:ext uri="{FF2B5EF4-FFF2-40B4-BE49-F238E27FC236}">
+                    <a16:creationId xmlns:a16="http://schemas.microsoft.com/office/drawing/2014/main" id="{D9EDB00B-32F1-375E-9744-B27D5F45416B}"/>
+                  </a:ext>
+                </a:extLst>
+              </p:cNvPr>
+              <p:cNvSpPr txBox="1"/>
+              <p:nvPr/>
+            </p:nvSpPr>
+            <p:spPr>
+              <a:xfrm>
+                <a:off x="10596000" y="5407182"/>
+                <a:ext cx="360000" cy="369332"/>
+              </a:xfrm>
+              <a:prstGeom prst="rect">
+                <a:avLst/>
+              </a:prstGeom>
+              <a:noFill/>
+            </p:spPr>
+            <p:txBody>
+              <a:bodyPr wrap="square" rtlCol="0">
+                <a:spAutoFit/>
+              </a:bodyPr>
+              <a:lstStyle/>
+              <a:p>
+                <a:pPr algn="ctr"/>
+                <a14:m>
+                  <m:oMathPara xmlns:m="http://schemas.openxmlformats.org/officeDocument/2006/math">
+                    <m:oMathParaPr>
+                      <m:jc m:val="centerGroup"/>
+                    </m:oMathParaPr>
+                    <m:oMath xmlns:m="http://schemas.openxmlformats.org/officeDocument/2006/math">
+                      <m:r>
+                        <a:rPr lang="en-US" i="1" dirty="0" smtClean="0">
+                          <a:latin typeface="Cambria Math" panose="02040503050406030204" pitchFamily="18" charset="0"/>
+                        </a:rPr>
+                        <m:t>𝑡</m:t>
+                      </m:r>
+                    </m:oMath>
+                  </m:oMathPara>
+                </a14:m>
+                <a:endParaRPr lang="en-US" dirty="0"/>
+              </a:p>
+            </p:txBody>
+          </p:sp>
+        </mc:Choice>
+        <mc:Fallback>
+          <p:sp>
+            <p:nvSpPr>
+              <p:cNvPr id="25" name="Textfeld 24">
+                <a:extLst>
+                  <a:ext uri="{FF2B5EF4-FFF2-40B4-BE49-F238E27FC236}">
+                    <a16:creationId xmlns:a16="http://schemas.microsoft.com/office/drawing/2014/main" id="{D9EDB00B-32F1-375E-9744-B27D5F45416B}"/>
+                  </a:ext>
+                </a:extLst>
+              </p:cNvPr>
+              <p:cNvSpPr txBox="1">
+                <a:spLocks noRot="1" noChangeAspect="1" noMove="1" noResize="1" noEditPoints="1" noAdjustHandles="1" noChangeArrowheads="1" noChangeShapeType="1" noTextEdit="1"/>
+              </p:cNvSpPr>
+              <p:nvPr/>
+            </p:nvSpPr>
+            <p:spPr>
+              <a:xfrm>
+                <a:off x="10596000" y="5407182"/>
+                <a:ext cx="360000" cy="369332"/>
+              </a:xfrm>
+              <a:prstGeom prst="rect">
+                <a:avLst/>
+              </a:prstGeom>
+              <a:blipFill>
+                <a:blip r:embed="rId8"/>
+                <a:stretch>
+                  <a:fillRect/>
+                </a:stretch>
+              </a:blipFill>
+            </p:spPr>
+            <p:txBody>
+              <a:bodyPr/>
+              <a:lstStyle/>
+              <a:p>
+                <a:r>
+                  <a:rPr lang="en-US">
+                    <a:noFill/>
+                  </a:rPr>
+                  <a:t> </a:t>
+                </a:r>
+              </a:p>
+            </p:txBody>
+          </p:sp>
+        </mc:Fallback>
+      </mc:AlternateContent>
+      <p:cxnSp>
+        <p:nvCxnSpPr>
+          <p:cNvPr id="27" name="Gerader Verbinder 26">
+            <a:extLst>
+              <a:ext uri="{FF2B5EF4-FFF2-40B4-BE49-F238E27FC236}">
+                <a16:creationId xmlns:a16="http://schemas.microsoft.com/office/drawing/2014/main" id="{325279AB-B277-1421-1DE9-A094CAD779EA}"/>
+              </a:ext>
+            </a:extLst>
+          </p:cNvPr>
+          <p:cNvCxnSpPr>
+            <a:cxnSpLocks/>
+          </p:cNvCxnSpPr>
+          <p:nvPr/>
+        </p:nvCxnSpPr>
+        <p:spPr>
+          <a:xfrm>
+            <a:off x="4656000" y="4436904"/>
+            <a:ext cx="0" cy="1186285"/>
+          </a:xfrm>
+          <a:prstGeom prst="line">
+            <a:avLst/>
+          </a:prstGeom>
+          <a:ln w="28575">
+            <a:solidFill>
+              <a:srgbClr val="00B0F0"/>
+            </a:solidFill>
+            <a:prstDash val="sysDash"/>
+          </a:ln>
+        </p:spPr>
+        <p:style>
+          <a:lnRef idx="2">
+            <a:schemeClr val="accent1"/>
+          </a:lnRef>
+          <a:fillRef idx="0">
+            <a:schemeClr val="accent1"/>
+          </a:fillRef>
+          <a:effectRef idx="1">
+            <a:schemeClr val="accent1"/>
+          </a:effectRef>
+          <a:fontRef idx="minor">
+            <a:schemeClr val="tx1"/>
+          </a:fontRef>
+        </p:style>
+      </p:cxnSp>
+      <p:cxnSp>
+        <p:nvCxnSpPr>
+          <p:cNvPr id="30" name="Gerader Verbinder 29">
+            <a:extLst>
+              <a:ext uri="{FF2B5EF4-FFF2-40B4-BE49-F238E27FC236}">
+                <a16:creationId xmlns:a16="http://schemas.microsoft.com/office/drawing/2014/main" id="{69F4883A-FA34-C56F-5B40-13AC5DD02F0B}"/>
+              </a:ext>
+            </a:extLst>
+          </p:cNvPr>
+          <p:cNvCxnSpPr>
+            <a:cxnSpLocks/>
+          </p:cNvCxnSpPr>
+          <p:nvPr/>
+        </p:nvCxnSpPr>
+        <p:spPr>
+          <a:xfrm>
+            <a:off x="7561285" y="4436903"/>
+            <a:ext cx="831" cy="1186285"/>
+          </a:xfrm>
+          <a:prstGeom prst="line">
+            <a:avLst/>
+          </a:prstGeom>
+          <a:ln w="28575">
+            <a:solidFill>
+              <a:srgbClr val="00B0F0"/>
+            </a:solidFill>
+            <a:prstDash val="sysDash"/>
+          </a:ln>
+        </p:spPr>
+        <p:style>
+          <a:lnRef idx="2">
+            <a:schemeClr val="accent1"/>
+          </a:lnRef>
+          <a:fillRef idx="0">
+            <a:schemeClr val="accent1"/>
+          </a:fillRef>
+          <a:effectRef idx="1">
+            <a:schemeClr val="accent1"/>
+          </a:effectRef>
+          <a:fontRef idx="minor">
+            <a:schemeClr val="tx1"/>
+          </a:fontRef>
+        </p:style>
+      </p:cxnSp>
+      <p:cxnSp>
+        <p:nvCxnSpPr>
+          <p:cNvPr id="37" name="Gerade Verbindung mit Pfeil 36">
+            <a:extLst>
+              <a:ext uri="{FF2B5EF4-FFF2-40B4-BE49-F238E27FC236}">
+                <a16:creationId xmlns:a16="http://schemas.microsoft.com/office/drawing/2014/main" id="{E15C23E2-DA25-E17C-FFA8-C0740AD58203}"/>
+              </a:ext>
+            </a:extLst>
+          </p:cNvPr>
+          <p:cNvCxnSpPr/>
+          <p:nvPr/>
+        </p:nvCxnSpPr>
+        <p:spPr>
+          <a:xfrm>
+            <a:off x="4680676" y="5589184"/>
+            <a:ext cx="2885481" cy="0"/>
+          </a:xfrm>
+          <a:prstGeom prst="straightConnector1">
+            <a:avLst/>
+          </a:prstGeom>
+          <a:ln w="28575">
+            <a:solidFill>
+              <a:srgbClr val="FF0000"/>
+            </a:solidFill>
+            <a:headEnd type="triangle"/>
+            <a:tailEnd type="triangle"/>
+          </a:ln>
+        </p:spPr>
+        <p:style>
+          <a:lnRef idx="2">
+            <a:schemeClr val="accent1"/>
+          </a:lnRef>
+          <a:fillRef idx="0">
+            <a:schemeClr val="accent1"/>
+          </a:fillRef>
+          <a:effectRef idx="1">
+            <a:schemeClr val="accent1"/>
+          </a:effectRef>
+          <a:fontRef idx="minor">
+            <a:schemeClr val="tx1"/>
+          </a:fontRef>
+        </p:style>
+      </p:cxnSp>
+      <p:sp>
+        <p:nvSpPr>
+          <p:cNvPr id="38" name="Rechteck 37">
+            <a:extLst>
+              <a:ext uri="{FF2B5EF4-FFF2-40B4-BE49-F238E27FC236}">
+                <a16:creationId xmlns:a16="http://schemas.microsoft.com/office/drawing/2014/main" id="{AA88F49E-68FF-8BCB-6E19-E0F6E0C85C3D}"/>
+              </a:ext>
+            </a:extLst>
+          </p:cNvPr>
+          <p:cNvSpPr/>
+          <p:nvPr/>
+        </p:nvSpPr>
+        <p:spPr>
+          <a:xfrm>
+            <a:off x="4797259" y="5651669"/>
+            <a:ext cx="2597481" cy="369331"/>
+          </a:xfrm>
+          <a:prstGeom prst="rect">
+            <a:avLst/>
+          </a:prstGeom>
+          <a:ln w="28575">
+            <a:solidFill>
+              <a:srgbClr val="FF0000"/>
+            </a:solidFill>
+          </a:ln>
+        </p:spPr>
+        <p:style>
+          <a:lnRef idx="2">
+            <a:schemeClr val="dk1"/>
+          </a:lnRef>
+          <a:fillRef idx="1">
+            <a:schemeClr val="lt1"/>
+          </a:fillRef>
+          <a:effectRef idx="0">
+            <a:schemeClr val="dk1"/>
+          </a:effectRef>
+          <a:fontRef idx="minor">
+            <a:schemeClr val="dk1"/>
+          </a:fontRef>
+        </p:style>
+        <p:txBody>
+          <a:bodyPr rtlCol="0" anchor="ctr"/>
+          <a:lstStyle/>
+          <a:p>
+            <a:pPr algn="ctr"/>
+            <a:r>
+              <a:rPr lang="en-US" sz="1600" dirty="0"/>
+              <a:t>High-fidelity interest region</a:t>
+            </a:r>
+          </a:p>
+        </p:txBody>
+      </p:sp>
+      <p:sp>
+        <p:nvSpPr>
+          <p:cNvPr id="40" name="Rechteck 39">
+            <a:extLst>
+              <a:ext uri="{FF2B5EF4-FFF2-40B4-BE49-F238E27FC236}">
+                <a16:creationId xmlns:a16="http://schemas.microsoft.com/office/drawing/2014/main" id="{97B8B713-2DFD-C366-5D18-DA7D41BABEA8}"/>
+              </a:ext>
+            </a:extLst>
+          </p:cNvPr>
+          <p:cNvSpPr/>
+          <p:nvPr/>
+        </p:nvSpPr>
+        <p:spPr>
+          <a:xfrm>
+            <a:off x="1776000" y="6264295"/>
+            <a:ext cx="3456000" cy="369331"/>
+          </a:xfrm>
+          <a:prstGeom prst="rect">
+            <a:avLst/>
+          </a:prstGeom>
+          <a:ln w="28575">
+            <a:solidFill>
+              <a:srgbClr val="00B0F0"/>
+            </a:solidFill>
+            <a:prstDash val="sysDash"/>
+          </a:ln>
+        </p:spPr>
+        <p:style>
+          <a:lnRef idx="2">
+            <a:schemeClr val="dk1"/>
+          </a:lnRef>
+          <a:fillRef idx="1">
+            <a:schemeClr val="lt1"/>
+          </a:fillRef>
+          <a:effectRef idx="0">
+            <a:schemeClr val="dk1"/>
+          </a:effectRef>
+          <a:fontRef idx="minor">
+            <a:schemeClr val="dk1"/>
+          </a:fontRef>
+        </p:style>
+        <p:txBody>
+          <a:bodyPr rtlCol="0" anchor="ctr"/>
+          <a:lstStyle/>
+          <a:p>
+            <a:r>
+              <a:rPr lang="en-US" sz="1200" b="1" i="1" dirty="0"/>
+              <a:t>At switch: </a:t>
+            </a:r>
+            <a:r>
+              <a:rPr lang="en-US" sz="1200" i="1" dirty="0"/>
+              <a:t>State is transferred between models</a:t>
+            </a:r>
+          </a:p>
+        </p:txBody>
+      </p:sp>
+      <p:cxnSp>
+        <p:nvCxnSpPr>
+          <p:cNvPr id="43" name="Gerade Verbindung mit Pfeil 42">
+            <a:extLst>
+              <a:ext uri="{FF2B5EF4-FFF2-40B4-BE49-F238E27FC236}">
+                <a16:creationId xmlns:a16="http://schemas.microsoft.com/office/drawing/2014/main" id="{E42063D6-BCC8-31EA-C01F-5F85218D90DE}"/>
+              </a:ext>
+            </a:extLst>
+          </p:cNvPr>
+          <p:cNvCxnSpPr/>
+          <p:nvPr/>
+        </p:nvCxnSpPr>
+        <p:spPr>
+          <a:xfrm>
+            <a:off x="3936000" y="1989000"/>
+            <a:ext cx="4320000" cy="0"/>
+          </a:xfrm>
+          <a:prstGeom prst="straightConnector1">
+            <a:avLst/>
+          </a:prstGeom>
+          <a:ln w="38100">
+            <a:solidFill>
+              <a:srgbClr val="00B0F0"/>
+            </a:solidFill>
+            <a:tailEnd type="triangle"/>
+          </a:ln>
+        </p:spPr>
+        <p:style>
+          <a:lnRef idx="2">
+            <a:schemeClr val="accent1"/>
+          </a:lnRef>
+          <a:fillRef idx="0">
+            <a:schemeClr val="accent1"/>
+          </a:fillRef>
+          <a:effectRef idx="1">
+            <a:schemeClr val="accent1"/>
+          </a:effectRef>
+          <a:fontRef idx="minor">
+            <a:schemeClr val="tx1"/>
+          </a:fontRef>
+        </p:style>
+      </p:cxnSp>
+      <p:cxnSp>
+        <p:nvCxnSpPr>
+          <p:cNvPr id="44" name="Gerade Verbindung mit Pfeil 43">
+            <a:extLst>
+              <a:ext uri="{FF2B5EF4-FFF2-40B4-BE49-F238E27FC236}">
+                <a16:creationId xmlns:a16="http://schemas.microsoft.com/office/drawing/2014/main" id="{62E73E37-5A95-6EE7-73BE-06E05B23CA9D}"/>
+              </a:ext>
+            </a:extLst>
+          </p:cNvPr>
+          <p:cNvCxnSpPr/>
+          <p:nvPr/>
+        </p:nvCxnSpPr>
+        <p:spPr>
+          <a:xfrm>
+            <a:off x="3936000" y="2709000"/>
+            <a:ext cx="4320000" cy="0"/>
+          </a:xfrm>
+          <a:prstGeom prst="straightConnector1">
+            <a:avLst/>
+          </a:prstGeom>
+          <a:ln w="38100">
+            <a:solidFill>
+              <a:srgbClr val="00B0F0"/>
+            </a:solidFill>
+            <a:headEnd type="triangle" w="med" len="med"/>
+            <a:tailEnd type="none" w="med" len="med"/>
+          </a:ln>
+        </p:spPr>
+        <p:style>
+          <a:lnRef idx="2">
+            <a:schemeClr val="accent1"/>
+          </a:lnRef>
+          <a:fillRef idx="0">
+            <a:schemeClr val="accent1"/>
+          </a:fillRef>
+          <a:effectRef idx="1">
+            <a:schemeClr val="accent1"/>
+          </a:effectRef>
+          <a:fontRef idx="minor">
+            <a:schemeClr val="tx1"/>
+          </a:fontRef>
+        </p:style>
+      </p:cxnSp>
+      <p:sp>
+        <p:nvSpPr>
+          <p:cNvPr id="45" name="Rechteck 44">
+            <a:extLst>
+              <a:ext uri="{FF2B5EF4-FFF2-40B4-BE49-F238E27FC236}">
+                <a16:creationId xmlns:a16="http://schemas.microsoft.com/office/drawing/2014/main" id="{1C7E7326-8878-C223-060E-4EBD30E060F6}"/>
+              </a:ext>
+            </a:extLst>
+          </p:cNvPr>
+          <p:cNvSpPr/>
+          <p:nvPr/>
+        </p:nvSpPr>
+        <p:spPr>
+          <a:xfrm>
+            <a:off x="5236850" y="2152247"/>
+            <a:ext cx="1718297" cy="369331"/>
+          </a:xfrm>
+          <a:prstGeom prst="rect">
+            <a:avLst/>
+          </a:prstGeom>
+          <a:noFill/>
+          <a:ln w="28575">
+            <a:solidFill>
+              <a:srgbClr val="00B0F0"/>
+            </a:solidFill>
+          </a:ln>
+        </p:spPr>
+        <p:style>
+          <a:lnRef idx="2">
+            <a:schemeClr val="dk1"/>
+          </a:lnRef>
+          <a:fillRef idx="1">
+            <a:schemeClr val="lt1"/>
+          </a:fillRef>
+          <a:effectRef idx="0">
+            <a:schemeClr val="dk1"/>
+          </a:effectRef>
+          <a:fontRef idx="minor">
+            <a:schemeClr val="dk1"/>
+          </a:fontRef>
+        </p:style>
+        <p:txBody>
+          <a:bodyPr rtlCol="0" anchor="ctr"/>
+          <a:lstStyle/>
+          <a:p>
+            <a:pPr algn="ctr"/>
+            <a:r>
+              <a:rPr lang="en-US" b="1" i="1" dirty="0">
+                <a:solidFill>
+                  <a:schemeClr val="bg1"/>
+                </a:solidFill>
+              </a:rPr>
+              <a:t>State transfer</a:t>
+            </a:r>
+          </a:p>
+        </p:txBody>
+      </p:sp>
+      <p:cxnSp>
+        <p:nvCxnSpPr>
+          <p:cNvPr id="60" name="Gerader Verbinder 59">
+            <a:extLst>
+              <a:ext uri="{FF2B5EF4-FFF2-40B4-BE49-F238E27FC236}">
+                <a16:creationId xmlns:a16="http://schemas.microsoft.com/office/drawing/2014/main" id="{0C25B9C0-2AE4-C5D4-2904-AC89446405B1}"/>
+              </a:ext>
+            </a:extLst>
+          </p:cNvPr>
+          <p:cNvCxnSpPr>
+            <a:cxnSpLocks/>
+          </p:cNvCxnSpPr>
+          <p:nvPr/>
+        </p:nvCxnSpPr>
+        <p:spPr>
+          <a:xfrm>
+            <a:off x="336000" y="3861000"/>
+            <a:ext cx="10755416" cy="0"/>
+          </a:xfrm>
+          <a:prstGeom prst="line">
+            <a:avLst/>
+          </a:prstGeom>
+          <a:ln>
+            <a:solidFill>
+              <a:schemeClr val="bg1">
+                <a:lumMod val="65000"/>
+              </a:schemeClr>
+            </a:solidFill>
+            <a:prstDash val="sysDot"/>
+          </a:ln>
+        </p:spPr>
+        <p:style>
+          <a:lnRef idx="2">
+            <a:schemeClr val="accent1"/>
+          </a:lnRef>
+          <a:fillRef idx="0">
+            <a:schemeClr val="accent1"/>
+          </a:fillRef>
+          <a:effectRef idx="1">
+            <a:schemeClr val="accent1"/>
+          </a:effectRef>
+          <a:fontRef idx="minor">
+            <a:schemeClr val="tx1"/>
+          </a:fontRef>
+        </p:style>
+      </p:cxnSp>
+      <p:sp>
+        <p:nvSpPr>
+          <p:cNvPr id="63" name="Rechteck 62">
+            <a:extLst>
+              <a:ext uri="{FF2B5EF4-FFF2-40B4-BE49-F238E27FC236}">
+                <a16:creationId xmlns:a16="http://schemas.microsoft.com/office/drawing/2014/main" id="{FC9371F2-DD58-D633-582A-F96BC64EBBF4}"/>
+              </a:ext>
+            </a:extLst>
+          </p:cNvPr>
+          <p:cNvSpPr/>
+          <p:nvPr/>
+        </p:nvSpPr>
+        <p:spPr>
+          <a:xfrm>
+            <a:off x="213589" y="1596595"/>
+            <a:ext cx="1246474" cy="539999"/>
+          </a:xfrm>
+          <a:prstGeom prst="rect">
+            <a:avLst/>
+          </a:prstGeom>
+          <a:noFill/>
+          <a:ln w="28575">
+            <a:noFill/>
+          </a:ln>
+        </p:spPr>
+        <p:style>
+          <a:lnRef idx="2">
+            <a:schemeClr val="dk1"/>
+          </a:lnRef>
+          <a:fillRef idx="1">
+            <a:schemeClr val="lt1"/>
+          </a:fillRef>
+          <a:effectRef idx="0">
+            <a:schemeClr val="dk1"/>
+          </a:effectRef>
+          <a:fontRef idx="minor">
+            <a:schemeClr val="dk1"/>
+          </a:fontRef>
+        </p:style>
+        <p:txBody>
+          <a:bodyPr rtlCol="0" anchor="ctr"/>
+          <a:lstStyle/>
+          <a:p>
+            <a:pPr algn="ctr"/>
+            <a:r>
+              <a:rPr lang="en-US" sz="1600" b="1" dirty="0"/>
+              <a:t>Definition</a:t>
+            </a:r>
+          </a:p>
+        </p:txBody>
+      </p:sp>
+      <p:sp>
+        <p:nvSpPr>
+          <p:cNvPr id="65" name="Rechteck 64">
+            <a:extLst>
+              <a:ext uri="{FF2B5EF4-FFF2-40B4-BE49-F238E27FC236}">
+                <a16:creationId xmlns:a16="http://schemas.microsoft.com/office/drawing/2014/main" id="{5977087C-41B0-5E82-F7E4-32B3025E5E8E}"/>
+              </a:ext>
+            </a:extLst>
+          </p:cNvPr>
+          <p:cNvSpPr/>
+          <p:nvPr/>
+        </p:nvSpPr>
+        <p:spPr>
+          <a:xfrm>
+            <a:off x="213589" y="4777185"/>
+            <a:ext cx="1246474" cy="539999"/>
+          </a:xfrm>
+          <a:prstGeom prst="rect">
+            <a:avLst/>
+          </a:prstGeom>
+          <a:noFill/>
+          <a:ln w="28575">
+            <a:noFill/>
+          </a:ln>
+        </p:spPr>
+        <p:style>
+          <a:lnRef idx="2">
+            <a:schemeClr val="dk1"/>
+          </a:lnRef>
+          <a:fillRef idx="1">
+            <a:schemeClr val="lt1"/>
+          </a:fillRef>
+          <a:effectRef idx="0">
+            <a:schemeClr val="dk1"/>
+          </a:effectRef>
+          <a:fontRef idx="minor">
+            <a:schemeClr val="dk1"/>
+          </a:fontRef>
+        </p:style>
+        <p:txBody>
+          <a:bodyPr rtlCol="0" anchor="ctr"/>
+          <a:lstStyle/>
+          <a:p>
+            <a:pPr algn="ctr"/>
+            <a:r>
+              <a:rPr lang="en-US" sz="1600" b="1" dirty="0"/>
+              <a:t>Execution</a:t>
             </a:r>
           </a:p>
         </p:txBody>
@@ -5537,62 +7091,10 @@
       </p:grpSpPr>
       <p:sp>
         <p:nvSpPr>
-          <p:cNvPr id="34" name="Rechteck 33">
+          <p:cNvPr id="9" name="Titel 1">
             <a:extLst>
               <a:ext uri="{FF2B5EF4-FFF2-40B4-BE49-F238E27FC236}">
-                <a16:creationId xmlns:a16="http://schemas.microsoft.com/office/drawing/2014/main" id="{5500E0F7-B2CB-2371-653A-7CEA50C88046}"/>
-              </a:ext>
-            </a:extLst>
-          </p:cNvPr>
-          <p:cNvSpPr/>
-          <p:nvPr/>
-        </p:nvSpPr>
-        <p:spPr>
-          <a:xfrm>
-            <a:off x="6758424" y="1269000"/>
-            <a:ext cx="5147764" cy="2471530"/>
-          </a:xfrm>
-          <a:prstGeom prst="rect">
-            <a:avLst/>
-          </a:prstGeom>
-          <a:solidFill>
-            <a:schemeClr val="accent2">
-              <a:lumMod val="20000"/>
-              <a:lumOff val="80000"/>
-            </a:schemeClr>
-          </a:solidFill>
-        </p:spPr>
-        <p:style>
-          <a:lnRef idx="2">
-            <a:schemeClr val="accent1">
-              <a:shade val="15000"/>
-            </a:schemeClr>
-          </a:lnRef>
-          <a:fillRef idx="1">
-            <a:schemeClr val="accent1"/>
-          </a:fillRef>
-          <a:effectRef idx="0">
-            <a:schemeClr val="accent1"/>
-          </a:effectRef>
-          <a:fontRef idx="minor">
-            <a:schemeClr val="lt1"/>
-          </a:fontRef>
-        </p:style>
-        <p:txBody>
-          <a:bodyPr rtlCol="0" anchor="ctr"/>
-          <a:lstStyle/>
-          <a:p>
-            <a:pPr algn="ctr"/>
-            <a:endParaRPr lang="en-US" dirty="0"/>
-          </a:p>
-        </p:txBody>
-      </p:sp>
-      <p:sp>
-        <p:nvSpPr>
-          <p:cNvPr id="2" name="Titel 1">
-            <a:extLst>
-              <a:ext uri="{FF2B5EF4-FFF2-40B4-BE49-F238E27FC236}">
-                <a16:creationId xmlns:a16="http://schemas.microsoft.com/office/drawing/2014/main" id="{A2645A7E-AC04-DE09-7E45-5E56D408E01B}"/>
+                <a16:creationId xmlns:a16="http://schemas.microsoft.com/office/drawing/2014/main" id="{34B22FC3-4BF2-D562-3B9C-3F715D2657E7}"/>
               </a:ext>
             </a:extLst>
           </p:cNvPr>
@@ -5605,8 +7107,8 @@
         </p:nvSpPr>
         <p:spPr>
           <a:xfrm>
-            <a:off x="23304" y="0"/>
-            <a:ext cx="10515600" cy="332999"/>
+            <a:off x="838200" y="1"/>
+            <a:ext cx="5400000" cy="692999"/>
           </a:xfrm>
         </p:spPr>
         <p:txBody>
@@ -5617,17 +7119,68 @@
           <a:p>
             <a:r>
               <a:rPr lang="en-US" sz="2800" dirty="0"/>
-              <a:t>Requirements</a:t>
+              <a:t>Framework Requirements</a:t>
             </a:r>
           </a:p>
         </p:txBody>
       </p:sp>
       <p:sp>
         <p:nvSpPr>
-          <p:cNvPr id="4" name="Rechteck 3">
+          <p:cNvPr id="33" name="Rechteck: abgerundete Ecken 32">
             <a:extLst>
               <a:ext uri="{FF2B5EF4-FFF2-40B4-BE49-F238E27FC236}">
-                <a16:creationId xmlns:a16="http://schemas.microsoft.com/office/drawing/2014/main" id="{A59EAB56-AD41-5311-BAC0-FEEB9FE8780D}"/>
+                <a16:creationId xmlns:a16="http://schemas.microsoft.com/office/drawing/2014/main" id="{A6288E01-A8BE-E39C-381B-7103D41B9A6D}"/>
+              </a:ext>
+            </a:extLst>
+          </p:cNvPr>
+          <p:cNvSpPr>
+            <a:spLocks/>
+          </p:cNvSpPr>
+          <p:nvPr/>
+        </p:nvSpPr>
+        <p:spPr>
+          <a:xfrm>
+            <a:off x="984000" y="545976"/>
+            <a:ext cx="4824000" cy="360000"/>
+          </a:xfrm>
+          <a:prstGeom prst="roundRect">
+            <a:avLst/>
+          </a:prstGeom>
+        </p:spPr>
+        <p:style>
+          <a:lnRef idx="2">
+            <a:schemeClr val="accent3">
+              <a:shade val="15000"/>
+            </a:schemeClr>
+          </a:lnRef>
+          <a:fillRef idx="1">
+            <a:schemeClr val="accent3"/>
+          </a:fillRef>
+          <a:effectRef idx="0">
+            <a:schemeClr val="accent3"/>
+          </a:effectRef>
+          <a:fontRef idx="minor">
+            <a:schemeClr val="lt1"/>
+          </a:fontRef>
+        </p:style>
+        <p:txBody>
+          <a:bodyPr rtlCol="0" anchor="ctr"/>
+          <a:lstStyle/>
+          <a:p>
+            <a:pPr algn="ctr"/>
+            <a:r>
+              <a:rPr lang="en-US" dirty="0"/>
+              <a:t>General Modeling</a:t>
+            </a:r>
+          </a:p>
+        </p:txBody>
+      </p:sp>
+      <p:sp>
+        <p:nvSpPr>
+          <p:cNvPr id="44" name="Rechteck: abgerundete Ecken 43">
+            <a:extLst>
+              <a:ext uri="{FF2B5EF4-FFF2-40B4-BE49-F238E27FC236}">
+                <a16:creationId xmlns:a16="http://schemas.microsoft.com/office/drawing/2014/main" id="{BC3C7B69-1958-8138-3091-C6252F1B177A}"/>
               </a:ext>
             </a:extLst>
           </p:cNvPr>
@@ -5636,24 +7189,24 @@
         </p:nvSpPr>
         <p:spPr>
           <a:xfrm>
-            <a:off x="336000" y="1269000"/>
-            <a:ext cx="5040000" cy="1872000"/>
-          </a:xfrm>
-          <a:prstGeom prst="rect">
+            <a:off x="984000" y="2201976"/>
+            <a:ext cx="1152000" cy="630000"/>
+          </a:xfrm>
+          <a:prstGeom prst="roundRect">
             <a:avLst/>
           </a:prstGeom>
         </p:spPr>
         <p:style>
           <a:lnRef idx="2">
-            <a:schemeClr val="accent1">
+            <a:schemeClr val="accent3">
               <a:shade val="15000"/>
             </a:schemeClr>
           </a:lnRef>
           <a:fillRef idx="1">
-            <a:schemeClr val="accent1"/>
+            <a:schemeClr val="accent3"/>
           </a:fillRef>
           <a:effectRef idx="0">
-            <a:schemeClr val="accent1"/>
+            <a:schemeClr val="accent3"/>
           </a:effectRef>
           <a:fontRef idx="minor">
             <a:schemeClr val="lt1"/>
@@ -5663,65 +7216,27 @@
           <a:bodyPr rtlCol="0" anchor="ctr"/>
           <a:lstStyle/>
           <a:p>
-            <a:pPr marL="342900" indent="-342900">
-              <a:lnSpc>
-                <a:spcPct val="150000"/>
-              </a:lnSpc>
-              <a:buFont typeface="+mj-lt"/>
-              <a:buAutoNum type="arabicPeriod"/>
-            </a:pPr>
-            <a:r>
-              <a:rPr lang="en-US" dirty="0"/>
-              <a:t>Subsystem models = Components</a:t>
-            </a:r>
-          </a:p>
-          <a:p>
-            <a:pPr marL="342900" indent="-342900">
-              <a:lnSpc>
-                <a:spcPct val="150000"/>
-              </a:lnSpc>
-              <a:buFont typeface="+mj-lt"/>
-              <a:buAutoNum type="arabicPeriod"/>
-            </a:pPr>
-            <a:r>
-              <a:rPr lang="en-US" dirty="0"/>
-              <a:t>Physical Units for Variables and Parameters</a:t>
-            </a:r>
-          </a:p>
-          <a:p>
-            <a:pPr marL="342900" indent="-342900">
-              <a:lnSpc>
-                <a:spcPct val="150000"/>
-              </a:lnSpc>
-              <a:buFont typeface="+mj-lt"/>
-              <a:buAutoNum type="arabicPeriod"/>
-            </a:pPr>
-            <a:r>
-              <a:rPr lang="en-US" dirty="0"/>
-              <a:t>Systems as connected Subsystems</a:t>
-            </a:r>
-          </a:p>
-          <a:p>
-            <a:pPr marL="342900" indent="-342900">
-              <a:lnSpc>
-                <a:spcPct val="150000"/>
-              </a:lnSpc>
-              <a:buFont typeface="+mj-lt"/>
-              <a:buAutoNum type="arabicPeriod"/>
-            </a:pPr>
-            <a:r>
-              <a:rPr lang="en-US" dirty="0"/>
-              <a:t>Continuous, discrete, and hybrid Behavior</a:t>
+            <a:pPr algn="ctr"/>
+            <a:r>
+              <a:rPr lang="en-US" sz="1200" i="1" dirty="0"/>
+              <a:t>UR-01</a:t>
+            </a:r>
+          </a:p>
+          <a:p>
+            <a:pPr algn="ctr"/>
+            <a:r>
+              <a:rPr lang="en-US" sz="1200" b="1" dirty="0"/>
+              <a:t>Components and Ports</a:t>
             </a:r>
           </a:p>
         </p:txBody>
       </p:sp>
       <p:sp>
         <p:nvSpPr>
-          <p:cNvPr id="5" name="Rechteck 4">
+          <p:cNvPr id="45" name="Rechteck: abgerundete Ecken 44">
             <a:extLst>
               <a:ext uri="{FF2B5EF4-FFF2-40B4-BE49-F238E27FC236}">
-                <a16:creationId xmlns:a16="http://schemas.microsoft.com/office/drawing/2014/main" id="{403C5324-0AEC-2AC3-33DB-B2630400E246}"/>
+                <a16:creationId xmlns:a16="http://schemas.microsoft.com/office/drawing/2014/main" id="{C0078946-64C0-8BB0-4D0C-4FFB6BC7E004}"/>
               </a:ext>
             </a:extLst>
           </p:cNvPr>
@@ -5730,24 +7245,24 @@
         </p:nvSpPr>
         <p:spPr>
           <a:xfrm>
-            <a:off x="337848" y="549000"/>
-            <a:ext cx="5040000" cy="576000"/>
-          </a:xfrm>
-          <a:prstGeom prst="rect">
+            <a:off x="3432000" y="2201976"/>
+            <a:ext cx="1152000" cy="630000"/>
+          </a:xfrm>
+          <a:prstGeom prst="roundRect">
             <a:avLst/>
           </a:prstGeom>
         </p:spPr>
         <p:style>
           <a:lnRef idx="2">
-            <a:schemeClr val="accent1">
+            <a:schemeClr val="accent3">
               <a:shade val="15000"/>
             </a:schemeClr>
           </a:lnRef>
           <a:fillRef idx="1">
-            <a:schemeClr val="accent1"/>
+            <a:schemeClr val="accent3"/>
           </a:fillRef>
           <a:effectRef idx="0">
-            <a:schemeClr val="accent1"/>
+            <a:schemeClr val="accent3"/>
           </a:effectRef>
           <a:fontRef idx="minor">
             <a:schemeClr val="lt1"/>
@@ -5759,18 +7274,32 @@
           <a:p>
             <a:pPr algn="ctr"/>
             <a:r>
-              <a:rPr lang="en-US" dirty="0"/>
-              <a:t>General Modeling</a:t>
+              <a:rPr lang="en-US" sz="1200" i="1" dirty="0"/>
+              <a:t>UR-03</a:t>
+            </a:r>
+          </a:p>
+          <a:p>
+            <a:pPr algn="ctr"/>
+            <a:r>
+              <a:rPr lang="en-US" sz="1200" b="1" dirty="0"/>
+              <a:t>System</a:t>
+            </a:r>
+          </a:p>
+          <a:p>
+            <a:pPr algn="ctr"/>
+            <a:r>
+              <a:rPr lang="en-US" sz="1200" b="1" dirty="0"/>
+              <a:t>Assembly</a:t>
             </a:r>
           </a:p>
         </p:txBody>
       </p:sp>
       <p:sp>
         <p:nvSpPr>
-          <p:cNvPr id="6" name="Rechteck 5">
+          <p:cNvPr id="46" name="Rechteck: abgerundete Ecken 45">
             <a:extLst>
               <a:ext uri="{FF2B5EF4-FFF2-40B4-BE49-F238E27FC236}">
-                <a16:creationId xmlns:a16="http://schemas.microsoft.com/office/drawing/2014/main" id="{4A007138-F2E6-B11D-C889-83259C9E450B}"/>
+                <a16:creationId xmlns:a16="http://schemas.microsoft.com/office/drawing/2014/main" id="{42378BC9-010A-04DA-25B0-11F0BC3FE7B5}"/>
               </a:ext>
             </a:extLst>
           </p:cNvPr>
@@ -5779,24 +7308,24 @@
         </p:nvSpPr>
         <p:spPr>
           <a:xfrm>
-            <a:off x="336000" y="4437000"/>
-            <a:ext cx="5040000" cy="1872000"/>
-          </a:xfrm>
-          <a:prstGeom prst="rect">
+            <a:off x="2208000" y="2201976"/>
+            <a:ext cx="1152000" cy="630000"/>
+          </a:xfrm>
+          <a:prstGeom prst="roundRect">
             <a:avLst/>
           </a:prstGeom>
         </p:spPr>
         <p:style>
           <a:lnRef idx="2">
-            <a:schemeClr val="accent1">
+            <a:schemeClr val="accent3">
               <a:shade val="15000"/>
             </a:schemeClr>
           </a:lnRef>
           <a:fillRef idx="1">
-            <a:schemeClr val="accent1"/>
+            <a:schemeClr val="accent3"/>
           </a:fillRef>
           <a:effectRef idx="0">
-            <a:schemeClr val="accent1"/>
+            <a:schemeClr val="accent3"/>
           </a:effectRef>
           <a:fontRef idx="minor">
             <a:schemeClr val="lt1"/>
@@ -5806,65 +7335,34 @@
           <a:bodyPr rtlCol="0" anchor="ctr"/>
           <a:lstStyle/>
           <a:p>
-            <a:pPr marL="342900" indent="-342900">
-              <a:lnSpc>
-                <a:spcPct val="150000"/>
-              </a:lnSpc>
-              <a:buFont typeface="+mj-lt"/>
-              <a:buAutoNum type="arabicPeriod"/>
-            </a:pPr>
-            <a:r>
-              <a:rPr lang="en-US" dirty="0"/>
-              <a:t>Subsystem models = Components</a:t>
-            </a:r>
-          </a:p>
-          <a:p>
-            <a:pPr marL="342900" indent="-342900">
-              <a:lnSpc>
-                <a:spcPct val="150000"/>
-              </a:lnSpc>
-              <a:buFont typeface="+mj-lt"/>
-              <a:buAutoNum type="arabicPeriod"/>
-            </a:pPr>
-            <a:r>
-              <a:rPr lang="en-US" dirty="0"/>
-              <a:t>Physical Units for Variables and Parameters</a:t>
-            </a:r>
-          </a:p>
-          <a:p>
-            <a:pPr marL="342900" indent="-342900">
-              <a:lnSpc>
-                <a:spcPct val="150000"/>
-              </a:lnSpc>
-              <a:buFont typeface="+mj-lt"/>
-              <a:buAutoNum type="arabicPeriod"/>
-            </a:pPr>
-            <a:r>
-              <a:rPr lang="en-US" dirty="0"/>
-              <a:t>Systems as connected Subsystems</a:t>
-            </a:r>
-          </a:p>
-          <a:p>
-            <a:pPr marL="342900" indent="-342900">
-              <a:lnSpc>
-                <a:spcPct val="150000"/>
-              </a:lnSpc>
-              <a:buFont typeface="+mj-lt"/>
-              <a:buAutoNum type="arabicPeriod"/>
-            </a:pPr>
-            <a:r>
-              <a:rPr lang="en-US" dirty="0"/>
-              <a:t>Continuous, discrete, and hybrid Behavior</a:t>
+            <a:pPr algn="ctr"/>
+            <a:r>
+              <a:rPr lang="en-US" sz="1200" i="1" dirty="0"/>
+              <a:t>UR-02</a:t>
+            </a:r>
+          </a:p>
+          <a:p>
+            <a:pPr algn="ctr"/>
+            <a:r>
+              <a:rPr lang="en-US" sz="1200" b="1" dirty="0"/>
+              <a:t>Physical</a:t>
+            </a:r>
+            <a:br>
+              <a:rPr lang="en-US" sz="1200" b="1" dirty="0"/>
+            </a:br>
+            <a:r>
+              <a:rPr lang="en-US" sz="1200" b="1" dirty="0"/>
+              <a:t>Units</a:t>
             </a:r>
           </a:p>
         </p:txBody>
       </p:sp>
       <p:sp>
         <p:nvSpPr>
-          <p:cNvPr id="7" name="Rechteck 6">
+          <p:cNvPr id="47" name="Rechteck: abgerundete Ecken 46">
             <a:extLst>
               <a:ext uri="{FF2B5EF4-FFF2-40B4-BE49-F238E27FC236}">
-                <a16:creationId xmlns:a16="http://schemas.microsoft.com/office/drawing/2014/main" id="{6DCF9383-03E7-B678-CA1A-9E469CB24360}"/>
+                <a16:creationId xmlns:a16="http://schemas.microsoft.com/office/drawing/2014/main" id="{F4C9DC66-E061-913A-5143-39F5CA628C05}"/>
               </a:ext>
             </a:extLst>
           </p:cNvPr>
@@ -5873,24 +7371,24 @@
         </p:nvSpPr>
         <p:spPr>
           <a:xfrm>
-            <a:off x="337848" y="3717000"/>
-            <a:ext cx="5040000" cy="576000"/>
-          </a:xfrm>
-          <a:prstGeom prst="rect">
+            <a:off x="4656000" y="2201976"/>
+            <a:ext cx="1152000" cy="630000"/>
+          </a:xfrm>
+          <a:prstGeom prst="roundRect">
             <a:avLst/>
           </a:prstGeom>
         </p:spPr>
         <p:style>
           <a:lnRef idx="2">
-            <a:schemeClr val="accent1">
+            <a:schemeClr val="accent3">
               <a:shade val="15000"/>
             </a:schemeClr>
           </a:lnRef>
           <a:fillRef idx="1">
-            <a:schemeClr val="accent1"/>
+            <a:schemeClr val="accent3"/>
           </a:fillRef>
           <a:effectRef idx="0">
-            <a:schemeClr val="accent1"/>
+            <a:schemeClr val="accent3"/>
           </a:effectRef>
           <a:fontRef idx="minor">
             <a:schemeClr val="lt1"/>
@@ -5902,108 +7400,403 @@
           <a:p>
             <a:pPr algn="ctr"/>
             <a:r>
-              <a:rPr lang="en-US" dirty="0"/>
-              <a:t>Simulation</a:t>
+              <a:rPr lang="en-US" sz="1200" i="1" dirty="0"/>
+              <a:t>UR-04</a:t>
+            </a:r>
+          </a:p>
+          <a:p>
+            <a:pPr algn="ctr"/>
+            <a:r>
+              <a:rPr lang="en-US" sz="1200" b="1" dirty="0"/>
+              <a:t>Hybrid</a:t>
+            </a:r>
+            <a:br>
+              <a:rPr lang="en-US" sz="1200" b="1" dirty="0"/>
+            </a:br>
+            <a:r>
+              <a:rPr lang="en-US" sz="1200" b="1" dirty="0"/>
+              <a:t>Behavior</a:t>
             </a:r>
           </a:p>
         </p:txBody>
       </p:sp>
-      <p:sp>
-        <p:nvSpPr>
-          <p:cNvPr id="11" name="Rechteck 10">
+      <p:grpSp>
+        <p:nvGrpSpPr>
+          <p:cNvPr id="78" name="Gruppieren 77">
             <a:extLst>
               <a:ext uri="{FF2B5EF4-FFF2-40B4-BE49-F238E27FC236}">
-                <a16:creationId xmlns:a16="http://schemas.microsoft.com/office/drawing/2014/main" id="{B9FBC178-AC85-D090-ED7D-663F9BA32950}"/>
+                <a16:creationId xmlns:a16="http://schemas.microsoft.com/office/drawing/2014/main" id="{60E9CACF-45A7-3C9D-6300-4AEAC062BF01}"/>
               </a:ext>
             </a:extLst>
           </p:cNvPr>
-          <p:cNvSpPr/>
+          <p:cNvGrpSpPr/>
           <p:nvPr/>
-        </p:nvSpPr>
-        <p:spPr>
+        </p:nvGrpSpPr>
+        <p:grpSpPr>
           <a:xfrm>
-            <a:off x="6812306" y="549000"/>
-            <a:ext cx="5040000" cy="576000"/>
-          </a:xfrm>
-          <a:prstGeom prst="rect">
-            <a:avLst/>
-          </a:prstGeom>
-        </p:spPr>
-        <p:style>
-          <a:lnRef idx="2">
-            <a:schemeClr val="accent1">
-              <a:shade val="15000"/>
-            </a:schemeClr>
-          </a:lnRef>
-          <a:fillRef idx="1">
-            <a:schemeClr val="accent1"/>
-          </a:fillRef>
-          <a:effectRef idx="0">
-            <a:schemeClr val="accent1"/>
-          </a:effectRef>
-          <a:fontRef idx="minor">
-            <a:schemeClr val="lt1"/>
-          </a:fontRef>
-        </p:style>
-        <p:txBody>
-          <a:bodyPr rtlCol="0" anchor="ctr"/>
-          <a:lstStyle/>
-          <a:p>
-            <a:pPr algn="ctr"/>
-            <a:r>
-              <a:rPr lang="en-US" dirty="0"/>
-              <a:t>Heterogenous Integration</a:t>
-            </a:r>
-          </a:p>
-        </p:txBody>
-      </p:sp>
+            <a:off x="2102765" y="1283976"/>
+            <a:ext cx="2586471" cy="468000"/>
+            <a:chOff x="1997529" y="1593000"/>
+            <a:chExt cx="2586471" cy="468000"/>
+          </a:xfrm>
+        </p:grpSpPr>
+        <p:grpSp>
+          <p:nvGrpSpPr>
+            <p:cNvPr id="56" name="Gruppieren 55">
+              <a:extLst>
+                <a:ext uri="{FF2B5EF4-FFF2-40B4-BE49-F238E27FC236}">
+                  <a16:creationId xmlns:a16="http://schemas.microsoft.com/office/drawing/2014/main" id="{A93436A8-0A93-5106-2166-D8386193591C}"/>
+                </a:ext>
+              </a:extLst>
+            </p:cNvPr>
+            <p:cNvGrpSpPr/>
+            <p:nvPr/>
+          </p:nvGrpSpPr>
+          <p:grpSpPr>
+            <a:xfrm>
+              <a:off x="1997529" y="1593000"/>
+              <a:ext cx="936000" cy="457261"/>
+              <a:chOff x="2928000" y="1413000"/>
+              <a:chExt cx="936000" cy="457261"/>
+            </a:xfrm>
+          </p:grpSpPr>
+          <p:sp>
+            <p:nvSpPr>
+              <p:cNvPr id="35" name="Rechteck 34">
+                <a:extLst>
+                  <a:ext uri="{FF2B5EF4-FFF2-40B4-BE49-F238E27FC236}">
+                    <a16:creationId xmlns:a16="http://schemas.microsoft.com/office/drawing/2014/main" id="{BD9493C4-17D2-ABC0-CA8A-51B42467419A}"/>
+                  </a:ext>
+                </a:extLst>
+              </p:cNvPr>
+              <p:cNvSpPr/>
+              <p:nvPr/>
+            </p:nvSpPr>
+            <p:spPr>
+              <a:xfrm>
+                <a:off x="2928000" y="1413000"/>
+                <a:ext cx="936000" cy="455940"/>
+              </a:xfrm>
+              <a:prstGeom prst="rect">
+                <a:avLst/>
+              </a:prstGeom>
+            </p:spPr>
+            <p:style>
+              <a:lnRef idx="2">
+                <a:schemeClr val="accent3">
+                  <a:shade val="15000"/>
+                </a:schemeClr>
+              </a:lnRef>
+              <a:fillRef idx="1">
+                <a:schemeClr val="accent3"/>
+              </a:fillRef>
+              <a:effectRef idx="0">
+                <a:schemeClr val="accent3"/>
+              </a:effectRef>
+              <a:fontRef idx="minor">
+                <a:schemeClr val="lt1"/>
+              </a:fontRef>
+            </p:style>
+            <p:txBody>
+              <a:bodyPr rtlCol="0" anchor="t"/>
+              <a:lstStyle/>
+              <a:p>
+                <a:pPr algn="ctr"/>
+                <a:r>
+                  <a:rPr lang="en-US" sz="1100" b="1" i="1" dirty="0"/>
+                  <a:t>A</a:t>
+                </a:r>
+              </a:p>
+            </p:txBody>
+          </p:sp>
+          <p:sp>
+            <p:nvSpPr>
+              <p:cNvPr id="39" name="Rechteck 38">
+                <a:extLst>
+                  <a:ext uri="{FF2B5EF4-FFF2-40B4-BE49-F238E27FC236}">
+                    <a16:creationId xmlns:a16="http://schemas.microsoft.com/office/drawing/2014/main" id="{7AB88D7D-AA36-6DC0-A07D-22CC7B29F89A}"/>
+                  </a:ext>
+                </a:extLst>
+              </p:cNvPr>
+              <p:cNvSpPr/>
+              <p:nvPr/>
+            </p:nvSpPr>
+            <p:spPr>
+              <a:xfrm>
+                <a:off x="3648000" y="1529429"/>
+                <a:ext cx="216000" cy="216000"/>
+              </a:xfrm>
+              <a:prstGeom prst="rect">
+                <a:avLst/>
+              </a:prstGeom>
+            </p:spPr>
+            <p:style>
+              <a:lnRef idx="2">
+                <a:schemeClr val="dk1">
+                  <a:shade val="15000"/>
+                </a:schemeClr>
+              </a:lnRef>
+              <a:fillRef idx="1">
+                <a:schemeClr val="dk1"/>
+              </a:fillRef>
+              <a:effectRef idx="0">
+                <a:schemeClr val="dk1"/>
+              </a:effectRef>
+              <a:fontRef idx="minor">
+                <a:schemeClr val="lt1"/>
+              </a:fontRef>
+            </p:style>
+            <p:txBody>
+              <a:bodyPr rtlCol="0" anchor="ctr"/>
+              <a:lstStyle/>
+              <a:p>
+                <a:pPr algn="ctr"/>
+                <a:endParaRPr lang="en-US"/>
+              </a:p>
+            </p:txBody>
+          </p:sp>
+          <p:pic>
+            <p:nvPicPr>
+              <p:cNvPr id="49" name="Grafik 48" descr="Zahnrad mit einfarbiger Füllung">
+                <a:extLst>
+                  <a:ext uri="{FF2B5EF4-FFF2-40B4-BE49-F238E27FC236}">
+                    <a16:creationId xmlns:a16="http://schemas.microsoft.com/office/drawing/2014/main" id="{F7B457AD-F112-2258-1C73-ED63279ADBA5}"/>
+                  </a:ext>
+                </a:extLst>
+              </p:cNvPr>
+              <p:cNvPicPr>
+                <a:picLocks noChangeAspect="1"/>
+              </p:cNvPicPr>
+              <p:nvPr/>
+            </p:nvPicPr>
+            <p:blipFill>
+              <a:blip>
+                <a:extLst>
+                  <a:ext uri="{96DAC541-7B7A-43D3-8B79-37D633B846F1}">
+                    <asvg:svgBlip xmlns:asvg="http://schemas.microsoft.com/office/drawing/2016/SVG/main" r:embed="rId2"/>
+                  </a:ext>
+                </a:extLst>
+              </a:blip>
+              <a:stretch>
+                <a:fillRect/>
+              </a:stretch>
+            </p:blipFill>
+            <p:spPr>
+              <a:xfrm>
+                <a:off x="3255688" y="1593000"/>
+                <a:ext cx="277261" cy="277261"/>
+              </a:xfrm>
+              <a:prstGeom prst="rect">
+                <a:avLst/>
+              </a:prstGeom>
+            </p:spPr>
+          </p:pic>
+        </p:grpSp>
+        <p:grpSp>
+          <p:nvGrpSpPr>
+            <p:cNvPr id="57" name="Gruppieren 56">
+              <a:extLst>
+                <a:ext uri="{FF2B5EF4-FFF2-40B4-BE49-F238E27FC236}">
+                  <a16:creationId xmlns:a16="http://schemas.microsoft.com/office/drawing/2014/main" id="{64BD636D-F822-2AD6-D3F8-600ABD2DAE26}"/>
+                </a:ext>
+              </a:extLst>
+            </p:cNvPr>
+            <p:cNvGrpSpPr/>
+            <p:nvPr/>
+          </p:nvGrpSpPr>
+          <p:grpSpPr>
+            <a:xfrm>
+              <a:off x="3648000" y="1593000"/>
+              <a:ext cx="936000" cy="468000"/>
+              <a:chOff x="2928000" y="1413000"/>
+              <a:chExt cx="936000" cy="468000"/>
+            </a:xfrm>
+          </p:grpSpPr>
+          <p:sp>
+            <p:nvSpPr>
+              <p:cNvPr id="58" name="Rechteck 57">
+                <a:extLst>
+                  <a:ext uri="{FF2B5EF4-FFF2-40B4-BE49-F238E27FC236}">
+                    <a16:creationId xmlns:a16="http://schemas.microsoft.com/office/drawing/2014/main" id="{70D0AB58-1588-D06F-2B28-6D1A87A1244C}"/>
+                  </a:ext>
+                </a:extLst>
+              </p:cNvPr>
+              <p:cNvSpPr/>
+              <p:nvPr/>
+            </p:nvSpPr>
+            <p:spPr>
+              <a:xfrm>
+                <a:off x="2928000" y="1413000"/>
+                <a:ext cx="936000" cy="468000"/>
+              </a:xfrm>
+              <a:prstGeom prst="rect">
+                <a:avLst/>
+              </a:prstGeom>
+            </p:spPr>
+            <p:style>
+              <a:lnRef idx="2">
+                <a:schemeClr val="accent3">
+                  <a:shade val="15000"/>
+                </a:schemeClr>
+              </a:lnRef>
+              <a:fillRef idx="1">
+                <a:schemeClr val="accent3"/>
+              </a:fillRef>
+              <a:effectRef idx="0">
+                <a:schemeClr val="accent3"/>
+              </a:effectRef>
+              <a:fontRef idx="minor">
+                <a:schemeClr val="lt1"/>
+              </a:fontRef>
+            </p:style>
+            <p:txBody>
+              <a:bodyPr rtlCol="0" anchor="t"/>
+              <a:lstStyle/>
+              <a:p>
+                <a:pPr algn="ctr"/>
+                <a:r>
+                  <a:rPr lang="en-US" sz="1100" b="1" i="1" dirty="0"/>
+                  <a:t>B</a:t>
+                </a:r>
+              </a:p>
+            </p:txBody>
+          </p:sp>
+          <p:sp>
+            <p:nvSpPr>
+              <p:cNvPr id="59" name="Rechteck 58">
+                <a:extLst>
+                  <a:ext uri="{FF2B5EF4-FFF2-40B4-BE49-F238E27FC236}">
+                    <a16:creationId xmlns:a16="http://schemas.microsoft.com/office/drawing/2014/main" id="{AEED7175-8B60-A685-C02F-DFC8F9324700}"/>
+                  </a:ext>
+                </a:extLst>
+              </p:cNvPr>
+              <p:cNvSpPr/>
+              <p:nvPr/>
+            </p:nvSpPr>
+            <p:spPr>
+              <a:xfrm>
+                <a:off x="2935596" y="1529429"/>
+                <a:ext cx="216000" cy="216000"/>
+              </a:xfrm>
+              <a:prstGeom prst="rect">
+                <a:avLst/>
+              </a:prstGeom>
+            </p:spPr>
+            <p:style>
+              <a:lnRef idx="2">
+                <a:schemeClr val="dk1">
+                  <a:shade val="15000"/>
+                </a:schemeClr>
+              </a:lnRef>
+              <a:fillRef idx="1">
+                <a:schemeClr val="dk1"/>
+              </a:fillRef>
+              <a:effectRef idx="0">
+                <a:schemeClr val="dk1"/>
+              </a:effectRef>
+              <a:fontRef idx="minor">
+                <a:schemeClr val="lt1"/>
+              </a:fontRef>
+            </p:style>
+            <p:txBody>
+              <a:bodyPr rtlCol="0" anchor="ctr"/>
+              <a:lstStyle/>
+              <a:p>
+                <a:pPr algn="ctr"/>
+                <a:endParaRPr lang="en-US" dirty="0"/>
+              </a:p>
+            </p:txBody>
+          </p:sp>
+          <p:pic>
+            <p:nvPicPr>
+              <p:cNvPr id="61" name="Grafik 60" descr="Zahnrad mit einfarbiger Füllung">
+                <a:extLst>
+                  <a:ext uri="{FF2B5EF4-FFF2-40B4-BE49-F238E27FC236}">
+                    <a16:creationId xmlns:a16="http://schemas.microsoft.com/office/drawing/2014/main" id="{6E7F0FF3-9D33-35AD-1128-03620AE11BFA}"/>
+                  </a:ext>
+                </a:extLst>
+              </p:cNvPr>
+              <p:cNvPicPr>
+                <a:picLocks noChangeAspect="1"/>
+              </p:cNvPicPr>
+              <p:nvPr/>
+            </p:nvPicPr>
+            <p:blipFill>
+              <a:blip>
+                <a:extLst>
+                  <a:ext uri="{96DAC541-7B7A-43D3-8B79-37D633B846F1}">
+                    <asvg:svgBlip xmlns:asvg="http://schemas.microsoft.com/office/drawing/2016/SVG/main" r:embed="rId2"/>
+                  </a:ext>
+                </a:extLst>
+              </a:blip>
+              <a:stretch>
+                <a:fillRect/>
+              </a:stretch>
+            </p:blipFill>
+            <p:spPr>
+              <a:xfrm>
+                <a:off x="3255688" y="1593000"/>
+                <a:ext cx="277261" cy="277261"/>
+              </a:xfrm>
+              <a:prstGeom prst="rect">
+                <a:avLst/>
+              </a:prstGeom>
+            </p:spPr>
+          </p:pic>
+        </p:grpSp>
+        <p:cxnSp>
+          <p:nvCxnSpPr>
+            <p:cNvPr id="63" name="Gerade Verbindung mit Pfeil 62">
+              <a:extLst>
+                <a:ext uri="{FF2B5EF4-FFF2-40B4-BE49-F238E27FC236}">
+                  <a16:creationId xmlns:a16="http://schemas.microsoft.com/office/drawing/2014/main" id="{BBE20EA5-B5EA-CCEE-0750-14A6BF59EA37}"/>
+                </a:ext>
+              </a:extLst>
+            </p:cNvPr>
+            <p:cNvCxnSpPr>
+              <a:cxnSpLocks/>
+              <a:stCxn id="39" idx="3"/>
+              <a:endCxn id="59" idx="1"/>
+            </p:cNvCxnSpPr>
+            <p:nvPr/>
+          </p:nvCxnSpPr>
+          <p:spPr>
+            <a:xfrm>
+              <a:off x="2933529" y="1817429"/>
+              <a:ext cx="722067" cy="0"/>
+            </a:xfrm>
+            <a:prstGeom prst="straightConnector1">
+              <a:avLst/>
+            </a:prstGeom>
+            <a:ln>
+              <a:solidFill>
+                <a:schemeClr val="tx1"/>
+              </a:solidFill>
+              <a:tailEnd type="triangle"/>
+            </a:ln>
+          </p:spPr>
+          <p:style>
+            <a:lnRef idx="2">
+              <a:schemeClr val="accent1"/>
+            </a:lnRef>
+            <a:fillRef idx="0">
+              <a:schemeClr val="accent1"/>
+            </a:fillRef>
+            <a:effectRef idx="1">
+              <a:schemeClr val="accent1"/>
+            </a:effectRef>
+            <a:fontRef idx="minor">
+              <a:schemeClr val="tx1"/>
+            </a:fontRef>
+          </p:style>
+        </p:cxnSp>
+      </p:grpSp>
       <p:pic>
         <p:nvPicPr>
-          <p:cNvPr id="15" name="Grafik 14">
+          <p:cNvPr id="79" name="Grafik 78">
             <a:extLst>
               <a:ext uri="{FF2B5EF4-FFF2-40B4-BE49-F238E27FC236}">
-                <a16:creationId xmlns:a16="http://schemas.microsoft.com/office/drawing/2014/main" id="{125D9FA7-62FA-AA89-C9FC-E275879E4995}"/>
-              </a:ext>
-            </a:extLst>
-          </p:cNvPr>
-          <p:cNvPicPr>
-            <a:picLocks noChangeAspect="1"/>
-          </p:cNvPicPr>
-          <p:nvPr/>
-        </p:nvPicPr>
-        <p:blipFill>
-          <a:blip r:embed="rId2">
-            <a:extLst>
-              <a:ext uri="{28A0092B-C50C-407E-A947-70E740481C1C}">
-                <a14:useLocalDpi xmlns:a14="http://schemas.microsoft.com/office/drawing/2010/main" val="0"/>
-              </a:ext>
-            </a:extLst>
-          </a:blip>
-          <a:stretch>
-            <a:fillRect/>
-          </a:stretch>
-        </p:blipFill>
-        <p:spPr>
-          <a:xfrm>
-            <a:off x="10976226" y="1324807"/>
-            <a:ext cx="848000" cy="720000"/>
-          </a:xfrm>
-          <a:prstGeom prst="rect">
-            <a:avLst/>
-          </a:prstGeom>
-          <a:ln>
-            <a:solidFill>
-              <a:schemeClr val="accent1"/>
-            </a:solidFill>
-          </a:ln>
-        </p:spPr>
-      </p:pic>
-      <p:pic>
-        <p:nvPicPr>
-          <p:cNvPr id="17" name="Grafik 16">
-            <a:extLst>
-              <a:ext uri="{FF2B5EF4-FFF2-40B4-BE49-F238E27FC236}">
-                <a16:creationId xmlns:a16="http://schemas.microsoft.com/office/drawing/2014/main" id="{A239E8F0-F83F-FD38-BD10-7D115FED5694}"/>
+                <a16:creationId xmlns:a16="http://schemas.microsoft.com/office/drawing/2014/main" id="{092F38E9-CB68-D44B-F8B3-0C55ADEBE838}"/>
               </a:ext>
             </a:extLst>
           </p:cNvPr>
@@ -6026,69 +7819,20 @@
         </p:blipFill>
         <p:spPr>
           <a:xfrm>
-            <a:off x="6888000" y="1324807"/>
-            <a:ext cx="720000" cy="720000"/>
+            <a:off x="8606790" y="977976"/>
+            <a:ext cx="360000" cy="360000"/>
           </a:xfrm>
           <a:prstGeom prst="rect">
             <a:avLst/>
           </a:prstGeom>
-          <a:ln>
-            <a:solidFill>
-              <a:schemeClr val="accent1"/>
-            </a:solidFill>
-          </a:ln>
         </p:spPr>
       </p:pic>
-      <p:cxnSp>
-        <p:nvCxnSpPr>
-          <p:cNvPr id="25" name="Gerade Verbindung mit Pfeil 24">
+      <p:pic>
+        <p:nvPicPr>
+          <p:cNvPr id="81" name="Grafik 80">
             <a:extLst>
               <a:ext uri="{FF2B5EF4-FFF2-40B4-BE49-F238E27FC236}">
-                <a16:creationId xmlns:a16="http://schemas.microsoft.com/office/drawing/2014/main" id="{2F3CD257-7F00-B4D3-415F-BBEB3A887DE6}"/>
-              </a:ext>
-            </a:extLst>
-          </p:cNvPr>
-          <p:cNvCxnSpPr>
-            <a:cxnSpLocks/>
-            <a:stCxn id="15" idx="1"/>
-            <a:endCxn id="17" idx="3"/>
-          </p:cNvCxnSpPr>
-          <p:nvPr/>
-        </p:nvCxnSpPr>
-        <p:spPr>
-          <a:xfrm flipH="1">
-            <a:off x="7608000" y="1684807"/>
-            <a:ext cx="3368226" cy="0"/>
-          </a:xfrm>
-          <a:prstGeom prst="straightConnector1">
-            <a:avLst/>
-          </a:prstGeom>
-          <a:ln>
-            <a:headEnd type="triangle" w="med" len="med"/>
-            <a:tailEnd type="triangle" w="med" len="med"/>
-          </a:ln>
-        </p:spPr>
-        <p:style>
-          <a:lnRef idx="2">
-            <a:schemeClr val="accent1"/>
-          </a:lnRef>
-          <a:fillRef idx="0">
-            <a:schemeClr val="accent1"/>
-          </a:fillRef>
-          <a:effectRef idx="1">
-            <a:schemeClr val="accent1"/>
-          </a:effectRef>
-          <a:fontRef idx="minor">
-            <a:schemeClr val="tx1"/>
-          </a:fontRef>
-        </p:style>
-      </p:cxnSp>
-      <p:pic>
-        <p:nvPicPr>
-          <p:cNvPr id="36" name="Grafik 35">
-            <a:extLst>
-              <a:ext uri="{FF2B5EF4-FFF2-40B4-BE49-F238E27FC236}">
-                <a16:creationId xmlns:a16="http://schemas.microsoft.com/office/drawing/2014/main" id="{67503CD0-0579-6026-7095-75909D2E2380}"/>
+                <a16:creationId xmlns:a16="http://schemas.microsoft.com/office/drawing/2014/main" id="{8E0970F0-1642-188F-3480-0CBE1CDE06CB}"/>
               </a:ext>
             </a:extLst>
           </p:cNvPr>
@@ -6098,32 +7842,36 @@
           <p:nvPr/>
         </p:nvPicPr>
         <p:blipFill>
-          <a:blip r:embed="rId4"/>
+          <a:blip r:embed="rId4">
+            <a:extLst>
+              <a:ext uri="{28A0092B-C50C-407E-A947-70E740481C1C}">
+                <a14:useLocalDpi xmlns:a14="http://schemas.microsoft.com/office/drawing/2010/main" val="0"/>
+              </a:ext>
+            </a:extLst>
+          </a:blip>
           <a:stretch>
             <a:fillRect/>
           </a:stretch>
         </p:blipFill>
         <p:spPr>
           <a:xfrm>
-            <a:off x="8615964" y="2862445"/>
-            <a:ext cx="1432684" cy="719390"/>
+            <a:off x="7462791" y="1646280"/>
+            <a:ext cx="423999" cy="360000"/>
           </a:xfrm>
           <a:prstGeom prst="rect">
             <a:avLst/>
           </a:prstGeom>
           <a:ln>
-            <a:solidFill>
-              <a:schemeClr val="accent1"/>
-            </a:solidFill>
+            <a:noFill/>
           </a:ln>
         </p:spPr>
       </p:pic>
       <p:pic>
         <p:nvPicPr>
-          <p:cNvPr id="37" name="Grafik 36">
+          <p:cNvPr id="84" name="Grafik 83">
             <a:extLst>
               <a:ext uri="{FF2B5EF4-FFF2-40B4-BE49-F238E27FC236}">
-                <a16:creationId xmlns:a16="http://schemas.microsoft.com/office/drawing/2014/main" id="{B78B7610-0D54-322B-259D-FAAD64EF04DE}"/>
+                <a16:creationId xmlns:a16="http://schemas.microsoft.com/office/drawing/2014/main" id="{70415054-8A42-3B08-028C-C96DDC6A76C2}"/>
               </a:ext>
             </a:extLst>
           </p:cNvPr>
@@ -6133,21 +7881,15 @@
           <p:nvPr/>
         </p:nvPicPr>
         <p:blipFill>
-          <a:blip>
-            <a:extLst>
-              <a:ext uri="{96DAC541-7B7A-43D3-8B79-37D633B846F1}">
-                <asvg:svgBlip xmlns:asvg="http://schemas.microsoft.com/office/drawing/2016/SVG/main" r:embed="rId5"/>
-              </a:ext>
-            </a:extLst>
-          </a:blip>
+          <a:blip r:embed="rId5"/>
           <a:stretch>
             <a:fillRect/>
           </a:stretch>
         </p:blipFill>
         <p:spPr>
           <a:xfrm>
-            <a:off x="8964058" y="2255047"/>
-            <a:ext cx="943894" cy="278795"/>
+            <a:off x="9734422" y="1612056"/>
+            <a:ext cx="750315" cy="360000"/>
           </a:xfrm>
           <a:prstGeom prst="rect">
             <a:avLst/>
@@ -6156,115 +7898,27 @@
       </p:pic>
       <p:cxnSp>
         <p:nvCxnSpPr>
-          <p:cNvPr id="54" name="Verbinder: gewinkelt 53">
+          <p:cNvPr id="87" name="Gerade Verbindung mit Pfeil 86">
             <a:extLst>
               <a:ext uri="{FF2B5EF4-FFF2-40B4-BE49-F238E27FC236}">
-                <a16:creationId xmlns:a16="http://schemas.microsoft.com/office/drawing/2014/main" id="{C972359C-DD0C-5B4C-6331-9A0C482F912C}"/>
-              </a:ext>
-            </a:extLst>
-          </p:cNvPr>
-          <p:cNvCxnSpPr>
-            <a:stCxn id="17" idx="2"/>
-            <a:endCxn id="36" idx="1"/>
-          </p:cNvCxnSpPr>
-          <p:nvPr/>
-        </p:nvCxnSpPr>
-        <p:spPr>
-          <a:xfrm rot="16200000" flipH="1">
-            <a:off x="7343316" y="1949491"/>
-            <a:ext cx="1177333" cy="1367964"/>
-          </a:xfrm>
-          <a:prstGeom prst="bentConnector2">
-            <a:avLst/>
-          </a:prstGeom>
-          <a:ln>
-            <a:headEnd type="triangle" w="med" len="med"/>
-            <a:tailEnd type="triangle" w="med" len="med"/>
-          </a:ln>
-        </p:spPr>
-        <p:style>
-          <a:lnRef idx="2">
-            <a:schemeClr val="accent1"/>
-          </a:lnRef>
-          <a:fillRef idx="0">
-            <a:schemeClr val="accent1"/>
-          </a:fillRef>
-          <a:effectRef idx="1">
-            <a:schemeClr val="accent1"/>
-          </a:effectRef>
-          <a:fontRef idx="minor">
-            <a:schemeClr val="tx1"/>
-          </a:fontRef>
-        </p:style>
-      </p:cxnSp>
-      <p:cxnSp>
-        <p:nvCxnSpPr>
-          <p:cNvPr id="55" name="Verbinder: gewinkelt 54">
-            <a:extLst>
-              <a:ext uri="{FF2B5EF4-FFF2-40B4-BE49-F238E27FC236}">
-                <a16:creationId xmlns:a16="http://schemas.microsoft.com/office/drawing/2014/main" id="{8A93F1BB-5AC4-DDD0-18EE-67983F53EC9B}"/>
+                <a16:creationId xmlns:a16="http://schemas.microsoft.com/office/drawing/2014/main" id="{C6A24349-2102-086E-BE5B-44CAA2F13504}"/>
               </a:ext>
             </a:extLst>
           </p:cNvPr>
           <p:cNvCxnSpPr>
             <a:cxnSpLocks/>
-            <a:stCxn id="15" idx="2"/>
-            <a:endCxn id="36" idx="3"/>
           </p:cNvCxnSpPr>
           <p:nvPr/>
         </p:nvCxnSpPr>
         <p:spPr>
-          <a:xfrm rot="5400000">
-            <a:off x="10135771" y="1957684"/>
-            <a:ext cx="1177333" cy="1351578"/>
-          </a:xfrm>
-          <a:prstGeom prst="bentConnector2">
-            <a:avLst/>
-          </a:prstGeom>
-          <a:ln>
-            <a:headEnd type="triangle" w="med" len="med"/>
-            <a:tailEnd type="triangle" w="med" len="med"/>
-          </a:ln>
-        </p:spPr>
-        <p:style>
-          <a:lnRef idx="2">
-            <a:schemeClr val="accent1"/>
-          </a:lnRef>
-          <a:fillRef idx="0">
-            <a:schemeClr val="accent1"/>
-          </a:fillRef>
-          <a:effectRef idx="1">
-            <a:schemeClr val="accent1"/>
-          </a:effectRef>
-          <a:fontRef idx="minor">
-            <a:schemeClr val="tx1"/>
-          </a:fontRef>
-        </p:style>
-      </p:cxnSp>
-      <p:cxnSp>
-        <p:nvCxnSpPr>
-          <p:cNvPr id="67" name="Gerade Verbindung mit Pfeil 66">
-            <a:extLst>
-              <a:ext uri="{FF2B5EF4-FFF2-40B4-BE49-F238E27FC236}">
-                <a16:creationId xmlns:a16="http://schemas.microsoft.com/office/drawing/2014/main" id="{98D585FD-AE21-B8A2-96F6-CDD6CF4420F1}"/>
-              </a:ext>
-            </a:extLst>
-          </p:cNvPr>
-          <p:cNvCxnSpPr>
-            <a:cxnSpLocks/>
-            <a:stCxn id="17" idx="3"/>
-          </p:cNvCxnSpPr>
-          <p:nvPr/>
-        </p:nvCxnSpPr>
-        <p:spPr>
-          <a:xfrm>
-            <a:off x="7608000" y="1684807"/>
-            <a:ext cx="1298830" cy="658518"/>
+          <a:xfrm flipV="1">
+            <a:off x="7883847" y="1832985"/>
+            <a:ext cx="432000" cy="6705"/>
           </a:xfrm>
           <a:prstGeom prst="straightConnector1">
             <a:avLst/>
           </a:prstGeom>
-          <a:ln>
+          <a:ln w="19050">
             <a:solidFill>
               <a:schemeClr val="accent6"/>
             </a:solidFill>
@@ -6289,28 +7943,29 @@
       </p:cxnSp>
       <p:cxnSp>
         <p:nvCxnSpPr>
-          <p:cNvPr id="68" name="Gerade Verbindung mit Pfeil 67">
+          <p:cNvPr id="88" name="Gerade Verbindung mit Pfeil 87">
             <a:extLst>
               <a:ext uri="{FF2B5EF4-FFF2-40B4-BE49-F238E27FC236}">
-                <a16:creationId xmlns:a16="http://schemas.microsoft.com/office/drawing/2014/main" id="{66A94824-11EA-FB00-F47A-41DC1884DBCD}"/>
+                <a16:creationId xmlns:a16="http://schemas.microsoft.com/office/drawing/2014/main" id="{4B17DF7C-B1B9-0B8D-9F18-FF7781AFEAB9}"/>
               </a:ext>
             </a:extLst>
           </p:cNvPr>
           <p:cNvCxnSpPr>
             <a:cxnSpLocks/>
-            <a:stCxn id="15" idx="1"/>
+            <a:stCxn id="79" idx="2"/>
+            <a:endCxn id="113" idx="0"/>
           </p:cNvCxnSpPr>
           <p:nvPr/>
         </p:nvCxnSpPr>
         <p:spPr>
-          <a:xfrm flipH="1">
-            <a:off x="9840000" y="1684807"/>
-            <a:ext cx="1136226" cy="709637"/>
+          <a:xfrm>
+            <a:off x="8786790" y="1337976"/>
+            <a:ext cx="0" cy="259763"/>
           </a:xfrm>
           <a:prstGeom prst="straightConnector1">
             <a:avLst/>
           </a:prstGeom>
-          <a:ln>
+          <a:ln w="19050">
             <a:solidFill>
               <a:schemeClr val="accent6"/>
             </a:solidFill>
@@ -6335,27 +7990,28 @@
       </p:cxnSp>
       <p:cxnSp>
         <p:nvCxnSpPr>
-          <p:cNvPr id="72" name="Gerade Verbindung mit Pfeil 71">
+          <p:cNvPr id="92" name="Gerade Verbindung mit Pfeil 91">
             <a:extLst>
               <a:ext uri="{FF2B5EF4-FFF2-40B4-BE49-F238E27FC236}">
-                <a16:creationId xmlns:a16="http://schemas.microsoft.com/office/drawing/2014/main" id="{C92D4C4B-3871-AD26-48BA-311147165C7E}"/>
+                <a16:creationId xmlns:a16="http://schemas.microsoft.com/office/drawing/2014/main" id="{E46B6FB6-02EF-7DEA-864A-D1B3AC1C65B9}"/>
               </a:ext>
             </a:extLst>
           </p:cNvPr>
           <p:cNvCxnSpPr>
             <a:cxnSpLocks/>
+            <a:endCxn id="113" idx="3"/>
           </p:cNvCxnSpPr>
           <p:nvPr/>
         </p:nvCxnSpPr>
         <p:spPr>
-          <a:xfrm>
-            <a:off x="9376211" y="2504765"/>
-            <a:ext cx="0" cy="337923"/>
+          <a:xfrm flipH="1">
+            <a:off x="9254790" y="1826280"/>
+            <a:ext cx="432000" cy="5459"/>
           </a:xfrm>
           <a:prstGeom prst="straightConnector1">
             <a:avLst/>
           </a:prstGeom>
-          <a:ln>
+          <a:ln w="19050">
             <a:solidFill>
               <a:schemeClr val="accent6"/>
             </a:solidFill>
@@ -6372,6 +8028,2972 @@
           </a:fillRef>
           <a:effectRef idx="1">
             <a:schemeClr val="accent1"/>
+          </a:effectRef>
+          <a:fontRef idx="minor">
+            <a:schemeClr val="tx1"/>
+          </a:fontRef>
+        </p:style>
+      </p:cxnSp>
+      <p:sp>
+        <p:nvSpPr>
+          <p:cNvPr id="100" name="Rechteck: abgerundete Ecken 99">
+            <a:extLst>
+              <a:ext uri="{FF2B5EF4-FFF2-40B4-BE49-F238E27FC236}">
+                <a16:creationId xmlns:a16="http://schemas.microsoft.com/office/drawing/2014/main" id="{C1BFCE2A-68F3-AEE7-B317-2E05A2FEBB90}"/>
+              </a:ext>
+            </a:extLst>
+          </p:cNvPr>
+          <p:cNvSpPr>
+            <a:spLocks/>
+          </p:cNvSpPr>
+          <p:nvPr/>
+        </p:nvSpPr>
+        <p:spPr>
+          <a:xfrm>
+            <a:off x="6384000" y="545976"/>
+            <a:ext cx="4824000" cy="360000"/>
+          </a:xfrm>
+          <a:prstGeom prst="roundRect">
+            <a:avLst/>
+          </a:prstGeom>
+        </p:spPr>
+        <p:style>
+          <a:lnRef idx="2">
+            <a:schemeClr val="accent3">
+              <a:shade val="15000"/>
+            </a:schemeClr>
+          </a:lnRef>
+          <a:fillRef idx="1">
+            <a:schemeClr val="accent3"/>
+          </a:fillRef>
+          <a:effectRef idx="0">
+            <a:schemeClr val="accent3"/>
+          </a:effectRef>
+          <a:fontRef idx="minor">
+            <a:schemeClr val="lt1"/>
+          </a:fontRef>
+        </p:style>
+        <p:txBody>
+          <a:bodyPr rtlCol="0" anchor="ctr"/>
+          <a:lstStyle/>
+          <a:p>
+            <a:pPr algn="ctr"/>
+            <a:r>
+              <a:rPr lang="en-US" dirty="0"/>
+              <a:t>Heterogeneous Integration</a:t>
+            </a:r>
+          </a:p>
+        </p:txBody>
+      </p:sp>
+      <p:sp>
+        <p:nvSpPr>
+          <p:cNvPr id="108" name="Rechteck: abgerundete Ecken 107">
+            <a:extLst>
+              <a:ext uri="{FF2B5EF4-FFF2-40B4-BE49-F238E27FC236}">
+                <a16:creationId xmlns:a16="http://schemas.microsoft.com/office/drawing/2014/main" id="{29AC0443-6F9C-873E-143C-B00158369909}"/>
+              </a:ext>
+            </a:extLst>
+          </p:cNvPr>
+          <p:cNvSpPr/>
+          <p:nvPr/>
+        </p:nvSpPr>
+        <p:spPr>
+          <a:xfrm>
+            <a:off x="6383999" y="2197697"/>
+            <a:ext cx="2375999" cy="630000"/>
+          </a:xfrm>
+          <a:prstGeom prst="roundRect">
+            <a:avLst/>
+          </a:prstGeom>
+        </p:spPr>
+        <p:style>
+          <a:lnRef idx="2">
+            <a:schemeClr val="accent3">
+              <a:shade val="15000"/>
+            </a:schemeClr>
+          </a:lnRef>
+          <a:fillRef idx="1">
+            <a:schemeClr val="accent3"/>
+          </a:fillRef>
+          <a:effectRef idx="0">
+            <a:schemeClr val="accent3"/>
+          </a:effectRef>
+          <a:fontRef idx="minor">
+            <a:schemeClr val="lt1"/>
+          </a:fontRef>
+        </p:style>
+        <p:txBody>
+          <a:bodyPr rtlCol="0" anchor="ctr"/>
+          <a:lstStyle/>
+          <a:p>
+            <a:pPr algn="ctr"/>
+            <a:r>
+              <a:rPr lang="en-US" sz="1200" i="1" dirty="0"/>
+              <a:t>UR-05 to UR-07</a:t>
+            </a:r>
+          </a:p>
+          <a:p>
+            <a:pPr algn="ctr"/>
+            <a:r>
+              <a:rPr lang="en-US" sz="1200" b="1" dirty="0"/>
+              <a:t>Backend Wrappers</a:t>
+            </a:r>
+            <a:br>
+              <a:rPr lang="en-US" sz="1200" b="1" dirty="0"/>
+            </a:br>
+            <a:r>
+              <a:rPr lang="en-US" sz="1000" dirty="0"/>
+              <a:t>FEM, MBD, equation-based</a:t>
+            </a:r>
+            <a:endParaRPr lang="en-US" sz="1200" dirty="0"/>
+          </a:p>
+        </p:txBody>
+      </p:sp>
+      <p:sp>
+        <p:nvSpPr>
+          <p:cNvPr id="111" name="Rechteck: abgerundete Ecken 110">
+            <a:extLst>
+              <a:ext uri="{FF2B5EF4-FFF2-40B4-BE49-F238E27FC236}">
+                <a16:creationId xmlns:a16="http://schemas.microsoft.com/office/drawing/2014/main" id="{BB7AEA34-22FB-7BE7-9FB1-90A0BC3D4F1E}"/>
+              </a:ext>
+            </a:extLst>
+          </p:cNvPr>
+          <p:cNvSpPr/>
+          <p:nvPr/>
+        </p:nvSpPr>
+        <p:spPr>
+          <a:xfrm>
+            <a:off x="8831999" y="2197697"/>
+            <a:ext cx="1152000" cy="630000"/>
+          </a:xfrm>
+          <a:prstGeom prst="roundRect">
+            <a:avLst/>
+          </a:prstGeom>
+        </p:spPr>
+        <p:style>
+          <a:lnRef idx="2">
+            <a:schemeClr val="accent3">
+              <a:shade val="15000"/>
+            </a:schemeClr>
+          </a:lnRef>
+          <a:fillRef idx="1">
+            <a:schemeClr val="accent3"/>
+          </a:fillRef>
+          <a:effectRef idx="0">
+            <a:schemeClr val="accent3"/>
+          </a:effectRef>
+          <a:fontRef idx="minor">
+            <a:schemeClr val="lt1"/>
+          </a:fontRef>
+        </p:style>
+        <p:txBody>
+          <a:bodyPr rtlCol="0" anchor="ctr"/>
+          <a:lstStyle/>
+          <a:p>
+            <a:pPr algn="ctr"/>
+            <a:r>
+              <a:rPr lang="en-US" sz="1200" i="1" dirty="0"/>
+              <a:t>UR-08</a:t>
+            </a:r>
+          </a:p>
+          <a:p>
+            <a:pPr algn="ctr"/>
+            <a:r>
+              <a:rPr lang="en-US" sz="1200" b="1" dirty="0"/>
+              <a:t>Uniform Interface</a:t>
+            </a:r>
+          </a:p>
+        </p:txBody>
+      </p:sp>
+      <p:sp>
+        <p:nvSpPr>
+          <p:cNvPr id="112" name="Rechteck: abgerundete Ecken 111">
+            <a:extLst>
+              <a:ext uri="{FF2B5EF4-FFF2-40B4-BE49-F238E27FC236}">
+                <a16:creationId xmlns:a16="http://schemas.microsoft.com/office/drawing/2014/main" id="{8E951C44-34FF-0D71-0E17-1FEDE98FC412}"/>
+              </a:ext>
+            </a:extLst>
+          </p:cNvPr>
+          <p:cNvSpPr/>
+          <p:nvPr/>
+        </p:nvSpPr>
+        <p:spPr>
+          <a:xfrm>
+            <a:off x="10056000" y="2197697"/>
+            <a:ext cx="1152000" cy="630000"/>
+          </a:xfrm>
+          <a:prstGeom prst="roundRect">
+            <a:avLst/>
+          </a:prstGeom>
+        </p:spPr>
+        <p:style>
+          <a:lnRef idx="2">
+            <a:schemeClr val="accent3">
+              <a:shade val="15000"/>
+            </a:schemeClr>
+          </a:lnRef>
+          <a:fillRef idx="1">
+            <a:schemeClr val="accent3"/>
+          </a:fillRef>
+          <a:effectRef idx="0">
+            <a:schemeClr val="accent3"/>
+          </a:effectRef>
+          <a:fontRef idx="minor">
+            <a:schemeClr val="lt1"/>
+          </a:fontRef>
+        </p:style>
+        <p:txBody>
+          <a:bodyPr rtlCol="0" anchor="ctr"/>
+          <a:lstStyle/>
+          <a:p>
+            <a:pPr algn="ctr"/>
+            <a:r>
+              <a:rPr lang="en-US" sz="1200" i="1" dirty="0"/>
+              <a:t>UR-09</a:t>
+            </a:r>
+          </a:p>
+          <a:p>
+            <a:pPr algn="ctr"/>
+            <a:r>
+              <a:rPr lang="en-US" sz="1100" b="1" dirty="0"/>
+              <a:t>Runtime Switching</a:t>
+            </a:r>
+          </a:p>
+        </p:txBody>
+      </p:sp>
+      <p:grpSp>
+        <p:nvGrpSpPr>
+          <p:cNvPr id="116" name="Gruppieren 115">
+            <a:extLst>
+              <a:ext uri="{FF2B5EF4-FFF2-40B4-BE49-F238E27FC236}">
+                <a16:creationId xmlns:a16="http://schemas.microsoft.com/office/drawing/2014/main" id="{8F315E29-9515-A92D-02A3-B7D903FAE83E}"/>
+              </a:ext>
+            </a:extLst>
+          </p:cNvPr>
+          <p:cNvGrpSpPr/>
+          <p:nvPr/>
+        </p:nvGrpSpPr>
+        <p:grpSpPr>
+          <a:xfrm>
+            <a:off x="8318790" y="1597739"/>
+            <a:ext cx="936000" cy="470395"/>
+            <a:chOff x="8165586" y="1799429"/>
+            <a:chExt cx="936000" cy="470395"/>
+          </a:xfrm>
+        </p:grpSpPr>
+        <p:sp>
+          <p:nvSpPr>
+            <p:cNvPr id="113" name="Rechteck 112">
+              <a:extLst>
+                <a:ext uri="{FF2B5EF4-FFF2-40B4-BE49-F238E27FC236}">
+                  <a16:creationId xmlns:a16="http://schemas.microsoft.com/office/drawing/2014/main" id="{2B49E1FA-81D0-F242-3C53-448FD11051EC}"/>
+                </a:ext>
+              </a:extLst>
+            </p:cNvPr>
+            <p:cNvSpPr/>
+            <p:nvPr/>
+          </p:nvSpPr>
+          <p:spPr>
+            <a:xfrm>
+              <a:off x="8165586" y="1799429"/>
+              <a:ext cx="936000" cy="468000"/>
+            </a:xfrm>
+            <a:prstGeom prst="rect">
+              <a:avLst/>
+            </a:prstGeom>
+          </p:spPr>
+          <p:style>
+            <a:lnRef idx="2">
+              <a:schemeClr val="accent3">
+                <a:shade val="15000"/>
+              </a:schemeClr>
+            </a:lnRef>
+            <a:fillRef idx="1">
+              <a:schemeClr val="accent3"/>
+            </a:fillRef>
+            <a:effectRef idx="0">
+              <a:schemeClr val="accent3"/>
+            </a:effectRef>
+            <a:fontRef idx="minor">
+              <a:schemeClr val="lt1"/>
+            </a:fontRef>
+          </p:style>
+          <p:txBody>
+            <a:bodyPr rtlCol="0" anchor="t"/>
+            <a:lstStyle/>
+            <a:p>
+              <a:pPr algn="ctr"/>
+              <a:r>
+                <a:rPr lang="en-US" sz="1100" b="1" i="1" dirty="0"/>
+                <a:t>Component</a:t>
+              </a:r>
+            </a:p>
+          </p:txBody>
+        </p:sp>
+        <p:pic>
+          <p:nvPicPr>
+            <p:cNvPr id="114" name="Grafik 113" descr="Zahnrad mit einfarbiger Füllung">
+              <a:extLst>
+                <a:ext uri="{FF2B5EF4-FFF2-40B4-BE49-F238E27FC236}">
+                  <a16:creationId xmlns:a16="http://schemas.microsoft.com/office/drawing/2014/main" id="{58173F7A-AAE7-CA4E-89CF-A2A391A7AD5B}"/>
+                </a:ext>
+              </a:extLst>
+            </p:cNvPr>
+            <p:cNvPicPr>
+              <a:picLocks noChangeAspect="1"/>
+            </p:cNvPicPr>
+            <p:nvPr/>
+          </p:nvPicPr>
+          <p:blipFill>
+            <a:blip>
+              <a:extLst>
+                <a:ext uri="{96DAC541-7B7A-43D3-8B79-37D633B846F1}">
+                  <asvg:svgBlip xmlns:asvg="http://schemas.microsoft.com/office/drawing/2016/SVG/main" r:embed="rId2"/>
+                </a:ext>
+              </a:extLst>
+            </a:blip>
+            <a:stretch>
+              <a:fillRect/>
+            </a:stretch>
+          </p:blipFill>
+          <p:spPr>
+            <a:xfrm>
+              <a:off x="8494955" y="1992563"/>
+              <a:ext cx="277261" cy="277261"/>
+            </a:xfrm>
+            <a:prstGeom prst="rect">
+              <a:avLst/>
+            </a:prstGeom>
+          </p:spPr>
+        </p:pic>
+      </p:grpSp>
+      <p:sp>
+        <p:nvSpPr>
+          <p:cNvPr id="126" name="Rechteck: abgerundete Ecken 125">
+            <a:extLst>
+              <a:ext uri="{FF2B5EF4-FFF2-40B4-BE49-F238E27FC236}">
+                <a16:creationId xmlns:a16="http://schemas.microsoft.com/office/drawing/2014/main" id="{8E5EB517-99C2-E895-6CD6-0BCB1F30D3D4}"/>
+              </a:ext>
+            </a:extLst>
+          </p:cNvPr>
+          <p:cNvSpPr>
+            <a:spLocks/>
+          </p:cNvSpPr>
+          <p:nvPr/>
+        </p:nvSpPr>
+        <p:spPr>
+          <a:xfrm>
+            <a:off x="984000" y="3212315"/>
+            <a:ext cx="4824000" cy="360000"/>
+          </a:xfrm>
+          <a:prstGeom prst="roundRect">
+            <a:avLst/>
+          </a:prstGeom>
+        </p:spPr>
+        <p:style>
+          <a:lnRef idx="2">
+            <a:schemeClr val="accent3">
+              <a:shade val="15000"/>
+            </a:schemeClr>
+          </a:lnRef>
+          <a:fillRef idx="1">
+            <a:schemeClr val="accent3"/>
+          </a:fillRef>
+          <a:effectRef idx="0">
+            <a:schemeClr val="accent3"/>
+          </a:effectRef>
+          <a:fontRef idx="minor">
+            <a:schemeClr val="lt1"/>
+          </a:fontRef>
+        </p:style>
+        <p:txBody>
+          <a:bodyPr rtlCol="0" anchor="ctr"/>
+          <a:lstStyle/>
+          <a:p>
+            <a:pPr algn="ctr"/>
+            <a:r>
+              <a:rPr lang="en-US" dirty="0"/>
+              <a:t>Simulation</a:t>
+            </a:r>
+          </a:p>
+        </p:txBody>
+      </p:sp>
+      <p:sp>
+        <p:nvSpPr>
+          <p:cNvPr id="127" name="Rechteck: abgerundete Ecken 126">
+            <a:extLst>
+              <a:ext uri="{FF2B5EF4-FFF2-40B4-BE49-F238E27FC236}">
+                <a16:creationId xmlns:a16="http://schemas.microsoft.com/office/drawing/2014/main" id="{4CC29B2D-EF2F-7C74-763A-884FE1ECC375}"/>
+              </a:ext>
+            </a:extLst>
+          </p:cNvPr>
+          <p:cNvSpPr/>
+          <p:nvPr/>
+        </p:nvSpPr>
+        <p:spPr>
+          <a:xfrm>
+            <a:off x="984000" y="4865976"/>
+            <a:ext cx="1152000" cy="630000"/>
+          </a:xfrm>
+          <a:prstGeom prst="roundRect">
+            <a:avLst/>
+          </a:prstGeom>
+        </p:spPr>
+        <p:style>
+          <a:lnRef idx="2">
+            <a:schemeClr val="accent3">
+              <a:shade val="15000"/>
+            </a:schemeClr>
+          </a:lnRef>
+          <a:fillRef idx="1">
+            <a:schemeClr val="accent3"/>
+          </a:fillRef>
+          <a:effectRef idx="0">
+            <a:schemeClr val="accent3"/>
+          </a:effectRef>
+          <a:fontRef idx="minor">
+            <a:schemeClr val="lt1"/>
+          </a:fontRef>
+        </p:style>
+        <p:txBody>
+          <a:bodyPr rtlCol="0" anchor="ctr"/>
+          <a:lstStyle/>
+          <a:p>
+            <a:pPr algn="ctr"/>
+            <a:r>
+              <a:rPr lang="en-US" sz="1200" i="1" dirty="0"/>
+              <a:t>UR-10 </a:t>
+            </a:r>
+            <a:r>
+              <a:rPr lang="en-US" sz="1000" i="1" dirty="0"/>
+              <a:t>(1)</a:t>
+            </a:r>
+            <a:endParaRPr lang="en-US" sz="1200" i="1" dirty="0"/>
+          </a:p>
+          <a:p>
+            <a:pPr algn="ctr"/>
+            <a:r>
+              <a:rPr lang="en-US" sz="1200" b="1" dirty="0"/>
+              <a:t>Structural Analysis</a:t>
+            </a:r>
+          </a:p>
+        </p:txBody>
+      </p:sp>
+      <p:sp>
+        <p:nvSpPr>
+          <p:cNvPr id="128" name="Rechteck: abgerundete Ecken 127">
+            <a:extLst>
+              <a:ext uri="{FF2B5EF4-FFF2-40B4-BE49-F238E27FC236}">
+                <a16:creationId xmlns:a16="http://schemas.microsoft.com/office/drawing/2014/main" id="{742A86D2-5F99-40DC-7330-7E02FA4B73A5}"/>
+              </a:ext>
+            </a:extLst>
+          </p:cNvPr>
+          <p:cNvSpPr/>
+          <p:nvPr/>
+        </p:nvSpPr>
+        <p:spPr>
+          <a:xfrm>
+            <a:off x="3432000" y="4865976"/>
+            <a:ext cx="1152000" cy="630000"/>
+          </a:xfrm>
+          <a:prstGeom prst="roundRect">
+            <a:avLst/>
+          </a:prstGeom>
+        </p:spPr>
+        <p:style>
+          <a:lnRef idx="2">
+            <a:schemeClr val="accent3">
+              <a:shade val="15000"/>
+            </a:schemeClr>
+          </a:lnRef>
+          <a:fillRef idx="1">
+            <a:schemeClr val="accent3"/>
+          </a:fillRef>
+          <a:effectRef idx="0">
+            <a:schemeClr val="accent3"/>
+          </a:effectRef>
+          <a:fontRef idx="minor">
+            <a:schemeClr val="lt1"/>
+          </a:fontRef>
+        </p:style>
+        <p:txBody>
+          <a:bodyPr rtlCol="0" anchor="ctr"/>
+          <a:lstStyle/>
+          <a:p>
+            <a:pPr algn="ctr"/>
+            <a:r>
+              <a:rPr lang="en-US" sz="1200" i="1" dirty="0"/>
+              <a:t>UR-11 </a:t>
+            </a:r>
+            <a:r>
+              <a:rPr lang="en-US" sz="1000" i="1" dirty="0"/>
+              <a:t>(1)</a:t>
+            </a:r>
+            <a:endParaRPr lang="en-US" sz="1200" i="1" dirty="0"/>
+          </a:p>
+          <a:p>
+            <a:pPr algn="ctr"/>
+            <a:r>
+              <a:rPr lang="en-US" sz="1200" b="1" dirty="0"/>
+              <a:t>Algebraic Loops</a:t>
+            </a:r>
+          </a:p>
+        </p:txBody>
+      </p:sp>
+      <p:sp>
+        <p:nvSpPr>
+          <p:cNvPr id="129" name="Rechteck: abgerundete Ecken 128">
+            <a:extLst>
+              <a:ext uri="{FF2B5EF4-FFF2-40B4-BE49-F238E27FC236}">
+                <a16:creationId xmlns:a16="http://schemas.microsoft.com/office/drawing/2014/main" id="{20020579-C078-40E7-9D22-BC955F3FD869}"/>
+              </a:ext>
+            </a:extLst>
+          </p:cNvPr>
+          <p:cNvSpPr/>
+          <p:nvPr/>
+        </p:nvSpPr>
+        <p:spPr>
+          <a:xfrm>
+            <a:off x="2208000" y="4865976"/>
+            <a:ext cx="1152000" cy="630000"/>
+          </a:xfrm>
+          <a:prstGeom prst="roundRect">
+            <a:avLst/>
+          </a:prstGeom>
+        </p:spPr>
+        <p:style>
+          <a:lnRef idx="2">
+            <a:schemeClr val="accent3">
+              <a:shade val="15000"/>
+            </a:schemeClr>
+          </a:lnRef>
+          <a:fillRef idx="1">
+            <a:schemeClr val="accent3"/>
+          </a:fillRef>
+          <a:effectRef idx="0">
+            <a:schemeClr val="accent3"/>
+          </a:effectRef>
+          <a:fontRef idx="minor">
+            <a:schemeClr val="lt1"/>
+          </a:fontRef>
+        </p:style>
+        <p:txBody>
+          <a:bodyPr rtlCol="0" anchor="ctr"/>
+          <a:lstStyle/>
+          <a:p>
+            <a:pPr algn="ctr"/>
+            <a:r>
+              <a:rPr lang="en-US" sz="1200" i="1" dirty="0"/>
+              <a:t>UR-10 </a:t>
+            </a:r>
+            <a:r>
+              <a:rPr lang="en-US" sz="1000" i="1" dirty="0"/>
+              <a:t>(2)</a:t>
+            </a:r>
+            <a:endParaRPr lang="en-US" sz="1200" i="1" dirty="0"/>
+          </a:p>
+          <a:p>
+            <a:pPr algn="ctr"/>
+            <a:r>
+              <a:rPr lang="en-US" sz="1200" b="1" dirty="0"/>
+              <a:t>Hybrid Events</a:t>
+            </a:r>
+          </a:p>
+        </p:txBody>
+      </p:sp>
+      <p:sp>
+        <p:nvSpPr>
+          <p:cNvPr id="130" name="Rechteck: abgerundete Ecken 129">
+            <a:extLst>
+              <a:ext uri="{FF2B5EF4-FFF2-40B4-BE49-F238E27FC236}">
+                <a16:creationId xmlns:a16="http://schemas.microsoft.com/office/drawing/2014/main" id="{1DACFE78-A6A2-CB5A-952D-2A8AE754FEC8}"/>
+              </a:ext>
+            </a:extLst>
+          </p:cNvPr>
+          <p:cNvSpPr/>
+          <p:nvPr/>
+        </p:nvSpPr>
+        <p:spPr>
+          <a:xfrm>
+            <a:off x="4656000" y="4865976"/>
+            <a:ext cx="1152000" cy="630000"/>
+          </a:xfrm>
+          <a:prstGeom prst="roundRect">
+            <a:avLst/>
+          </a:prstGeom>
+        </p:spPr>
+        <p:style>
+          <a:lnRef idx="2">
+            <a:schemeClr val="accent3">
+              <a:shade val="15000"/>
+            </a:schemeClr>
+          </a:lnRef>
+          <a:fillRef idx="1">
+            <a:schemeClr val="accent3"/>
+          </a:fillRef>
+          <a:effectRef idx="0">
+            <a:schemeClr val="accent3"/>
+          </a:effectRef>
+          <a:fontRef idx="minor">
+            <a:schemeClr val="lt1"/>
+          </a:fontRef>
+        </p:style>
+        <p:txBody>
+          <a:bodyPr rtlCol="0" anchor="ctr"/>
+          <a:lstStyle/>
+          <a:p>
+            <a:pPr algn="ctr"/>
+            <a:r>
+              <a:rPr lang="en-US" sz="1200" i="1" dirty="0"/>
+              <a:t>UR-11 </a:t>
+            </a:r>
+            <a:r>
+              <a:rPr lang="en-US" sz="1000" i="1" dirty="0"/>
+              <a:t>(2)</a:t>
+            </a:r>
+            <a:endParaRPr lang="en-US" sz="1200" i="1" dirty="0"/>
+          </a:p>
+          <a:p>
+            <a:pPr algn="ctr"/>
+            <a:r>
+              <a:rPr lang="en-US" sz="1200" b="1" dirty="0"/>
+              <a:t>Pluggable Algorithms</a:t>
+            </a:r>
+          </a:p>
+        </p:txBody>
+      </p:sp>
+      <p:sp>
+        <p:nvSpPr>
+          <p:cNvPr id="131" name="Rechteck: abgerundete Ecken 130">
+            <a:extLst>
+              <a:ext uri="{FF2B5EF4-FFF2-40B4-BE49-F238E27FC236}">
+                <a16:creationId xmlns:a16="http://schemas.microsoft.com/office/drawing/2014/main" id="{3EFE3D2E-081D-B9C2-F260-C933A9420956}"/>
+              </a:ext>
+            </a:extLst>
+          </p:cNvPr>
+          <p:cNvSpPr>
+            <a:spLocks/>
+          </p:cNvSpPr>
+          <p:nvPr/>
+        </p:nvSpPr>
+        <p:spPr>
+          <a:xfrm>
+            <a:off x="6384000" y="3212315"/>
+            <a:ext cx="4824000" cy="360000"/>
+          </a:xfrm>
+          <a:prstGeom prst="roundRect">
+            <a:avLst/>
+          </a:prstGeom>
+        </p:spPr>
+        <p:style>
+          <a:lnRef idx="2">
+            <a:schemeClr val="accent3">
+              <a:shade val="15000"/>
+            </a:schemeClr>
+          </a:lnRef>
+          <a:fillRef idx="1">
+            <a:schemeClr val="accent3"/>
+          </a:fillRef>
+          <a:effectRef idx="0">
+            <a:schemeClr val="accent3"/>
+          </a:effectRef>
+          <a:fontRef idx="minor">
+            <a:schemeClr val="lt1"/>
+          </a:fontRef>
+        </p:style>
+        <p:txBody>
+          <a:bodyPr rtlCol="0" anchor="ctr"/>
+          <a:lstStyle/>
+          <a:p>
+            <a:pPr algn="ctr"/>
+            <a:r>
+              <a:rPr lang="en-US" dirty="0"/>
+              <a:t>Interaction</a:t>
+            </a:r>
+          </a:p>
+        </p:txBody>
+      </p:sp>
+      <p:grpSp>
+        <p:nvGrpSpPr>
+          <p:cNvPr id="172" name="Gruppieren 171">
+            <a:extLst>
+              <a:ext uri="{FF2B5EF4-FFF2-40B4-BE49-F238E27FC236}">
+                <a16:creationId xmlns:a16="http://schemas.microsoft.com/office/drawing/2014/main" id="{D1005156-EF49-EA6A-D58B-D397470163E2}"/>
+              </a:ext>
+            </a:extLst>
+          </p:cNvPr>
+          <p:cNvGrpSpPr/>
+          <p:nvPr/>
+        </p:nvGrpSpPr>
+        <p:grpSpPr>
+          <a:xfrm>
+            <a:off x="1883432" y="3684563"/>
+            <a:ext cx="3025136" cy="901513"/>
+            <a:chOff x="1880100" y="3967487"/>
+            <a:chExt cx="3025136" cy="901513"/>
+          </a:xfrm>
+        </p:grpSpPr>
+        <mc:AlternateContent xmlns:mc="http://schemas.openxmlformats.org/markup-compatibility/2006">
+          <mc:Choice xmlns:a14="http://schemas.microsoft.com/office/drawing/2010/main" Requires="a14">
+            <p:sp>
+              <p:nvSpPr>
+                <p:cNvPr id="137" name="Rechteck: abgerundete Ecken 136">
+                  <a:extLst>
+                    <a:ext uri="{FF2B5EF4-FFF2-40B4-BE49-F238E27FC236}">
+                      <a16:creationId xmlns:a16="http://schemas.microsoft.com/office/drawing/2014/main" id="{D0045334-4ED5-1DEF-0A10-9D283D28E61B}"/>
+                    </a:ext>
+                  </a:extLst>
+                </p:cNvPr>
+                <p:cNvSpPr/>
+                <p:nvPr/>
+              </p:nvSpPr>
+              <p:spPr>
+                <a:xfrm>
+                  <a:off x="1880100" y="4239000"/>
+                  <a:ext cx="432000" cy="630000"/>
+                </a:xfrm>
+                <a:prstGeom prst="roundRect">
+                  <a:avLst/>
+                </a:prstGeom>
+              </p:spPr>
+              <p:style>
+                <a:lnRef idx="2">
+                  <a:schemeClr val="accent3">
+                    <a:shade val="15000"/>
+                  </a:schemeClr>
+                </a:lnRef>
+                <a:fillRef idx="1">
+                  <a:schemeClr val="accent3"/>
+                </a:fillRef>
+                <a:effectRef idx="0">
+                  <a:schemeClr val="accent3"/>
+                </a:effectRef>
+                <a:fontRef idx="minor">
+                  <a:schemeClr val="lt1"/>
+                </a:fontRef>
+              </p:style>
+              <p:txBody>
+                <a:bodyPr rtlCol="0" anchor="ctr"/>
+                <a:lstStyle/>
+                <a:p>
+                  <a:pPr algn="ctr"/>
+                  <a14:m>
+                    <m:oMathPara xmlns:m="http://schemas.openxmlformats.org/officeDocument/2006/math">
+                      <m:oMathParaPr>
+                        <m:jc m:val="centerGroup"/>
+                      </m:oMathParaPr>
+                      <m:oMath xmlns:m="http://schemas.openxmlformats.org/officeDocument/2006/math">
+                        <m:r>
+                          <a:rPr lang="en-US" i="1" dirty="0" smtClean="0">
+                            <a:latin typeface="Cambria Math" panose="02040503050406030204" pitchFamily="18" charset="0"/>
+                          </a:rPr>
+                          <m:t>𝐴</m:t>
+                        </m:r>
+                      </m:oMath>
+                    </m:oMathPara>
+                  </a14:m>
+                  <a:endParaRPr lang="en-US" i="1" dirty="0"/>
+                </a:p>
+                <a:p>
+                  <a:pPr algn="ctr"/>
+                  <a14:m>
+                    <m:oMathPara xmlns:m="http://schemas.openxmlformats.org/officeDocument/2006/math">
+                      <m:oMathParaPr>
+                        <m:jc m:val="centerGroup"/>
+                      </m:oMathParaPr>
+                      <m:oMath xmlns:m="http://schemas.openxmlformats.org/officeDocument/2006/math">
+                        <m:r>
+                          <a:rPr lang="en-US" sz="1200" i="0" dirty="0" smtClean="0">
+                            <a:latin typeface="Cambria Math" panose="02040503050406030204" pitchFamily="18" charset="0"/>
+                          </a:rPr>
+                          <m:t>(</m:t>
+                        </m:r>
+                        <m:r>
+                          <a:rPr lang="de-DE" sz="1200" b="0" i="0" dirty="0" smtClean="0">
+                            <a:latin typeface="Cambria Math" panose="02040503050406030204" pitchFamily="18" charset="0"/>
+                          </a:rPr>
+                          <m:t>1)</m:t>
+                        </m:r>
+                      </m:oMath>
+                    </m:oMathPara>
+                  </a14:m>
+                </a:p>
+              </p:txBody>
+            </p:sp>
+          </mc:Choice>
+          <mc:Fallback>
+            <p:sp>
+              <p:nvSpPr>
+                <p:cNvPr id="137" name="Rechteck: abgerundete Ecken 136">
+                  <a:extLst>
+                    <a:ext uri="{FF2B5EF4-FFF2-40B4-BE49-F238E27FC236}">
+                      <a16:creationId xmlns:a16="http://schemas.microsoft.com/office/drawing/2014/main" id="{D0045334-4ED5-1DEF-0A10-9D283D28E61B}"/>
+                    </a:ext>
+                  </a:extLst>
+                </p:cNvPr>
+                <p:cNvSpPr>
+                  <a:spLocks noRot="1" noChangeAspect="1" noMove="1" noResize="1" noEditPoints="1" noAdjustHandles="1" noChangeArrowheads="1" noChangeShapeType="1" noTextEdit="1"/>
+                </p:cNvSpPr>
+                <p:nvPr/>
+              </p:nvSpPr>
+              <p:spPr>
+                <a:xfrm>
+                  <a:off x="1880100" y="4239000"/>
+                  <a:ext cx="432000" cy="630000"/>
+                </a:xfrm>
+                <a:prstGeom prst="roundRect">
+                  <a:avLst/>
+                </a:prstGeom>
+                <a:blipFill>
+                  <a:blip r:embed="rId6"/>
+                  <a:stretch>
+                    <a:fillRect/>
+                  </a:stretch>
+                </a:blipFill>
+              </p:spPr>
+              <p:txBody>
+                <a:bodyPr/>
+                <a:lstStyle/>
+                <a:p>
+                  <a:r>
+                    <a:rPr lang="en-US">
+                      <a:noFill/>
+                    </a:rPr>
+                    <a:t> </a:t>
+                  </a:r>
+                </a:p>
+              </p:txBody>
+            </p:sp>
+          </mc:Fallback>
+        </mc:AlternateContent>
+        <mc:AlternateContent xmlns:mc="http://schemas.openxmlformats.org/markup-compatibility/2006">
+          <mc:Choice xmlns:a14="http://schemas.microsoft.com/office/drawing/2010/main" Requires="a14">
+            <p:sp>
+              <p:nvSpPr>
+                <p:cNvPr id="138" name="Rechteck: abgerundete Ecken 137">
+                  <a:extLst>
+                    <a:ext uri="{FF2B5EF4-FFF2-40B4-BE49-F238E27FC236}">
+                      <a16:creationId xmlns:a16="http://schemas.microsoft.com/office/drawing/2014/main" id="{A7498438-D5F0-4BA7-B03F-A598C136126E}"/>
+                    </a:ext>
+                  </a:extLst>
+                </p:cNvPr>
+                <p:cNvSpPr/>
+                <p:nvPr/>
+              </p:nvSpPr>
+              <p:spPr>
+                <a:xfrm>
+                  <a:off x="2856000" y="4239000"/>
+                  <a:ext cx="1080000" cy="630000"/>
+                </a:xfrm>
+                <a:prstGeom prst="roundRect">
+                  <a:avLst/>
+                </a:prstGeom>
+                <a:solidFill>
+                  <a:schemeClr val="accent6">
+                    <a:lumMod val="75000"/>
+                  </a:schemeClr>
+                </a:solidFill>
+                <a:ln>
+                  <a:solidFill>
+                    <a:schemeClr val="accent6">
+                      <a:lumMod val="50000"/>
+                    </a:schemeClr>
+                  </a:solidFill>
+                </a:ln>
+              </p:spPr>
+              <p:style>
+                <a:lnRef idx="2">
+                  <a:schemeClr val="accent1">
+                    <a:shade val="15000"/>
+                  </a:schemeClr>
+                </a:lnRef>
+                <a:fillRef idx="1">
+                  <a:schemeClr val="accent1"/>
+                </a:fillRef>
+                <a:effectRef idx="0">
+                  <a:schemeClr val="accent1"/>
+                </a:effectRef>
+                <a:fontRef idx="minor">
+                  <a:schemeClr val="lt1"/>
+                </a:fontRef>
+              </p:style>
+              <p:txBody>
+                <a:bodyPr rtlCol="0" anchor="ctr"/>
+                <a:lstStyle/>
+                <a:p>
+                  <a:pPr algn="ctr"/>
+                  <a14:m>
+                    <m:oMathPara xmlns:m="http://schemas.openxmlformats.org/officeDocument/2006/math">
+                      <m:oMathParaPr>
+                        <m:jc m:val="centerGroup"/>
+                      </m:oMathParaPr>
+                      <m:oMath xmlns:m="http://schemas.openxmlformats.org/officeDocument/2006/math">
+                        <m:r>
+                          <a:rPr lang="en-US" i="1" dirty="0" smtClean="0">
+                            <a:latin typeface="Cambria Math" panose="02040503050406030204" pitchFamily="18" charset="0"/>
+                          </a:rPr>
+                          <m:t>{</m:t>
+                        </m:r>
+                        <m:r>
+                          <a:rPr lang="en-US" i="1" dirty="0" smtClean="0">
+                            <a:latin typeface="Cambria Math" panose="02040503050406030204" pitchFamily="18" charset="0"/>
+                          </a:rPr>
+                          <m:t>𝐵</m:t>
+                        </m:r>
+                        <m:r>
+                          <a:rPr lang="en-US" i="1" dirty="0" smtClean="0">
+                            <a:latin typeface="Cambria Math" panose="02040503050406030204" pitchFamily="18" charset="0"/>
+                          </a:rPr>
+                          <m:t>,</m:t>
+                        </m:r>
+                        <m:r>
+                          <a:rPr lang="en-US" i="1" dirty="0" smtClean="0">
+                            <a:latin typeface="Cambria Math" panose="02040503050406030204" pitchFamily="18" charset="0"/>
+                          </a:rPr>
+                          <m:t>𝐶</m:t>
+                        </m:r>
+                        <m:r>
+                          <a:rPr lang="en-US" i="1" dirty="0" smtClean="0">
+                            <a:latin typeface="Cambria Math" panose="02040503050406030204" pitchFamily="18" charset="0"/>
+                          </a:rPr>
+                          <m:t>}</m:t>
+                        </m:r>
+                      </m:oMath>
+                    </m:oMathPara>
+                    <m:oMathPara xmlns:m="http://schemas.openxmlformats.org/officeDocument/2006/math">
+                      <m:oMathParaPr>
+                        <m:jc m:val="centerGroup"/>
+                      </m:oMathParaPr>
+                      <m:oMath xmlns:m="http://schemas.openxmlformats.org/officeDocument/2006/math">
+                        <m:r>
+                          <a:rPr lang="de-DE" sz="1200" b="0" i="0" dirty="0" smtClean="0">
+                            <a:latin typeface="Cambria Math" panose="02040503050406030204" pitchFamily="18" charset="0"/>
+                          </a:rPr>
+                          <m:t>(2)</m:t>
+                        </m:r>
+                      </m:oMath>
+                    </m:oMathPara>
+                  </a14:m>
+                </a:p>
+                <a:p>
+                  <a:pPr algn="ctr"/>
+                </a:p>
+              </p:txBody>
+            </p:sp>
+          </mc:Choice>
+          <mc:Fallback>
+            <p:sp>
+              <p:nvSpPr>
+                <p:cNvPr id="138" name="Rechteck: abgerundete Ecken 137">
+                  <a:extLst>
+                    <a:ext uri="{FF2B5EF4-FFF2-40B4-BE49-F238E27FC236}">
+                      <a16:creationId xmlns:a16="http://schemas.microsoft.com/office/drawing/2014/main" id="{A7498438-D5F0-4BA7-B03F-A598C136126E}"/>
+                    </a:ext>
+                  </a:extLst>
+                </p:cNvPr>
+                <p:cNvSpPr>
+                  <a:spLocks noRot="1" noChangeAspect="1" noMove="1" noResize="1" noEditPoints="1" noAdjustHandles="1" noChangeArrowheads="1" noChangeShapeType="1" noTextEdit="1"/>
+                </p:cNvSpPr>
+                <p:nvPr/>
+              </p:nvSpPr>
+              <p:spPr>
+                <a:xfrm>
+                  <a:off x="2856000" y="4239000"/>
+                  <a:ext cx="1080000" cy="630000"/>
+                </a:xfrm>
+                <a:prstGeom prst="roundRect">
+                  <a:avLst/>
+                </a:prstGeom>
+                <a:blipFill>
+                  <a:blip r:embed="rId7"/>
+                  <a:stretch>
+                    <a:fillRect/>
+                  </a:stretch>
+                </a:blipFill>
+                <a:ln>
+                  <a:solidFill>
+                    <a:schemeClr val="accent6">
+                      <a:lumMod val="50000"/>
+                    </a:schemeClr>
+                  </a:solidFill>
+                </a:ln>
+              </p:spPr>
+              <p:txBody>
+                <a:bodyPr/>
+                <a:lstStyle/>
+                <a:p>
+                  <a:r>
+                    <a:rPr lang="en-US">
+                      <a:noFill/>
+                    </a:rPr>
+                    <a:t> </a:t>
+                  </a:r>
+                </a:p>
+              </p:txBody>
+            </p:sp>
+          </mc:Fallback>
+        </mc:AlternateContent>
+        <mc:AlternateContent xmlns:mc="http://schemas.openxmlformats.org/markup-compatibility/2006">
+          <mc:Choice xmlns:a14="http://schemas.microsoft.com/office/drawing/2010/main" Requires="a14">
+            <p:sp>
+              <p:nvSpPr>
+                <p:cNvPr id="139" name="Rechteck: abgerundete Ecken 138">
+                  <a:extLst>
+                    <a:ext uri="{FF2B5EF4-FFF2-40B4-BE49-F238E27FC236}">
+                      <a16:creationId xmlns:a16="http://schemas.microsoft.com/office/drawing/2014/main" id="{50EF5294-210D-AE04-CD30-84134DCA224B}"/>
+                    </a:ext>
+                  </a:extLst>
+                </p:cNvPr>
+                <p:cNvSpPr/>
+                <p:nvPr/>
+              </p:nvSpPr>
+              <p:spPr>
+                <a:xfrm>
+                  <a:off x="4440000" y="4236040"/>
+                  <a:ext cx="432000" cy="630000"/>
+                </a:xfrm>
+                <a:prstGeom prst="roundRect">
+                  <a:avLst/>
+                </a:prstGeom>
+              </p:spPr>
+              <p:style>
+                <a:lnRef idx="2">
+                  <a:schemeClr val="accent3">
+                    <a:shade val="15000"/>
+                  </a:schemeClr>
+                </a:lnRef>
+                <a:fillRef idx="1">
+                  <a:schemeClr val="accent3"/>
+                </a:fillRef>
+                <a:effectRef idx="0">
+                  <a:schemeClr val="accent3"/>
+                </a:effectRef>
+                <a:fontRef idx="minor">
+                  <a:schemeClr val="lt1"/>
+                </a:fontRef>
+              </p:style>
+              <p:txBody>
+                <a:bodyPr rtlCol="0" anchor="ctr"/>
+                <a:lstStyle/>
+                <a:p>
+                  <a:pPr algn="ctr"/>
+                  <a14:m>
+                    <m:oMathPara xmlns:m="http://schemas.openxmlformats.org/officeDocument/2006/math">
+                      <m:oMathParaPr>
+                        <m:jc m:val="centerGroup"/>
+                      </m:oMathParaPr>
+                      <m:oMath xmlns:m="http://schemas.openxmlformats.org/officeDocument/2006/math">
+                        <m:r>
+                          <a:rPr lang="en-US" i="1" dirty="0" smtClean="0">
+                            <a:latin typeface="Cambria Math" panose="02040503050406030204" pitchFamily="18" charset="0"/>
+                          </a:rPr>
+                          <m:t>𝐷</m:t>
+                        </m:r>
+                      </m:oMath>
+                    </m:oMathPara>
+                  </a14:m>
+                  <a:endParaRPr lang="en-US" i="1" dirty="0"/>
+                </a:p>
+                <a:p>
+                  <a:pPr algn="ctr"/>
+                  <a14:m>
+                    <m:oMathPara xmlns:m="http://schemas.openxmlformats.org/officeDocument/2006/math">
+                      <m:oMathParaPr>
+                        <m:jc m:val="centerGroup"/>
+                      </m:oMathParaPr>
+                      <m:oMath xmlns:m="http://schemas.openxmlformats.org/officeDocument/2006/math">
+                        <m:r>
+                          <a:rPr lang="de-DE" sz="1200" b="0" i="0" dirty="0" smtClean="0">
+                            <a:latin typeface="Cambria Math" panose="02040503050406030204" pitchFamily="18" charset="0"/>
+                          </a:rPr>
+                          <m:t>(3)</m:t>
+                        </m:r>
+                      </m:oMath>
+                    </m:oMathPara>
+                  </a14:m>
+                </a:p>
+              </p:txBody>
+            </p:sp>
+          </mc:Choice>
+          <mc:Fallback>
+            <p:sp>
+              <p:nvSpPr>
+                <p:cNvPr id="139" name="Rechteck: abgerundete Ecken 138">
+                  <a:extLst>
+                    <a:ext uri="{FF2B5EF4-FFF2-40B4-BE49-F238E27FC236}">
+                      <a16:creationId xmlns:a16="http://schemas.microsoft.com/office/drawing/2014/main" id="{50EF5294-210D-AE04-CD30-84134DCA224B}"/>
+                    </a:ext>
+                  </a:extLst>
+                </p:cNvPr>
+                <p:cNvSpPr>
+                  <a:spLocks noRot="1" noChangeAspect="1" noMove="1" noResize="1" noEditPoints="1" noAdjustHandles="1" noChangeArrowheads="1" noChangeShapeType="1" noTextEdit="1"/>
+                </p:cNvSpPr>
+                <p:nvPr/>
+              </p:nvSpPr>
+              <p:spPr>
+                <a:xfrm>
+                  <a:off x="4440000" y="4236040"/>
+                  <a:ext cx="432000" cy="630000"/>
+                </a:xfrm>
+                <a:prstGeom prst="roundRect">
+                  <a:avLst/>
+                </a:prstGeom>
+                <a:blipFill>
+                  <a:blip r:embed="rId8"/>
+                  <a:stretch>
+                    <a:fillRect/>
+                  </a:stretch>
+                </a:blipFill>
+              </p:spPr>
+              <p:txBody>
+                <a:bodyPr/>
+                <a:lstStyle/>
+                <a:p>
+                  <a:r>
+                    <a:rPr lang="en-US">
+                      <a:noFill/>
+                    </a:rPr>
+                    <a:t> </a:t>
+                  </a:r>
+                </a:p>
+              </p:txBody>
+            </p:sp>
+          </mc:Fallback>
+        </mc:AlternateContent>
+        <p:cxnSp>
+          <p:nvCxnSpPr>
+            <p:cNvPr id="141" name="Gerade Verbindung mit Pfeil 140">
+              <a:extLst>
+                <a:ext uri="{FF2B5EF4-FFF2-40B4-BE49-F238E27FC236}">
+                  <a16:creationId xmlns:a16="http://schemas.microsoft.com/office/drawing/2014/main" id="{FB0A0E08-F035-A5E6-EC51-EF37AE16EF6F}"/>
+                </a:ext>
+              </a:extLst>
+            </p:cNvPr>
+            <p:cNvCxnSpPr>
+              <a:cxnSpLocks/>
+              <a:stCxn id="137" idx="3"/>
+              <a:endCxn id="138" idx="1"/>
+            </p:cNvCxnSpPr>
+            <p:nvPr/>
+          </p:nvCxnSpPr>
+          <p:spPr>
+            <a:xfrm>
+              <a:off x="2312100" y="4554000"/>
+              <a:ext cx="543900" cy="0"/>
+            </a:xfrm>
+            <a:prstGeom prst="straightConnector1">
+              <a:avLst/>
+            </a:prstGeom>
+            <a:ln>
+              <a:solidFill>
+                <a:schemeClr val="tx1"/>
+              </a:solidFill>
+              <a:tailEnd type="triangle"/>
+            </a:ln>
+          </p:spPr>
+          <p:style>
+            <a:lnRef idx="2">
+              <a:schemeClr val="accent1"/>
+            </a:lnRef>
+            <a:fillRef idx="0">
+              <a:schemeClr val="accent1"/>
+            </a:fillRef>
+            <a:effectRef idx="1">
+              <a:schemeClr val="accent1"/>
+            </a:effectRef>
+            <a:fontRef idx="minor">
+              <a:schemeClr val="tx1"/>
+            </a:fontRef>
+          </p:style>
+        </p:cxnSp>
+        <p:cxnSp>
+          <p:nvCxnSpPr>
+            <p:cNvPr id="142" name="Gerade Verbindung mit Pfeil 141">
+              <a:extLst>
+                <a:ext uri="{FF2B5EF4-FFF2-40B4-BE49-F238E27FC236}">
+                  <a16:creationId xmlns:a16="http://schemas.microsoft.com/office/drawing/2014/main" id="{DEF51CF4-0C89-3381-9109-84789B45D086}"/>
+                </a:ext>
+              </a:extLst>
+            </p:cNvPr>
+            <p:cNvCxnSpPr>
+              <a:cxnSpLocks/>
+              <a:stCxn id="138" idx="3"/>
+              <a:endCxn id="139" idx="1"/>
+            </p:cNvCxnSpPr>
+            <p:nvPr/>
+          </p:nvCxnSpPr>
+          <p:spPr>
+            <a:xfrm flipV="1">
+              <a:off x="3936000" y="4551040"/>
+              <a:ext cx="504000" cy="2960"/>
+            </a:xfrm>
+            <a:prstGeom prst="straightConnector1">
+              <a:avLst/>
+            </a:prstGeom>
+            <a:ln>
+              <a:solidFill>
+                <a:schemeClr val="tx1"/>
+              </a:solidFill>
+              <a:tailEnd type="triangle"/>
+            </a:ln>
+          </p:spPr>
+          <p:style>
+            <a:lnRef idx="2">
+              <a:schemeClr val="accent1"/>
+            </a:lnRef>
+            <a:fillRef idx="0">
+              <a:schemeClr val="accent1"/>
+            </a:fillRef>
+            <a:effectRef idx="1">
+              <a:schemeClr val="accent1"/>
+            </a:effectRef>
+            <a:fontRef idx="minor">
+              <a:schemeClr val="tx1"/>
+            </a:fontRef>
+          </p:style>
+        </p:cxnSp>
+        <p:pic>
+          <p:nvPicPr>
+            <p:cNvPr id="159" name="Grafik 158" descr="Blitz mit einfarbiger Füllung">
+              <a:extLst>
+                <a:ext uri="{FF2B5EF4-FFF2-40B4-BE49-F238E27FC236}">
+                  <a16:creationId xmlns:a16="http://schemas.microsoft.com/office/drawing/2014/main" id="{AB6FBFDB-5B7F-58E3-FE90-5B9A5C45358A}"/>
+                </a:ext>
+              </a:extLst>
+            </p:cNvPr>
+            <p:cNvPicPr>
+              <a:picLocks noChangeAspect="1"/>
+            </p:cNvPicPr>
+            <p:nvPr/>
+          </p:nvPicPr>
+          <p:blipFill>
+            <a:blip>
+              <a:extLst>
+                <a:ext uri="{96DAC541-7B7A-43D3-8B79-37D633B846F1}">
+                  <asvg:svgBlip xmlns:asvg="http://schemas.microsoft.com/office/drawing/2016/SVG/main" r:embed="rId9"/>
+                </a:ext>
+              </a:extLst>
+            </a:blip>
+            <a:stretch>
+              <a:fillRect/>
+            </a:stretch>
+          </p:blipFill>
+          <p:spPr>
+            <a:xfrm>
+              <a:off x="4689236" y="3967487"/>
+              <a:ext cx="216000" cy="216000"/>
+            </a:xfrm>
+            <a:prstGeom prst="rect">
+              <a:avLst/>
+            </a:prstGeom>
+          </p:spPr>
+        </p:pic>
+        <mc:AlternateContent xmlns:mc="http://schemas.openxmlformats.org/markup-compatibility/2006">
+          <mc:Choice xmlns:a14="http://schemas.microsoft.com/office/drawing/2010/main" Requires="a14">
+            <p:sp>
+              <p:nvSpPr>
+                <p:cNvPr id="160" name="Rechteck: abgerundete Ecken 159">
+                  <a:extLst>
+                    <a:ext uri="{FF2B5EF4-FFF2-40B4-BE49-F238E27FC236}">
+                      <a16:creationId xmlns:a16="http://schemas.microsoft.com/office/drawing/2014/main" id="{82AC59D2-B638-2F3C-3381-30802B6AABF7}"/>
+                    </a:ext>
+                  </a:extLst>
+                </p:cNvPr>
+                <p:cNvSpPr/>
+                <p:nvPr/>
+              </p:nvSpPr>
+              <p:spPr>
+                <a:xfrm>
+                  <a:off x="2856000" y="4020718"/>
+                  <a:ext cx="1080000" cy="172338"/>
+                </a:xfrm>
+                <a:prstGeom prst="roundRect">
+                  <a:avLst/>
+                </a:prstGeom>
+                <a:noFill/>
+                <a:ln>
+                  <a:noFill/>
+                </a:ln>
+              </p:spPr>
+              <p:style>
+                <a:lnRef idx="2">
+                  <a:schemeClr val="accent1">
+                    <a:shade val="15000"/>
+                  </a:schemeClr>
+                </a:lnRef>
+                <a:fillRef idx="1">
+                  <a:schemeClr val="accent1"/>
+                </a:fillRef>
+                <a:effectRef idx="0">
+                  <a:schemeClr val="accent1"/>
+                </a:effectRef>
+                <a:fontRef idx="minor">
+                  <a:schemeClr val="lt1"/>
+                </a:fontRef>
+              </p:style>
+              <p:txBody>
+                <a:bodyPr rtlCol="0" anchor="ctr"/>
+                <a:lstStyle/>
+                <a:p>
+                  <a:pPr algn="ctr"/>
+                  <a:r>
+                    <a:rPr lang="en-US" sz="1050" b="1" i="1" dirty="0">
+                      <a:solidFill>
+                        <a:schemeClr val="tx1">
+                          <a:lumMod val="65000"/>
+                          <a:lumOff val="35000"/>
+                        </a:schemeClr>
+                      </a:solidFill>
+                    </a:rPr>
+                    <a:t>algebraic loop</a:t>
+                  </a:r>
+                  <a14:m/>
+                </a:p>
+              </p:txBody>
+            </p:sp>
+          </mc:Choice>
+          <mc:Fallback>
+            <p:sp>
+              <p:nvSpPr>
+                <p:cNvPr id="160" name="Rechteck: abgerundete Ecken 159">
+                  <a:extLst>
+                    <a:ext uri="{FF2B5EF4-FFF2-40B4-BE49-F238E27FC236}">
+                      <a16:creationId xmlns:a16="http://schemas.microsoft.com/office/drawing/2014/main" id="{82AC59D2-B638-2F3C-3381-30802B6AABF7}"/>
+                    </a:ext>
+                  </a:extLst>
+                </p:cNvPr>
+                <p:cNvSpPr>
+                  <a:spLocks noRot="1" noChangeAspect="1" noMove="1" noResize="1" noEditPoints="1" noAdjustHandles="1" noChangeArrowheads="1" noChangeShapeType="1" noTextEdit="1"/>
+                </p:cNvSpPr>
+                <p:nvPr/>
+              </p:nvSpPr>
+              <p:spPr>
+                <a:xfrm>
+                  <a:off x="2856000" y="4020718"/>
+                  <a:ext cx="1080000" cy="172338"/>
+                </a:xfrm>
+                <a:prstGeom prst="roundRect">
+                  <a:avLst/>
+                </a:prstGeom>
+                <a:blipFill>
+                  <a:blip r:embed="rId10"/>
+                  <a:stretch>
+                    <a:fillRect t="-25000" r="-1130" b="-46429"/>
+                  </a:stretch>
+                </a:blipFill>
+                <a:ln>
+                  <a:noFill/>
+                </a:ln>
+              </p:spPr>
+              <p:txBody>
+                <a:bodyPr/>
+                <a:lstStyle/>
+                <a:p>
+                  <a:r>
+                    <a:rPr lang="en-US">
+                      <a:noFill/>
+                    </a:rPr>
+                    <a:t> </a:t>
+                  </a:r>
+                </a:p>
+              </p:txBody>
+            </p:sp>
+          </mc:Fallback>
+        </mc:AlternateContent>
+        <p:cxnSp>
+          <p:nvCxnSpPr>
+            <p:cNvPr id="169" name="Gerade Verbindung mit Pfeil 168">
+              <a:extLst>
+                <a:ext uri="{FF2B5EF4-FFF2-40B4-BE49-F238E27FC236}">
+                  <a16:creationId xmlns:a16="http://schemas.microsoft.com/office/drawing/2014/main" id="{4212F929-19D7-5DDB-DC41-DF906E5692D4}"/>
+                </a:ext>
+              </a:extLst>
+            </p:cNvPr>
+            <p:cNvCxnSpPr>
+              <a:cxnSpLocks/>
+              <a:endCxn id="139" idx="0"/>
+            </p:cNvCxnSpPr>
+            <p:nvPr/>
+          </p:nvCxnSpPr>
+          <p:spPr>
+            <a:xfrm>
+              <a:off x="4656000" y="3967487"/>
+              <a:ext cx="0" cy="268553"/>
+            </a:xfrm>
+            <a:prstGeom prst="straightConnector1">
+              <a:avLst/>
+            </a:prstGeom>
+            <a:ln>
+              <a:solidFill>
+                <a:srgbClr val="FFC000"/>
+              </a:solidFill>
+              <a:prstDash val="sysDot"/>
+              <a:tailEnd type="triangle"/>
+            </a:ln>
+          </p:spPr>
+          <p:style>
+            <a:lnRef idx="2">
+              <a:schemeClr val="accent1"/>
+            </a:lnRef>
+            <a:fillRef idx="0">
+              <a:schemeClr val="accent1"/>
+            </a:fillRef>
+            <a:effectRef idx="1">
+              <a:schemeClr val="accent1"/>
+            </a:effectRef>
+            <a:fontRef idx="minor">
+              <a:schemeClr val="tx1"/>
+            </a:fontRef>
+          </p:style>
+        </p:cxnSp>
+      </p:grpSp>
+      <p:sp>
+        <p:nvSpPr>
+          <p:cNvPr id="174" name="Rechteck: abgerundete Ecken 173">
+            <a:extLst>
+              <a:ext uri="{FF2B5EF4-FFF2-40B4-BE49-F238E27FC236}">
+                <a16:creationId xmlns:a16="http://schemas.microsoft.com/office/drawing/2014/main" id="{76E1DCB1-08B0-6AB9-2210-16A573F583BA}"/>
+              </a:ext>
+            </a:extLst>
+          </p:cNvPr>
+          <p:cNvSpPr/>
+          <p:nvPr/>
+        </p:nvSpPr>
+        <p:spPr>
+          <a:xfrm>
+            <a:off x="6383998" y="4861037"/>
+            <a:ext cx="2375999" cy="630000"/>
+          </a:xfrm>
+          <a:prstGeom prst="roundRect">
+            <a:avLst/>
+          </a:prstGeom>
+        </p:spPr>
+        <p:style>
+          <a:lnRef idx="2">
+            <a:schemeClr val="accent3">
+              <a:shade val="15000"/>
+            </a:schemeClr>
+          </a:lnRef>
+          <a:fillRef idx="1">
+            <a:schemeClr val="accent3"/>
+          </a:fillRef>
+          <a:effectRef idx="0">
+            <a:schemeClr val="accent3"/>
+          </a:effectRef>
+          <a:fontRef idx="minor">
+            <a:schemeClr val="lt1"/>
+          </a:fontRef>
+        </p:style>
+        <p:txBody>
+          <a:bodyPr rtlCol="0" anchor="ctr"/>
+          <a:lstStyle/>
+          <a:p>
+            <a:pPr algn="ctr"/>
+            <a:r>
+              <a:rPr lang="en-US" sz="1200" i="1" dirty="0"/>
+              <a:t>UR-12</a:t>
+            </a:r>
+          </a:p>
+          <a:p>
+            <a:pPr algn="ctr"/>
+            <a:r>
+              <a:rPr lang="en-US" sz="1200" b="1" dirty="0"/>
+              <a:t>System Graph</a:t>
+            </a:r>
+          </a:p>
+        </p:txBody>
+      </p:sp>
+      <p:sp>
+        <p:nvSpPr>
+          <p:cNvPr id="176" name="Rechteck: abgerundete Ecken 175">
+            <a:extLst>
+              <a:ext uri="{FF2B5EF4-FFF2-40B4-BE49-F238E27FC236}">
+                <a16:creationId xmlns:a16="http://schemas.microsoft.com/office/drawing/2014/main" id="{A653B335-1F97-8A14-DF6F-1BCB43CA7720}"/>
+              </a:ext>
+            </a:extLst>
+          </p:cNvPr>
+          <p:cNvSpPr/>
+          <p:nvPr/>
+        </p:nvSpPr>
+        <p:spPr>
+          <a:xfrm>
+            <a:off x="8831999" y="4861037"/>
+            <a:ext cx="2376001" cy="630000"/>
+          </a:xfrm>
+          <a:prstGeom prst="roundRect">
+            <a:avLst/>
+          </a:prstGeom>
+        </p:spPr>
+        <p:style>
+          <a:lnRef idx="2">
+            <a:schemeClr val="accent3">
+              <a:shade val="15000"/>
+            </a:schemeClr>
+          </a:lnRef>
+          <a:fillRef idx="1">
+            <a:schemeClr val="accent3"/>
+          </a:fillRef>
+          <a:effectRef idx="0">
+            <a:schemeClr val="accent3"/>
+          </a:effectRef>
+          <a:fontRef idx="minor">
+            <a:schemeClr val="lt1"/>
+          </a:fontRef>
+        </p:style>
+        <p:txBody>
+          <a:bodyPr rtlCol="0" anchor="ctr"/>
+          <a:lstStyle/>
+          <a:p>
+            <a:pPr algn="ctr"/>
+            <a:r>
+              <a:rPr lang="en-US" sz="1200" i="1" dirty="0"/>
+              <a:t>UR-13</a:t>
+            </a:r>
+          </a:p>
+          <a:p>
+            <a:pPr algn="ctr"/>
+            <a:r>
+              <a:rPr lang="en-US" sz="1200" b="1" dirty="0"/>
+              <a:t>Simulation History</a:t>
+            </a:r>
+          </a:p>
+        </p:txBody>
+      </p:sp>
+      <p:grpSp>
+        <p:nvGrpSpPr>
+          <p:cNvPr id="215" name="Gruppieren 214">
+            <a:extLst>
+              <a:ext uri="{FF2B5EF4-FFF2-40B4-BE49-F238E27FC236}">
+                <a16:creationId xmlns:a16="http://schemas.microsoft.com/office/drawing/2014/main" id="{AE12FF80-98EB-CBC1-253D-7E8FE4EB284E}"/>
+              </a:ext>
+            </a:extLst>
+          </p:cNvPr>
+          <p:cNvGrpSpPr/>
+          <p:nvPr/>
+        </p:nvGrpSpPr>
+        <p:grpSpPr>
+          <a:xfrm>
+            <a:off x="6927682" y="3818839"/>
+            <a:ext cx="1288630" cy="820208"/>
+            <a:chOff x="6944985" y="4097596"/>
+            <a:chExt cx="1288630" cy="820208"/>
+          </a:xfrm>
+        </p:grpSpPr>
+        <p:sp>
+          <p:nvSpPr>
+            <p:cNvPr id="194" name="Rechteck: abgerundete Ecken 193">
+              <a:extLst>
+                <a:ext uri="{FF2B5EF4-FFF2-40B4-BE49-F238E27FC236}">
+                  <a16:creationId xmlns:a16="http://schemas.microsoft.com/office/drawing/2014/main" id="{42BEDB4E-994E-87E8-D086-76E5A673F93F}"/>
+                </a:ext>
+              </a:extLst>
+            </p:cNvPr>
+            <p:cNvSpPr/>
+            <p:nvPr/>
+          </p:nvSpPr>
+          <p:spPr>
+            <a:xfrm>
+              <a:off x="6944986" y="4097596"/>
+              <a:ext cx="475231" cy="246237"/>
+            </a:xfrm>
+            <a:prstGeom prst="roundRect">
+              <a:avLst/>
+            </a:prstGeom>
+          </p:spPr>
+          <p:style>
+            <a:lnRef idx="2">
+              <a:schemeClr val="accent3">
+                <a:shade val="15000"/>
+              </a:schemeClr>
+            </a:lnRef>
+            <a:fillRef idx="1">
+              <a:schemeClr val="accent3"/>
+            </a:fillRef>
+            <a:effectRef idx="0">
+              <a:schemeClr val="accent3"/>
+            </a:effectRef>
+            <a:fontRef idx="minor">
+              <a:schemeClr val="lt1"/>
+            </a:fontRef>
+          </p:style>
+          <p:txBody>
+            <a:bodyPr rtlCol="0" anchor="ctr"/>
+            <a:lstStyle/>
+            <a:p>
+              <a:pPr algn="ctr"/>
+              <a:endParaRPr lang="en-US" dirty="0"/>
+            </a:p>
+          </p:txBody>
+        </p:sp>
+        <p:sp>
+          <p:nvSpPr>
+            <p:cNvPr id="195" name="Rechteck: abgerundete Ecken 194">
+              <a:extLst>
+                <a:ext uri="{FF2B5EF4-FFF2-40B4-BE49-F238E27FC236}">
+                  <a16:creationId xmlns:a16="http://schemas.microsoft.com/office/drawing/2014/main" id="{7D64E6EE-C830-11AB-ADE8-F564A9E01E9D}"/>
+                </a:ext>
+              </a:extLst>
+            </p:cNvPr>
+            <p:cNvSpPr/>
+            <p:nvPr/>
+          </p:nvSpPr>
+          <p:spPr>
+            <a:xfrm>
+              <a:off x="7754934" y="4097596"/>
+              <a:ext cx="475231" cy="246237"/>
+            </a:xfrm>
+            <a:prstGeom prst="roundRect">
+              <a:avLst/>
+            </a:prstGeom>
+          </p:spPr>
+          <p:style>
+            <a:lnRef idx="2">
+              <a:schemeClr val="accent3">
+                <a:shade val="15000"/>
+              </a:schemeClr>
+            </a:lnRef>
+            <a:fillRef idx="1">
+              <a:schemeClr val="accent3"/>
+            </a:fillRef>
+            <a:effectRef idx="0">
+              <a:schemeClr val="accent3"/>
+            </a:effectRef>
+            <a:fontRef idx="minor">
+              <a:schemeClr val="lt1"/>
+            </a:fontRef>
+          </p:style>
+          <p:txBody>
+            <a:bodyPr rtlCol="0" anchor="ctr"/>
+            <a:lstStyle/>
+            <a:p>
+              <a:pPr algn="ctr"/>
+              <a:endParaRPr lang="en-US" dirty="0"/>
+            </a:p>
+          </p:txBody>
+        </p:sp>
+        <p:sp>
+          <p:nvSpPr>
+            <p:cNvPr id="197" name="Rechteck: abgerundete Ecken 196">
+              <a:extLst>
+                <a:ext uri="{FF2B5EF4-FFF2-40B4-BE49-F238E27FC236}">
+                  <a16:creationId xmlns:a16="http://schemas.microsoft.com/office/drawing/2014/main" id="{C0E086DB-3D4F-EC28-DCBF-316248ECCBE5}"/>
+                </a:ext>
+              </a:extLst>
+            </p:cNvPr>
+            <p:cNvSpPr/>
+            <p:nvPr/>
+          </p:nvSpPr>
+          <p:spPr>
+            <a:xfrm>
+              <a:off x="6944985" y="4671567"/>
+              <a:ext cx="475231" cy="246237"/>
+            </a:xfrm>
+            <a:prstGeom prst="roundRect">
+              <a:avLst/>
+            </a:prstGeom>
+          </p:spPr>
+          <p:style>
+            <a:lnRef idx="2">
+              <a:schemeClr val="accent3">
+                <a:shade val="15000"/>
+              </a:schemeClr>
+            </a:lnRef>
+            <a:fillRef idx="1">
+              <a:schemeClr val="accent3"/>
+            </a:fillRef>
+            <a:effectRef idx="0">
+              <a:schemeClr val="accent3"/>
+            </a:effectRef>
+            <a:fontRef idx="minor">
+              <a:schemeClr val="lt1"/>
+            </a:fontRef>
+          </p:style>
+          <p:txBody>
+            <a:bodyPr rtlCol="0" anchor="ctr"/>
+            <a:lstStyle/>
+            <a:p>
+              <a:pPr algn="ctr"/>
+              <a:endParaRPr lang="en-US" dirty="0"/>
+            </a:p>
+          </p:txBody>
+        </p:sp>
+        <p:sp>
+          <p:nvSpPr>
+            <p:cNvPr id="198" name="Rechteck: abgerundete Ecken 197">
+              <a:extLst>
+                <a:ext uri="{FF2B5EF4-FFF2-40B4-BE49-F238E27FC236}">
+                  <a16:creationId xmlns:a16="http://schemas.microsoft.com/office/drawing/2014/main" id="{3858520B-E032-C8CC-BF75-C3588B85D808}"/>
+                </a:ext>
+              </a:extLst>
+            </p:cNvPr>
+            <p:cNvSpPr/>
+            <p:nvPr/>
+          </p:nvSpPr>
+          <p:spPr>
+            <a:xfrm>
+              <a:off x="7758384" y="4671566"/>
+              <a:ext cx="475231" cy="246237"/>
+            </a:xfrm>
+            <a:prstGeom prst="roundRect">
+              <a:avLst/>
+            </a:prstGeom>
+          </p:spPr>
+          <p:style>
+            <a:lnRef idx="2">
+              <a:schemeClr val="accent3">
+                <a:shade val="15000"/>
+              </a:schemeClr>
+            </a:lnRef>
+            <a:fillRef idx="1">
+              <a:schemeClr val="accent3"/>
+            </a:fillRef>
+            <a:effectRef idx="0">
+              <a:schemeClr val="accent3"/>
+            </a:effectRef>
+            <a:fontRef idx="minor">
+              <a:schemeClr val="lt1"/>
+            </a:fontRef>
+          </p:style>
+          <p:txBody>
+            <a:bodyPr rtlCol="0" anchor="ctr"/>
+            <a:lstStyle/>
+            <a:p>
+              <a:pPr algn="ctr"/>
+              <a:endParaRPr lang="en-US" dirty="0"/>
+            </a:p>
+          </p:txBody>
+        </p:sp>
+        <p:cxnSp>
+          <p:nvCxnSpPr>
+            <p:cNvPr id="200" name="Gerade Verbindung mit Pfeil 199">
+              <a:extLst>
+                <a:ext uri="{FF2B5EF4-FFF2-40B4-BE49-F238E27FC236}">
+                  <a16:creationId xmlns:a16="http://schemas.microsoft.com/office/drawing/2014/main" id="{9F075336-B986-7EF9-7407-9420668243B9}"/>
+                </a:ext>
+              </a:extLst>
+            </p:cNvPr>
+            <p:cNvCxnSpPr>
+              <a:stCxn id="194" idx="3"/>
+              <a:endCxn id="195" idx="1"/>
+            </p:cNvCxnSpPr>
+            <p:nvPr/>
+          </p:nvCxnSpPr>
+          <p:spPr>
+            <a:xfrm>
+              <a:off x="7420217" y="4220715"/>
+              <a:ext cx="334717" cy="0"/>
+            </a:xfrm>
+            <a:prstGeom prst="straightConnector1">
+              <a:avLst/>
+            </a:prstGeom>
+            <a:ln>
+              <a:solidFill>
+                <a:schemeClr val="tx1"/>
+              </a:solidFill>
+              <a:tailEnd type="triangle"/>
+            </a:ln>
+          </p:spPr>
+          <p:style>
+            <a:lnRef idx="2">
+              <a:schemeClr val="accent1"/>
+            </a:lnRef>
+            <a:fillRef idx="0">
+              <a:schemeClr val="accent1"/>
+            </a:fillRef>
+            <a:effectRef idx="1">
+              <a:schemeClr val="accent1"/>
+            </a:effectRef>
+            <a:fontRef idx="minor">
+              <a:schemeClr val="tx1"/>
+            </a:fontRef>
+          </p:style>
+        </p:cxnSp>
+        <p:cxnSp>
+          <p:nvCxnSpPr>
+            <p:cNvPr id="204" name="Gerade Verbindung mit Pfeil 203">
+              <a:extLst>
+                <a:ext uri="{FF2B5EF4-FFF2-40B4-BE49-F238E27FC236}">
+                  <a16:creationId xmlns:a16="http://schemas.microsoft.com/office/drawing/2014/main" id="{C24BE264-705D-F279-83A0-F425227C23E8}"/>
+                </a:ext>
+              </a:extLst>
+            </p:cNvPr>
+            <p:cNvCxnSpPr>
+              <a:cxnSpLocks/>
+              <a:stCxn id="194" idx="2"/>
+              <a:endCxn id="197" idx="0"/>
+            </p:cNvCxnSpPr>
+            <p:nvPr/>
+          </p:nvCxnSpPr>
+          <p:spPr>
+            <a:xfrm flipH="1">
+              <a:off x="7182601" y="4343833"/>
+              <a:ext cx="1" cy="327734"/>
+            </a:xfrm>
+            <a:prstGeom prst="straightConnector1">
+              <a:avLst/>
+            </a:prstGeom>
+            <a:ln>
+              <a:solidFill>
+                <a:schemeClr val="tx1"/>
+              </a:solidFill>
+              <a:tailEnd type="triangle"/>
+            </a:ln>
+          </p:spPr>
+          <p:style>
+            <a:lnRef idx="2">
+              <a:schemeClr val="accent1"/>
+            </a:lnRef>
+            <a:fillRef idx="0">
+              <a:schemeClr val="accent1"/>
+            </a:fillRef>
+            <a:effectRef idx="1">
+              <a:schemeClr val="accent1"/>
+            </a:effectRef>
+            <a:fontRef idx="minor">
+              <a:schemeClr val="tx1"/>
+            </a:fontRef>
+          </p:style>
+        </p:cxnSp>
+        <p:cxnSp>
+          <p:nvCxnSpPr>
+            <p:cNvPr id="209" name="Gerade Verbindung mit Pfeil 208">
+              <a:extLst>
+                <a:ext uri="{FF2B5EF4-FFF2-40B4-BE49-F238E27FC236}">
+                  <a16:creationId xmlns:a16="http://schemas.microsoft.com/office/drawing/2014/main" id="{5B35AD03-5AF0-D92C-C66D-CDE056C549FE}"/>
+                </a:ext>
+              </a:extLst>
+            </p:cNvPr>
+            <p:cNvCxnSpPr>
+              <a:stCxn id="195" idx="2"/>
+              <a:endCxn id="198" idx="0"/>
+            </p:cNvCxnSpPr>
+            <p:nvPr/>
+          </p:nvCxnSpPr>
+          <p:spPr>
+            <a:xfrm>
+              <a:off x="7992550" y="4343833"/>
+              <a:ext cx="3450" cy="327733"/>
+            </a:xfrm>
+            <a:prstGeom prst="straightConnector1">
+              <a:avLst/>
+            </a:prstGeom>
+            <a:ln>
+              <a:solidFill>
+                <a:schemeClr val="tx1"/>
+              </a:solidFill>
+              <a:tailEnd type="triangle"/>
+            </a:ln>
+          </p:spPr>
+          <p:style>
+            <a:lnRef idx="2">
+              <a:schemeClr val="accent1"/>
+            </a:lnRef>
+            <a:fillRef idx="0">
+              <a:schemeClr val="accent1"/>
+            </a:fillRef>
+            <a:effectRef idx="1">
+              <a:schemeClr val="accent1"/>
+            </a:effectRef>
+            <a:fontRef idx="minor">
+              <a:schemeClr val="tx1"/>
+            </a:fontRef>
+          </p:style>
+        </p:cxnSp>
+        <p:cxnSp>
+          <p:nvCxnSpPr>
+            <p:cNvPr id="211" name="Gerade Verbindung mit Pfeil 210">
+              <a:extLst>
+                <a:ext uri="{FF2B5EF4-FFF2-40B4-BE49-F238E27FC236}">
+                  <a16:creationId xmlns:a16="http://schemas.microsoft.com/office/drawing/2014/main" id="{3C614351-E12B-C50F-4CAE-AA8305A9FE83}"/>
+                </a:ext>
+              </a:extLst>
+            </p:cNvPr>
+            <p:cNvCxnSpPr>
+              <a:stCxn id="197" idx="3"/>
+              <a:endCxn id="198" idx="1"/>
+            </p:cNvCxnSpPr>
+            <p:nvPr/>
+          </p:nvCxnSpPr>
+          <p:spPr>
+            <a:xfrm flipV="1">
+              <a:off x="7420216" y="4794685"/>
+              <a:ext cx="338168" cy="1"/>
+            </a:xfrm>
+            <a:prstGeom prst="straightConnector1">
+              <a:avLst/>
+            </a:prstGeom>
+            <a:ln>
+              <a:solidFill>
+                <a:schemeClr val="tx1"/>
+              </a:solidFill>
+              <a:tailEnd type="triangle"/>
+            </a:ln>
+          </p:spPr>
+          <p:style>
+            <a:lnRef idx="2">
+              <a:schemeClr val="accent1"/>
+            </a:lnRef>
+            <a:fillRef idx="0">
+              <a:schemeClr val="accent1"/>
+            </a:fillRef>
+            <a:effectRef idx="1">
+              <a:schemeClr val="accent1"/>
+            </a:effectRef>
+            <a:fontRef idx="minor">
+              <a:schemeClr val="tx1"/>
+            </a:fontRef>
+          </p:style>
+        </p:cxnSp>
+      </p:grpSp>
+      <p:grpSp>
+        <p:nvGrpSpPr>
+          <p:cNvPr id="214" name="Gruppieren 213">
+            <a:extLst>
+              <a:ext uri="{FF2B5EF4-FFF2-40B4-BE49-F238E27FC236}">
+                <a16:creationId xmlns:a16="http://schemas.microsoft.com/office/drawing/2014/main" id="{D5A4BF0F-1D1F-115E-0414-CB1752C3CD7A}"/>
+              </a:ext>
+            </a:extLst>
+          </p:cNvPr>
+          <p:cNvGrpSpPr/>
+          <p:nvPr/>
+        </p:nvGrpSpPr>
+        <p:grpSpPr>
+          <a:xfrm>
+            <a:off x="9179982" y="3734358"/>
+            <a:ext cx="1715498" cy="1008568"/>
+            <a:chOff x="9192000" y="4004432"/>
+            <a:chExt cx="1715498" cy="1008568"/>
+          </a:xfrm>
+        </p:grpSpPr>
+        <p:cxnSp>
+          <p:nvCxnSpPr>
+            <p:cNvPr id="181" name="Gerade Verbindung mit Pfeil 180">
+              <a:extLst>
+                <a:ext uri="{FF2B5EF4-FFF2-40B4-BE49-F238E27FC236}">
+                  <a16:creationId xmlns:a16="http://schemas.microsoft.com/office/drawing/2014/main" id="{6530D033-9ABF-500A-2004-E3BE57EC119A}"/>
+                </a:ext>
+              </a:extLst>
+            </p:cNvPr>
+            <p:cNvCxnSpPr>
+              <a:cxnSpLocks/>
+            </p:cNvCxnSpPr>
+            <p:nvPr/>
+          </p:nvCxnSpPr>
+          <p:spPr>
+            <a:xfrm flipV="1">
+              <a:off x="9192000" y="4004432"/>
+              <a:ext cx="0" cy="1008568"/>
+            </a:xfrm>
+            <a:prstGeom prst="straightConnector1">
+              <a:avLst/>
+            </a:prstGeom>
+            <a:ln>
+              <a:solidFill>
+                <a:schemeClr val="tx1">
+                  <a:lumMod val="50000"/>
+                  <a:lumOff val="50000"/>
+                </a:schemeClr>
+              </a:solidFill>
+              <a:headEnd type="none" w="med" len="med"/>
+              <a:tailEnd type="none" w="med" len="med"/>
+            </a:ln>
+          </p:spPr>
+          <p:style>
+            <a:lnRef idx="2">
+              <a:schemeClr val="accent1"/>
+            </a:lnRef>
+            <a:fillRef idx="0">
+              <a:schemeClr val="accent1"/>
+            </a:fillRef>
+            <a:effectRef idx="1">
+              <a:schemeClr val="accent1"/>
+            </a:effectRef>
+            <a:fontRef idx="minor">
+              <a:schemeClr val="tx1"/>
+            </a:fontRef>
+          </p:style>
+        </p:cxnSp>
+        <p:cxnSp>
+          <p:nvCxnSpPr>
+            <p:cNvPr id="185" name="Gerade Verbindung mit Pfeil 184">
+              <a:extLst>
+                <a:ext uri="{FF2B5EF4-FFF2-40B4-BE49-F238E27FC236}">
+                  <a16:creationId xmlns:a16="http://schemas.microsoft.com/office/drawing/2014/main" id="{1D071D28-F290-6D2E-11E9-A3E42EEAAF3A}"/>
+                </a:ext>
+              </a:extLst>
+            </p:cNvPr>
+            <p:cNvCxnSpPr>
+              <a:cxnSpLocks/>
+            </p:cNvCxnSpPr>
+            <p:nvPr/>
+          </p:nvCxnSpPr>
+          <p:spPr>
+            <a:xfrm>
+              <a:off x="9192000" y="5013000"/>
+              <a:ext cx="1665210" cy="0"/>
+            </a:xfrm>
+            <a:prstGeom prst="straightConnector1">
+              <a:avLst/>
+            </a:prstGeom>
+            <a:ln>
+              <a:solidFill>
+                <a:schemeClr val="tx1">
+                  <a:lumMod val="50000"/>
+                  <a:lumOff val="50000"/>
+                </a:schemeClr>
+              </a:solidFill>
+              <a:headEnd type="none" w="med" len="med"/>
+              <a:tailEnd type="none" w="med" len="med"/>
+            </a:ln>
+          </p:spPr>
+          <p:style>
+            <a:lnRef idx="2">
+              <a:schemeClr val="accent1"/>
+            </a:lnRef>
+            <a:fillRef idx="0">
+              <a:schemeClr val="accent1"/>
+            </a:fillRef>
+            <a:effectRef idx="1">
+              <a:schemeClr val="accent1"/>
+            </a:effectRef>
+            <a:fontRef idx="minor">
+              <a:schemeClr val="tx1"/>
+            </a:fontRef>
+          </p:style>
+        </p:cxnSp>
+        <p:sp>
+          <p:nvSpPr>
+            <p:cNvPr id="212" name="Freihandform: Form 211">
+              <a:extLst>
+                <a:ext uri="{FF2B5EF4-FFF2-40B4-BE49-F238E27FC236}">
+                  <a16:creationId xmlns:a16="http://schemas.microsoft.com/office/drawing/2014/main" id="{06E7747A-E5C4-E674-AABB-CD02E46B44BB}"/>
+                </a:ext>
+              </a:extLst>
+            </p:cNvPr>
+            <p:cNvSpPr/>
+            <p:nvPr/>
+          </p:nvSpPr>
+          <p:spPr>
+            <a:xfrm>
+              <a:off x="9197760" y="4463981"/>
+              <a:ext cx="1685925" cy="297161"/>
+            </a:xfrm>
+            <a:custGeom>
+              <a:avLst/>
+              <a:gdLst>
+                <a:gd name="csX0" fmla="*/ 0 w 1685925"/>
+                <a:gd name="csY0" fmla="*/ 296665 h 297161"/>
+                <a:gd name="csX1" fmla="*/ 147638 w 1685925"/>
+                <a:gd name="csY1" fmla="*/ 272853 h 297161"/>
+                <a:gd name="csX2" fmla="*/ 371475 w 1685925"/>
+                <a:gd name="csY2" fmla="*/ 139503 h 297161"/>
+                <a:gd name="csX3" fmla="*/ 633413 w 1685925"/>
+                <a:gd name="csY3" fmla="*/ 91878 h 297161"/>
+                <a:gd name="csX4" fmla="*/ 981075 w 1685925"/>
+                <a:gd name="csY4" fmla="*/ 172840 h 297161"/>
+                <a:gd name="csX5" fmla="*/ 1233488 w 1685925"/>
+                <a:gd name="csY5" fmla="*/ 225228 h 297161"/>
+                <a:gd name="csX6" fmla="*/ 1438275 w 1685925"/>
+                <a:gd name="csY6" fmla="*/ 139503 h 297161"/>
+                <a:gd name="csX7" fmla="*/ 1638300 w 1685925"/>
+                <a:gd name="csY7" fmla="*/ 10915 h 297161"/>
+                <a:gd name="csX8" fmla="*/ 1685925 w 1685925"/>
+                <a:gd name="csY8" fmla="*/ 15678 h 297161"/>
+              </a:gdLst>
+              <a:ahLst/>
+              <a:cxnLst>
+                <a:cxn ang="0">
+                  <a:pos x="csX0" y="csY0"/>
+                </a:cxn>
+                <a:cxn ang="0">
+                  <a:pos x="csX1" y="csY1"/>
+                </a:cxn>
+                <a:cxn ang="0">
+                  <a:pos x="csX2" y="csY2"/>
+                </a:cxn>
+                <a:cxn ang="0">
+                  <a:pos x="csX3" y="csY3"/>
+                </a:cxn>
+                <a:cxn ang="0">
+                  <a:pos x="csX4" y="csY4"/>
+                </a:cxn>
+                <a:cxn ang="0">
+                  <a:pos x="csX5" y="csY5"/>
+                </a:cxn>
+                <a:cxn ang="0">
+                  <a:pos x="csX6" y="csY6"/>
+                </a:cxn>
+                <a:cxn ang="0">
+                  <a:pos x="csX7" y="csY7"/>
+                </a:cxn>
+                <a:cxn ang="0">
+                  <a:pos x="csX8" y="csY8"/>
+                </a:cxn>
+              </a:cxnLst>
+              <a:rect l="l" t="t" r="r" b="b"/>
+              <a:pathLst>
+                <a:path w="1685925" h="297161">
+                  <a:moveTo>
+                    <a:pt x="0" y="296665"/>
+                  </a:moveTo>
+                  <a:cubicBezTo>
+                    <a:pt x="42862" y="297856"/>
+                    <a:pt x="85725" y="299047"/>
+                    <a:pt x="147638" y="272853"/>
+                  </a:cubicBezTo>
+                  <a:cubicBezTo>
+                    <a:pt x="209551" y="246659"/>
+                    <a:pt x="290513" y="169665"/>
+                    <a:pt x="371475" y="139503"/>
+                  </a:cubicBezTo>
+                  <a:cubicBezTo>
+                    <a:pt x="452437" y="109341"/>
+                    <a:pt x="531813" y="86322"/>
+                    <a:pt x="633413" y="91878"/>
+                  </a:cubicBezTo>
+                  <a:cubicBezTo>
+                    <a:pt x="735013" y="97434"/>
+                    <a:pt x="881063" y="150615"/>
+                    <a:pt x="981075" y="172840"/>
+                  </a:cubicBezTo>
+                  <a:cubicBezTo>
+                    <a:pt x="1081087" y="195065"/>
+                    <a:pt x="1157288" y="230784"/>
+                    <a:pt x="1233488" y="225228"/>
+                  </a:cubicBezTo>
+                  <a:cubicBezTo>
+                    <a:pt x="1309688" y="219672"/>
+                    <a:pt x="1370806" y="175222"/>
+                    <a:pt x="1438275" y="139503"/>
+                  </a:cubicBezTo>
+                  <a:cubicBezTo>
+                    <a:pt x="1505744" y="103784"/>
+                    <a:pt x="1597025" y="31552"/>
+                    <a:pt x="1638300" y="10915"/>
+                  </a:cubicBezTo>
+                  <a:cubicBezTo>
+                    <a:pt x="1679575" y="-9723"/>
+                    <a:pt x="1682750" y="2977"/>
+                    <a:pt x="1685925" y="15678"/>
+                  </a:cubicBezTo>
+                </a:path>
+              </a:pathLst>
+            </a:custGeom>
+          </p:spPr>
+          <p:style>
+            <a:lnRef idx="1">
+              <a:schemeClr val="accent3"/>
+            </a:lnRef>
+            <a:fillRef idx="0">
+              <a:schemeClr val="accent3"/>
+            </a:fillRef>
+            <a:effectRef idx="0">
+              <a:schemeClr val="accent3"/>
+            </a:effectRef>
+            <a:fontRef idx="minor">
+              <a:schemeClr val="tx1"/>
+            </a:fontRef>
+          </p:style>
+          <p:txBody>
+            <a:bodyPr rtlCol="0" anchor="ctr"/>
+            <a:lstStyle/>
+            <a:p>
+              <a:pPr algn="ctr"/>
+              <a:endParaRPr lang="en-US"/>
+            </a:p>
+          </p:txBody>
+        </p:sp>
+        <p:sp>
+          <p:nvSpPr>
+            <p:cNvPr id="213" name="Freihandform: Form 212">
+              <a:extLst>
+                <a:ext uri="{FF2B5EF4-FFF2-40B4-BE49-F238E27FC236}">
+                  <a16:creationId xmlns:a16="http://schemas.microsoft.com/office/drawing/2014/main" id="{82BF6734-5075-9E99-22B0-1166A6B5496F}"/>
+                </a:ext>
+              </a:extLst>
+            </p:cNvPr>
+            <p:cNvSpPr/>
+            <p:nvPr/>
+          </p:nvSpPr>
+          <p:spPr>
+            <a:xfrm>
+              <a:off x="9192998" y="4136759"/>
+              <a:ext cx="1714500" cy="663409"/>
+            </a:xfrm>
+            <a:custGeom>
+              <a:avLst/>
+              <a:gdLst>
+                <a:gd name="csX0" fmla="*/ 0 w 1714500"/>
+                <a:gd name="csY0" fmla="*/ 466725 h 663409"/>
+                <a:gd name="csX1" fmla="*/ 119062 w 1714500"/>
+                <a:gd name="csY1" fmla="*/ 461962 h 663409"/>
+                <a:gd name="csX2" fmla="*/ 280987 w 1714500"/>
+                <a:gd name="csY2" fmla="*/ 547687 h 663409"/>
+                <a:gd name="csX3" fmla="*/ 533400 w 1714500"/>
+                <a:gd name="csY3" fmla="*/ 628650 h 663409"/>
+                <a:gd name="csX4" fmla="*/ 914400 w 1714500"/>
+                <a:gd name="csY4" fmla="*/ 657225 h 663409"/>
+                <a:gd name="csX5" fmla="*/ 1104900 w 1714500"/>
+                <a:gd name="csY5" fmla="*/ 514350 h 663409"/>
+                <a:gd name="csX6" fmla="*/ 1223962 w 1714500"/>
+                <a:gd name="csY6" fmla="*/ 219075 h 663409"/>
+                <a:gd name="csX7" fmla="*/ 1395412 w 1714500"/>
+                <a:gd name="csY7" fmla="*/ 42862 h 663409"/>
+                <a:gd name="csX8" fmla="*/ 1714500 w 1714500"/>
+                <a:gd name="csY8" fmla="*/ 0 h 663409"/>
+              </a:gdLst>
+              <a:ahLst/>
+              <a:cxnLst>
+                <a:cxn ang="0">
+                  <a:pos x="csX0" y="csY0"/>
+                </a:cxn>
+                <a:cxn ang="0">
+                  <a:pos x="csX1" y="csY1"/>
+                </a:cxn>
+                <a:cxn ang="0">
+                  <a:pos x="csX2" y="csY2"/>
+                </a:cxn>
+                <a:cxn ang="0">
+                  <a:pos x="csX3" y="csY3"/>
+                </a:cxn>
+                <a:cxn ang="0">
+                  <a:pos x="csX4" y="csY4"/>
+                </a:cxn>
+                <a:cxn ang="0">
+                  <a:pos x="csX5" y="csY5"/>
+                </a:cxn>
+                <a:cxn ang="0">
+                  <a:pos x="csX6" y="csY6"/>
+                </a:cxn>
+                <a:cxn ang="0">
+                  <a:pos x="csX7" y="csY7"/>
+                </a:cxn>
+                <a:cxn ang="0">
+                  <a:pos x="csX8" y="csY8"/>
+                </a:cxn>
+              </a:cxnLst>
+              <a:rect l="l" t="t" r="r" b="b"/>
+              <a:pathLst>
+                <a:path w="1714500" h="663409">
+                  <a:moveTo>
+                    <a:pt x="0" y="466725"/>
+                  </a:moveTo>
+                  <a:cubicBezTo>
+                    <a:pt x="36115" y="457596"/>
+                    <a:pt x="72231" y="448468"/>
+                    <a:pt x="119062" y="461962"/>
+                  </a:cubicBezTo>
+                  <a:cubicBezTo>
+                    <a:pt x="165893" y="475456"/>
+                    <a:pt x="211931" y="519906"/>
+                    <a:pt x="280987" y="547687"/>
+                  </a:cubicBezTo>
+                  <a:cubicBezTo>
+                    <a:pt x="350043" y="575468"/>
+                    <a:pt x="427831" y="610394"/>
+                    <a:pt x="533400" y="628650"/>
+                  </a:cubicBezTo>
+                  <a:cubicBezTo>
+                    <a:pt x="638969" y="646906"/>
+                    <a:pt x="819150" y="676275"/>
+                    <a:pt x="914400" y="657225"/>
+                  </a:cubicBezTo>
+                  <a:cubicBezTo>
+                    <a:pt x="1009650" y="638175"/>
+                    <a:pt x="1053306" y="587375"/>
+                    <a:pt x="1104900" y="514350"/>
+                  </a:cubicBezTo>
+                  <a:cubicBezTo>
+                    <a:pt x="1156494" y="441325"/>
+                    <a:pt x="1175543" y="297656"/>
+                    <a:pt x="1223962" y="219075"/>
+                  </a:cubicBezTo>
+                  <a:cubicBezTo>
+                    <a:pt x="1272381" y="140494"/>
+                    <a:pt x="1313656" y="79374"/>
+                    <a:pt x="1395412" y="42862"/>
+                  </a:cubicBezTo>
+                  <a:cubicBezTo>
+                    <a:pt x="1477168" y="6350"/>
+                    <a:pt x="1595834" y="3175"/>
+                    <a:pt x="1714500" y="0"/>
+                  </a:cubicBezTo>
+                </a:path>
+              </a:pathLst>
+            </a:custGeom>
+          </p:spPr>
+          <p:style>
+            <a:lnRef idx="1">
+              <a:schemeClr val="accent6"/>
+            </a:lnRef>
+            <a:fillRef idx="0">
+              <a:schemeClr val="accent6"/>
+            </a:fillRef>
+            <a:effectRef idx="0">
+              <a:schemeClr val="accent6"/>
+            </a:effectRef>
+            <a:fontRef idx="minor">
+              <a:schemeClr val="tx1"/>
+            </a:fontRef>
+          </p:style>
+          <p:txBody>
+            <a:bodyPr rtlCol="0" anchor="ctr"/>
+            <a:lstStyle/>
+            <a:p>
+              <a:pPr algn="ctr"/>
+              <a:endParaRPr lang="en-US"/>
+            </a:p>
+          </p:txBody>
+        </p:sp>
+      </p:grpSp>
+      <p:cxnSp>
+        <p:nvCxnSpPr>
+          <p:cNvPr id="221" name="Gerader Verbinder 220">
+            <a:extLst>
+              <a:ext uri="{FF2B5EF4-FFF2-40B4-BE49-F238E27FC236}">
+                <a16:creationId xmlns:a16="http://schemas.microsoft.com/office/drawing/2014/main" id="{27664EDF-9F9E-FA31-005A-CC9190F063C9}"/>
+              </a:ext>
+            </a:extLst>
+          </p:cNvPr>
+          <p:cNvCxnSpPr/>
+          <p:nvPr/>
+        </p:nvCxnSpPr>
+        <p:spPr>
+          <a:xfrm>
+            <a:off x="6096000" y="473976"/>
+            <a:ext cx="0" cy="5328000"/>
+          </a:xfrm>
+          <a:prstGeom prst="line">
+            <a:avLst/>
+          </a:prstGeom>
+          <a:ln w="12700">
+            <a:solidFill>
+              <a:schemeClr val="tx1">
+                <a:lumMod val="50000"/>
+                <a:lumOff val="50000"/>
+              </a:schemeClr>
+            </a:solidFill>
+            <a:prstDash val="solid"/>
+          </a:ln>
+        </p:spPr>
+        <p:style>
+          <a:lnRef idx="2">
+            <a:schemeClr val="accent3"/>
+          </a:lnRef>
+          <a:fillRef idx="0">
+            <a:schemeClr val="accent3"/>
+          </a:fillRef>
+          <a:effectRef idx="1">
+            <a:schemeClr val="accent3"/>
+          </a:effectRef>
+          <a:fontRef idx="minor">
+            <a:schemeClr val="tx1"/>
+          </a:fontRef>
+        </p:style>
+      </p:cxnSp>
+      <p:cxnSp>
+        <p:nvCxnSpPr>
+          <p:cNvPr id="222" name="Gerader Verbinder 221">
+            <a:extLst>
+              <a:ext uri="{FF2B5EF4-FFF2-40B4-BE49-F238E27FC236}">
+                <a16:creationId xmlns:a16="http://schemas.microsoft.com/office/drawing/2014/main" id="{00BDBF29-5D26-3BC9-7952-70AC7172F7F7}"/>
+              </a:ext>
+            </a:extLst>
+          </p:cNvPr>
+          <p:cNvCxnSpPr>
+            <a:cxnSpLocks/>
+          </p:cNvCxnSpPr>
+          <p:nvPr/>
+        </p:nvCxnSpPr>
+        <p:spPr>
+          <a:xfrm>
+            <a:off x="696000" y="3137976"/>
+            <a:ext cx="10799999" cy="0"/>
+          </a:xfrm>
+          <a:prstGeom prst="line">
+            <a:avLst/>
+          </a:prstGeom>
+          <a:ln w="12700">
+            <a:solidFill>
+              <a:schemeClr val="tx1">
+                <a:lumMod val="50000"/>
+                <a:lumOff val="50000"/>
+              </a:schemeClr>
+            </a:solidFill>
+            <a:prstDash val="solid"/>
+          </a:ln>
+        </p:spPr>
+        <p:style>
+          <a:lnRef idx="2">
+            <a:schemeClr val="accent3"/>
+          </a:lnRef>
+          <a:fillRef idx="0">
+            <a:schemeClr val="accent3"/>
+          </a:fillRef>
+          <a:effectRef idx="1">
+            <a:schemeClr val="accent3"/>
+          </a:effectRef>
+          <a:fontRef idx="minor">
+            <a:schemeClr val="tx1"/>
+          </a:fontRef>
+        </p:style>
+      </p:cxnSp>
+      <p:sp>
+        <p:nvSpPr>
+          <p:cNvPr id="225" name="Rechteck: abgerundete Ecken 224">
+            <a:extLst>
+              <a:ext uri="{FF2B5EF4-FFF2-40B4-BE49-F238E27FC236}">
+                <a16:creationId xmlns:a16="http://schemas.microsoft.com/office/drawing/2014/main" id="{DA8C6AE3-3C6D-584E-4696-28D55C6513FD}"/>
+              </a:ext>
+            </a:extLst>
+          </p:cNvPr>
+          <p:cNvSpPr/>
+          <p:nvPr/>
+        </p:nvSpPr>
+        <p:spPr>
+          <a:xfrm>
+            <a:off x="1056000" y="6233976"/>
+            <a:ext cx="1440000" cy="432000"/>
+          </a:xfrm>
+          <a:prstGeom prst="roundRect">
+            <a:avLst/>
+          </a:prstGeom>
+          <a:solidFill>
+            <a:schemeClr val="accent3">
+              <a:alpha val="50000"/>
+            </a:schemeClr>
+          </a:solidFill>
+          <a:ln>
+            <a:noFill/>
+          </a:ln>
+        </p:spPr>
+        <p:style>
+          <a:lnRef idx="0">
+            <a:scrgbClr r="0" g="0" b="0"/>
+          </a:lnRef>
+          <a:fillRef idx="0">
+            <a:scrgbClr r="0" g="0" b="0"/>
+          </a:fillRef>
+          <a:effectRef idx="0">
+            <a:scrgbClr r="0" g="0" b="0"/>
+          </a:effectRef>
+          <a:fontRef idx="minor">
+            <a:schemeClr val="lt1"/>
+          </a:fontRef>
+        </p:style>
+        <p:txBody>
+          <a:bodyPr rtlCol="0" anchor="ctr"/>
+          <a:lstStyle/>
+          <a:p>
+            <a:pPr algn="ctr"/>
+            <a:r>
+              <a:rPr lang="en-US" dirty="0"/>
+              <a:t>UR</a:t>
+            </a:r>
+          </a:p>
+        </p:txBody>
+      </p:sp>
+      <p:sp>
+        <p:nvSpPr>
+          <p:cNvPr id="226" name="Rechteck: abgerundete Ecken 225">
+            <a:extLst>
+              <a:ext uri="{FF2B5EF4-FFF2-40B4-BE49-F238E27FC236}">
+                <a16:creationId xmlns:a16="http://schemas.microsoft.com/office/drawing/2014/main" id="{88CF2902-DA41-EFD5-6C80-CB9BD3E98B16}"/>
+              </a:ext>
+            </a:extLst>
+          </p:cNvPr>
+          <p:cNvSpPr/>
+          <p:nvPr/>
+        </p:nvSpPr>
+        <p:spPr>
+          <a:xfrm>
+            <a:off x="3939332" y="6237000"/>
+            <a:ext cx="1440000" cy="432000"/>
+          </a:xfrm>
+          <a:prstGeom prst="roundRect">
+            <a:avLst/>
+          </a:prstGeom>
+          <a:solidFill>
+            <a:schemeClr val="accent3">
+              <a:alpha val="50000"/>
+            </a:schemeClr>
+          </a:solidFill>
+          <a:ln>
+            <a:noFill/>
+          </a:ln>
+        </p:spPr>
+        <p:style>
+          <a:lnRef idx="0">
+            <a:scrgbClr r="0" g="0" b="0"/>
+          </a:lnRef>
+          <a:fillRef idx="0">
+            <a:scrgbClr r="0" g="0" b="0"/>
+          </a:fillRef>
+          <a:effectRef idx="0">
+            <a:scrgbClr r="0" g="0" b="0"/>
+          </a:effectRef>
+          <a:fontRef idx="minor">
+            <a:schemeClr val="lt1"/>
+          </a:fontRef>
+        </p:style>
+        <p:txBody>
+          <a:bodyPr rtlCol="0" anchor="ctr"/>
+          <a:lstStyle/>
+          <a:p>
+            <a:pPr algn="ctr"/>
+            <a:r>
+              <a:rPr lang="en-US" dirty="0"/>
+              <a:t>SR</a:t>
+            </a:r>
+          </a:p>
+        </p:txBody>
+      </p:sp>
+      <p:sp>
+        <p:nvSpPr>
+          <p:cNvPr id="227" name="Rechteck: abgerundete Ecken 226">
+            <a:extLst>
+              <a:ext uri="{FF2B5EF4-FFF2-40B4-BE49-F238E27FC236}">
+                <a16:creationId xmlns:a16="http://schemas.microsoft.com/office/drawing/2014/main" id="{866BC596-A322-5F86-8F5C-C217DD8B5CF2}"/>
+              </a:ext>
+            </a:extLst>
+          </p:cNvPr>
+          <p:cNvSpPr/>
+          <p:nvPr/>
+        </p:nvSpPr>
+        <p:spPr>
+          <a:xfrm>
+            <a:off x="6822664" y="6233976"/>
+            <a:ext cx="1440000" cy="432000"/>
+          </a:xfrm>
+          <a:prstGeom prst="roundRect">
+            <a:avLst/>
+          </a:prstGeom>
+          <a:solidFill>
+            <a:schemeClr val="accent3">
+              <a:alpha val="50000"/>
+            </a:schemeClr>
+          </a:solidFill>
+          <a:ln>
+            <a:noFill/>
+          </a:ln>
+        </p:spPr>
+        <p:style>
+          <a:lnRef idx="0">
+            <a:scrgbClr r="0" g="0" b="0"/>
+          </a:lnRef>
+          <a:fillRef idx="0">
+            <a:scrgbClr r="0" g="0" b="0"/>
+          </a:fillRef>
+          <a:effectRef idx="0">
+            <a:scrgbClr r="0" g="0" b="0"/>
+          </a:effectRef>
+          <a:fontRef idx="minor">
+            <a:schemeClr val="lt1"/>
+          </a:fontRef>
+        </p:style>
+        <p:txBody>
+          <a:bodyPr rtlCol="0" anchor="ctr"/>
+          <a:lstStyle/>
+          <a:p>
+            <a:pPr algn="ctr"/>
+            <a:r>
+              <a:rPr lang="en-US" dirty="0"/>
+              <a:t>Features</a:t>
+            </a:r>
+          </a:p>
+        </p:txBody>
+      </p:sp>
+      <p:sp>
+        <p:nvSpPr>
+          <p:cNvPr id="228" name="Rechteck: abgerundete Ecken 227">
+            <a:extLst>
+              <a:ext uri="{FF2B5EF4-FFF2-40B4-BE49-F238E27FC236}">
+                <a16:creationId xmlns:a16="http://schemas.microsoft.com/office/drawing/2014/main" id="{3E17145E-5861-5DFC-D9DE-270ED061A92F}"/>
+              </a:ext>
+            </a:extLst>
+          </p:cNvPr>
+          <p:cNvSpPr/>
+          <p:nvPr/>
+        </p:nvSpPr>
+        <p:spPr>
+          <a:xfrm>
+            <a:off x="9710710" y="6233976"/>
+            <a:ext cx="1440000" cy="432000"/>
+          </a:xfrm>
+          <a:prstGeom prst="roundRect">
+            <a:avLst/>
+          </a:prstGeom>
+          <a:solidFill>
+            <a:schemeClr val="accent3">
+              <a:alpha val="50000"/>
+            </a:schemeClr>
+          </a:solidFill>
+          <a:ln>
+            <a:noFill/>
+          </a:ln>
+        </p:spPr>
+        <p:style>
+          <a:lnRef idx="0">
+            <a:scrgbClr r="0" g="0" b="0"/>
+          </a:lnRef>
+          <a:fillRef idx="0">
+            <a:scrgbClr r="0" g="0" b="0"/>
+          </a:fillRef>
+          <a:effectRef idx="0">
+            <a:scrgbClr r="0" g="0" b="0"/>
+          </a:effectRef>
+          <a:fontRef idx="minor">
+            <a:schemeClr val="lt1"/>
+          </a:fontRef>
+        </p:style>
+        <p:txBody>
+          <a:bodyPr rtlCol="0" anchor="ctr"/>
+          <a:lstStyle/>
+          <a:p>
+            <a:pPr algn="ctr"/>
+            <a:r>
+              <a:rPr lang="en-US" dirty="0"/>
+              <a:t>Case Study</a:t>
+            </a:r>
+          </a:p>
+        </p:txBody>
+      </p:sp>
+      <p:cxnSp>
+        <p:nvCxnSpPr>
+          <p:cNvPr id="230" name="Gerade Verbindung mit Pfeil 229">
+            <a:extLst>
+              <a:ext uri="{FF2B5EF4-FFF2-40B4-BE49-F238E27FC236}">
+                <a16:creationId xmlns:a16="http://schemas.microsoft.com/office/drawing/2014/main" id="{BA2F8DFF-FF12-20FF-C645-18FD6BF9DC91}"/>
+              </a:ext>
+            </a:extLst>
+          </p:cNvPr>
+          <p:cNvCxnSpPr>
+            <a:stCxn id="225" idx="3"/>
+            <a:endCxn id="226" idx="1"/>
+          </p:cNvCxnSpPr>
+          <p:nvPr/>
+        </p:nvCxnSpPr>
+        <p:spPr>
+          <a:xfrm>
+            <a:off x="2496000" y="6449976"/>
+            <a:ext cx="1443332" cy="3024"/>
+          </a:xfrm>
+          <a:prstGeom prst="straightConnector1">
+            <a:avLst/>
+          </a:prstGeom>
+          <a:ln>
+            <a:tailEnd type="triangle"/>
+          </a:ln>
+        </p:spPr>
+        <p:style>
+          <a:lnRef idx="1">
+            <a:schemeClr val="accent3"/>
+          </a:lnRef>
+          <a:fillRef idx="0">
+            <a:schemeClr val="accent3"/>
+          </a:fillRef>
+          <a:effectRef idx="0">
+            <a:schemeClr val="accent3"/>
+          </a:effectRef>
+          <a:fontRef idx="minor">
+            <a:schemeClr val="tx1"/>
+          </a:fontRef>
+        </p:style>
+      </p:cxnSp>
+      <p:cxnSp>
+        <p:nvCxnSpPr>
+          <p:cNvPr id="231" name="Gerade Verbindung mit Pfeil 230">
+            <a:extLst>
+              <a:ext uri="{FF2B5EF4-FFF2-40B4-BE49-F238E27FC236}">
+                <a16:creationId xmlns:a16="http://schemas.microsoft.com/office/drawing/2014/main" id="{48922619-CE9B-EA0E-DED9-A03906FF1124}"/>
+              </a:ext>
+            </a:extLst>
+          </p:cNvPr>
+          <p:cNvCxnSpPr>
+            <a:cxnSpLocks/>
+            <a:stCxn id="226" idx="3"/>
+            <a:endCxn id="227" idx="1"/>
+          </p:cNvCxnSpPr>
+          <p:nvPr/>
+        </p:nvCxnSpPr>
+        <p:spPr>
+          <a:xfrm flipV="1">
+            <a:off x="5379332" y="6449976"/>
+            <a:ext cx="1443332" cy="3024"/>
+          </a:xfrm>
+          <a:prstGeom prst="straightConnector1">
+            <a:avLst/>
+          </a:prstGeom>
+          <a:ln>
+            <a:tailEnd type="triangle"/>
+          </a:ln>
+        </p:spPr>
+        <p:style>
+          <a:lnRef idx="1">
+            <a:schemeClr val="accent3"/>
+          </a:lnRef>
+          <a:fillRef idx="0">
+            <a:schemeClr val="accent3"/>
+          </a:fillRef>
+          <a:effectRef idx="0">
+            <a:schemeClr val="accent3"/>
+          </a:effectRef>
+          <a:fontRef idx="minor">
+            <a:schemeClr val="tx1"/>
+          </a:fontRef>
+        </p:style>
+      </p:cxnSp>
+      <p:cxnSp>
+        <p:nvCxnSpPr>
+          <p:cNvPr id="234" name="Gerade Verbindung mit Pfeil 233">
+            <a:extLst>
+              <a:ext uri="{FF2B5EF4-FFF2-40B4-BE49-F238E27FC236}">
+                <a16:creationId xmlns:a16="http://schemas.microsoft.com/office/drawing/2014/main" id="{446F17BC-86BE-C85C-6FE5-6490403B7542}"/>
+              </a:ext>
+            </a:extLst>
+          </p:cNvPr>
+          <p:cNvCxnSpPr>
+            <a:cxnSpLocks/>
+            <a:stCxn id="227" idx="3"/>
+            <a:endCxn id="228" idx="1"/>
+          </p:cNvCxnSpPr>
+          <p:nvPr/>
+        </p:nvCxnSpPr>
+        <p:spPr>
+          <a:xfrm>
+            <a:off x="8262664" y="6449976"/>
+            <a:ext cx="1448046" cy="0"/>
+          </a:xfrm>
+          <a:prstGeom prst="straightConnector1">
+            <a:avLst/>
+          </a:prstGeom>
+          <a:ln>
+            <a:tailEnd type="triangle"/>
+          </a:ln>
+        </p:spPr>
+        <p:style>
+          <a:lnRef idx="1">
+            <a:schemeClr val="accent3"/>
+          </a:lnRef>
+          <a:fillRef idx="0">
+            <a:schemeClr val="accent3"/>
+          </a:fillRef>
+          <a:effectRef idx="0">
+            <a:schemeClr val="accent3"/>
+          </a:effectRef>
+          <a:fontRef idx="minor">
+            <a:schemeClr val="tx1"/>
+          </a:fontRef>
+        </p:style>
+      </p:cxnSp>
+      <p:sp>
+        <p:nvSpPr>
+          <p:cNvPr id="237" name="Rechteck: abgerundete Ecken 236">
+            <a:extLst>
+              <a:ext uri="{FF2B5EF4-FFF2-40B4-BE49-F238E27FC236}">
+                <a16:creationId xmlns:a16="http://schemas.microsoft.com/office/drawing/2014/main" id="{57CDCF9C-2408-9A14-0746-822C64B27D81}"/>
+              </a:ext>
+            </a:extLst>
+          </p:cNvPr>
+          <p:cNvSpPr/>
+          <p:nvPr/>
+        </p:nvSpPr>
+        <p:spPr>
+          <a:xfrm>
+            <a:off x="2802692" y="6147539"/>
+            <a:ext cx="825235" cy="210529"/>
+          </a:xfrm>
+          <a:prstGeom prst="roundRect">
+            <a:avLst/>
+          </a:prstGeom>
+          <a:solidFill>
+            <a:schemeClr val="accent3">
+              <a:alpha val="50000"/>
+            </a:schemeClr>
+          </a:solidFill>
+          <a:ln>
+            <a:noFill/>
+          </a:ln>
+        </p:spPr>
+        <p:style>
+          <a:lnRef idx="0">
+            <a:scrgbClr r="0" g="0" b="0"/>
+          </a:lnRef>
+          <a:fillRef idx="0">
+            <a:scrgbClr r="0" g="0" b="0"/>
+          </a:fillRef>
+          <a:effectRef idx="0">
+            <a:scrgbClr r="0" g="0" b="0"/>
+          </a:effectRef>
+          <a:fontRef idx="minor">
+            <a:schemeClr val="lt1"/>
+          </a:fontRef>
+        </p:style>
+        <p:txBody>
+          <a:bodyPr rtlCol="0" anchor="ctr"/>
+          <a:lstStyle/>
+          <a:p>
+            <a:pPr algn="ctr"/>
+            <a:r>
+              <a:rPr lang="en-US" sz="1400" dirty="0"/>
+              <a:t>derive</a:t>
+            </a:r>
+            <a:endParaRPr lang="en-US" dirty="0"/>
+          </a:p>
+        </p:txBody>
+      </p:sp>
+      <p:sp>
+        <p:nvSpPr>
+          <p:cNvPr id="238" name="Rechteck: abgerundete Ecken 237">
+            <a:extLst>
+              <a:ext uri="{FF2B5EF4-FFF2-40B4-BE49-F238E27FC236}">
+                <a16:creationId xmlns:a16="http://schemas.microsoft.com/office/drawing/2014/main" id="{96D7E9B4-E743-8CD0-9EE4-A329B6633008}"/>
+              </a:ext>
+            </a:extLst>
+          </p:cNvPr>
+          <p:cNvSpPr/>
+          <p:nvPr/>
+        </p:nvSpPr>
+        <p:spPr>
+          <a:xfrm>
+            <a:off x="5636376" y="6147539"/>
+            <a:ext cx="919248" cy="216576"/>
+          </a:xfrm>
+          <a:prstGeom prst="roundRect">
+            <a:avLst/>
+          </a:prstGeom>
+          <a:solidFill>
+            <a:schemeClr val="accent3">
+              <a:alpha val="50000"/>
+            </a:schemeClr>
+          </a:solidFill>
+          <a:ln>
+            <a:noFill/>
+          </a:ln>
+        </p:spPr>
+        <p:style>
+          <a:lnRef idx="0">
+            <a:scrgbClr r="0" g="0" b="0"/>
+          </a:lnRef>
+          <a:fillRef idx="0">
+            <a:scrgbClr r="0" g="0" b="0"/>
+          </a:fillRef>
+          <a:effectRef idx="0">
+            <a:scrgbClr r="0" g="0" b="0"/>
+          </a:effectRef>
+          <a:fontRef idx="minor">
+            <a:schemeClr val="lt1"/>
+          </a:fontRef>
+        </p:style>
+        <p:txBody>
+          <a:bodyPr rtlCol="0" anchor="ctr"/>
+          <a:lstStyle/>
+          <a:p>
+            <a:pPr algn="ctr"/>
+            <a:r>
+              <a:rPr lang="en-US" sz="1400" dirty="0"/>
+              <a:t>realize</a:t>
+            </a:r>
+            <a:endParaRPr lang="en-US" dirty="0"/>
+          </a:p>
+        </p:txBody>
+      </p:sp>
+      <p:sp>
+        <p:nvSpPr>
+          <p:cNvPr id="239" name="Rechteck: abgerundete Ecken 238">
+            <a:extLst>
+              <a:ext uri="{FF2B5EF4-FFF2-40B4-BE49-F238E27FC236}">
+                <a16:creationId xmlns:a16="http://schemas.microsoft.com/office/drawing/2014/main" id="{3C77E769-E91D-CC32-07ED-332B786FD70B}"/>
+              </a:ext>
+            </a:extLst>
+          </p:cNvPr>
+          <p:cNvSpPr/>
+          <p:nvPr/>
+        </p:nvSpPr>
+        <p:spPr>
+          <a:xfrm>
+            <a:off x="8531286" y="6147539"/>
+            <a:ext cx="919248" cy="216576"/>
+          </a:xfrm>
+          <a:prstGeom prst="roundRect">
+            <a:avLst/>
+          </a:prstGeom>
+          <a:solidFill>
+            <a:schemeClr val="accent3">
+              <a:alpha val="50000"/>
+            </a:schemeClr>
+          </a:solidFill>
+          <a:ln>
+            <a:noFill/>
+          </a:ln>
+        </p:spPr>
+        <p:style>
+          <a:lnRef idx="0">
+            <a:scrgbClr r="0" g="0" b="0"/>
+          </a:lnRef>
+          <a:fillRef idx="0">
+            <a:scrgbClr r="0" g="0" b="0"/>
+          </a:fillRef>
+          <a:effectRef idx="0">
+            <a:scrgbClr r="0" g="0" b="0"/>
+          </a:effectRef>
+          <a:fontRef idx="minor">
+            <a:schemeClr val="lt1"/>
+          </a:fontRef>
+        </p:style>
+        <p:txBody>
+          <a:bodyPr rtlCol="0" anchor="ctr"/>
+          <a:lstStyle/>
+          <a:p>
+            <a:pPr algn="ctr"/>
+            <a:r>
+              <a:rPr lang="en-US" sz="1400" dirty="0"/>
+              <a:t>validate</a:t>
+            </a:r>
+          </a:p>
+        </p:txBody>
+      </p:sp>
+      <p:cxnSp>
+        <p:nvCxnSpPr>
+          <p:cNvPr id="240" name="Gerader Verbinder 239">
+            <a:extLst>
+              <a:ext uri="{FF2B5EF4-FFF2-40B4-BE49-F238E27FC236}">
+                <a16:creationId xmlns:a16="http://schemas.microsoft.com/office/drawing/2014/main" id="{DAED1823-310A-3CAC-7691-664B65431DAB}"/>
+              </a:ext>
+            </a:extLst>
+          </p:cNvPr>
+          <p:cNvCxnSpPr>
+            <a:cxnSpLocks/>
+          </p:cNvCxnSpPr>
+          <p:nvPr/>
+        </p:nvCxnSpPr>
+        <p:spPr>
+          <a:xfrm>
+            <a:off x="695999" y="5801976"/>
+            <a:ext cx="10799999" cy="0"/>
+          </a:xfrm>
+          <a:prstGeom prst="line">
+            <a:avLst/>
+          </a:prstGeom>
+          <a:ln w="12700">
+            <a:solidFill>
+              <a:schemeClr val="tx1">
+                <a:lumMod val="50000"/>
+                <a:lumOff val="50000"/>
+              </a:schemeClr>
+            </a:solidFill>
+            <a:prstDash val="solid"/>
+          </a:ln>
+        </p:spPr>
+        <p:style>
+          <a:lnRef idx="2">
+            <a:schemeClr val="accent3"/>
+          </a:lnRef>
+          <a:fillRef idx="0">
+            <a:schemeClr val="accent3"/>
+          </a:fillRef>
+          <a:effectRef idx="1">
+            <a:schemeClr val="accent3"/>
           </a:effectRef>
           <a:fontRef idx="minor">
             <a:schemeClr val="tx1"/>
